--- a/a7/build/out/u3/A7 3.01  Slides.pptx
+++ b/a7/build/out/u3/A7 3.01  Slides.pptx
@@ -7442,7 +7442,7 @@
         <p:spPr>
           <a:xfrm>
             <a:off x="1874519" y="1760220"/>
-            <a:ext cx="913130" cy="457200"/>
+            <a:ext cx="969771" cy="457200"/>
           </a:xfrm>
           <a:prstGeom prst="rect">
             <a:avLst/>
@@ -7484,7 +7484,7 @@
         </p:blipFill>
         <p:spPr>
           <a:xfrm>
-            <a:off x="2650490" y="1784604"/>
+            <a:off x="2707132" y="1784604"/>
             <a:ext cx="688848" cy="408432"/>
           </a:xfrm>
           <a:prstGeom prst="rect">
@@ -7501,7 +7501,7 @@
         <p:spPr>
           <a:xfrm>
             <a:off x="1874519" y="2372868"/>
-            <a:ext cx="6024880" cy="457200"/>
+            <a:ext cx="6285992" cy="457200"/>
           </a:xfrm>
           <a:prstGeom prst="rect">
             <a:avLst/>
@@ -7543,7 +7543,7 @@
         </p:blipFill>
         <p:spPr>
           <a:xfrm>
-            <a:off x="7762240" y="2397252"/>
+            <a:off x="8023352" y="2397252"/>
             <a:ext cx="688848" cy="408432"/>
           </a:xfrm>
           <a:prstGeom prst="rect">
@@ -7559,8 +7559,8 @@
         </p:nvSpPr>
         <p:spPr>
           <a:xfrm>
-            <a:off x="8451088" y="2372868"/>
-            <a:ext cx="328929" cy="457200"/>
+            <a:off x="8712200" y="2372868"/>
+            <a:ext cx="362204" cy="457200"/>
           </a:xfrm>
           <a:prstGeom prst="rect">
             <a:avLst/>
@@ -7595,7 +7595,7 @@
         <p:spPr>
           <a:xfrm>
             <a:off x="1874519" y="2985516"/>
-            <a:ext cx="1935480" cy="457200"/>
+            <a:ext cx="2033015" cy="457200"/>
           </a:xfrm>
           <a:prstGeom prst="rect">
             <a:avLst/>
@@ -7637,7 +7637,7 @@
         </p:blipFill>
         <p:spPr>
           <a:xfrm>
-            <a:off x="3672840" y="3098292"/>
+            <a:off x="3770375" y="3098292"/>
             <a:ext cx="1402080" cy="231648"/>
           </a:xfrm>
           <a:prstGeom prst="rect">
@@ -7654,7 +7654,7 @@
         <p:spPr>
           <a:xfrm>
             <a:off x="1874519" y="3602736"/>
-            <a:ext cx="2373630" cy="457200"/>
+            <a:ext cx="2488692" cy="457200"/>
           </a:xfrm>
           <a:prstGeom prst="rect">
             <a:avLst/>
@@ -7696,7 +7696,7 @@
         </p:blipFill>
         <p:spPr>
           <a:xfrm>
-            <a:off x="4110990" y="3621024"/>
+            <a:off x="4226051" y="3621024"/>
             <a:ext cx="542544" cy="420624"/>
           </a:xfrm>
           <a:prstGeom prst="rect">
@@ -12517,7 +12517,7 @@
         <p:spPr>
           <a:xfrm>
             <a:off x="1874519" y="1760220"/>
-            <a:ext cx="913130" cy="457200"/>
+            <a:ext cx="969771" cy="457200"/>
           </a:xfrm>
           <a:prstGeom prst="rect">
             <a:avLst/>
@@ -12559,7 +12559,7 @@
         </p:blipFill>
         <p:spPr>
           <a:xfrm>
-            <a:off x="2650490" y="1784604"/>
+            <a:off x="2707132" y="1784604"/>
             <a:ext cx="688848" cy="408432"/>
           </a:xfrm>
           <a:prstGeom prst="rect">
@@ -12575,8 +12575,8 @@
         </p:nvSpPr>
         <p:spPr>
           <a:xfrm>
-            <a:off x="3887977" y="1760220"/>
-            <a:ext cx="328929" cy="457200"/>
+            <a:off x="3944619" y="1760220"/>
+            <a:ext cx="379729" cy="457200"/>
           </a:xfrm>
           <a:prstGeom prst="rect">
             <a:avLst/>
@@ -12611,7 +12611,7 @@
         <p:spPr>
           <a:xfrm>
             <a:off x="1874519" y="2372868"/>
-            <a:ext cx="6024880" cy="457200"/>
+            <a:ext cx="6285992" cy="457200"/>
           </a:xfrm>
           <a:prstGeom prst="rect">
             <a:avLst/>
@@ -12653,7 +12653,7 @@
         </p:blipFill>
         <p:spPr>
           <a:xfrm>
-            <a:off x="7762240" y="2397252"/>
+            <a:off x="8023352" y="2397252"/>
             <a:ext cx="688848" cy="408432"/>
           </a:xfrm>
           <a:prstGeom prst="rect">
@@ -12669,8 +12669,8 @@
         </p:nvSpPr>
         <p:spPr>
           <a:xfrm>
-            <a:off x="8451088" y="2372868"/>
-            <a:ext cx="328929" cy="457200"/>
+            <a:off x="8712200" y="2372868"/>
+            <a:ext cx="362204" cy="457200"/>
           </a:xfrm>
           <a:prstGeom prst="rect">
             <a:avLst/>
@@ -12704,8 +12704,8 @@
         </p:nvSpPr>
         <p:spPr>
           <a:xfrm>
-            <a:off x="9191497" y="2372868"/>
-            <a:ext cx="1205230" cy="457200"/>
+            <a:off x="9485884" y="2372868"/>
+            <a:ext cx="1396238" cy="457200"/>
           </a:xfrm>
           <a:prstGeom prst="rect">
             <a:avLst/>
@@ -12740,7 +12740,7 @@
         <p:spPr>
           <a:xfrm>
             <a:off x="1874519" y="2985516"/>
-            <a:ext cx="1935480" cy="457200"/>
+            <a:ext cx="2033015" cy="457200"/>
           </a:xfrm>
           <a:prstGeom prst="rect">
             <a:avLst/>
@@ -12782,7 +12782,7 @@
         </p:blipFill>
         <p:spPr>
           <a:xfrm>
-            <a:off x="3672840" y="3098292"/>
+            <a:off x="3770375" y="3098292"/>
             <a:ext cx="1402080" cy="231648"/>
           </a:xfrm>
           <a:prstGeom prst="rect">
@@ -12798,8 +12798,8 @@
         </p:nvSpPr>
         <p:spPr>
           <a:xfrm>
-            <a:off x="5623559" y="2985516"/>
-            <a:ext cx="913130" cy="457200"/>
+            <a:off x="5721095" y="2985516"/>
+            <a:ext cx="1057402" cy="457200"/>
           </a:xfrm>
           <a:prstGeom prst="rect">
             <a:avLst/>
@@ -12834,7 +12834,7 @@
         <p:spPr>
           <a:xfrm>
             <a:off x="1874519" y="3602736"/>
-            <a:ext cx="2373630" cy="457200"/>
+            <a:ext cx="2488692" cy="457200"/>
           </a:xfrm>
           <a:prstGeom prst="rect">
             <a:avLst/>
@@ -12876,7 +12876,7 @@
         </p:blipFill>
         <p:spPr>
           <a:xfrm>
-            <a:off x="4110990" y="3621024"/>
+            <a:off x="4226051" y="3621024"/>
             <a:ext cx="542544" cy="420624"/>
           </a:xfrm>
           <a:prstGeom prst="rect">
@@ -12900,7 +12900,7 @@
         </p:blipFill>
         <p:spPr>
           <a:xfrm>
-            <a:off x="5202173" y="3621024"/>
+            <a:off x="5317236" y="3621024"/>
             <a:ext cx="118872" cy="426720"/>
           </a:xfrm>
           <a:prstGeom prst="rect">
@@ -13961,8 +13961,8 @@
         </p:nvSpPr>
         <p:spPr>
           <a:xfrm>
-            <a:off x="2671826" y="2746579"/>
-            <a:ext cx="2329180" cy="457200"/>
+            <a:off x="2548635" y="2746579"/>
+            <a:ext cx="2442464" cy="457200"/>
           </a:xfrm>
           <a:prstGeom prst="rect">
             <a:avLst/>
@@ -14004,7 +14004,7 @@
         </p:blipFill>
         <p:spPr>
           <a:xfrm>
-            <a:off x="4863845" y="2769439"/>
+            <a:off x="4853939" y="2769439"/>
             <a:ext cx="1938528" cy="411480"/>
           </a:xfrm>
           <a:prstGeom prst="rect">
@@ -14020,8 +14020,8 @@
         </p:nvSpPr>
         <p:spPr>
           <a:xfrm>
-            <a:off x="6802373" y="2746579"/>
-            <a:ext cx="2824479" cy="457200"/>
+            <a:off x="6792467" y="2746579"/>
+            <a:ext cx="2957576" cy="457200"/>
           </a:xfrm>
           <a:prstGeom prst="rect">
             <a:avLst/>
@@ -14423,8 +14423,8 @@
         </p:nvSpPr>
         <p:spPr>
           <a:xfrm>
-            <a:off x="2671826" y="2655139"/>
-            <a:ext cx="2329180" cy="457200"/>
+            <a:off x="2548635" y="2655139"/>
+            <a:ext cx="2442464" cy="457200"/>
           </a:xfrm>
           <a:prstGeom prst="rect">
             <a:avLst/>
@@ -14466,7 +14466,7 @@
         </p:blipFill>
         <p:spPr>
           <a:xfrm>
-            <a:off x="4863845" y="2677999"/>
+            <a:off x="4853939" y="2677999"/>
             <a:ext cx="1938528" cy="411480"/>
           </a:xfrm>
           <a:prstGeom prst="rect">
@@ -14482,8 +14482,8 @@
         </p:nvSpPr>
         <p:spPr>
           <a:xfrm>
-            <a:off x="6802373" y="2655139"/>
-            <a:ext cx="2824479" cy="457200"/>
+            <a:off x="6792467" y="2655139"/>
+            <a:ext cx="2957576" cy="457200"/>
           </a:xfrm>
           <a:prstGeom prst="rect">
             <a:avLst/>
@@ -15981,7 +15981,7 @@
         </p:blipFill>
         <p:spPr>
           <a:xfrm>
-            <a:off x="3067304" y="4623816"/>
+            <a:off x="3027171" y="4623816"/>
             <a:ext cx="2410968" cy="344424"/>
           </a:xfrm>
           <a:prstGeom prst="rect">
@@ -15997,8 +15997,8 @@
         </p:nvSpPr>
         <p:spPr>
           <a:xfrm>
-            <a:off x="5478272" y="4567428"/>
-            <a:ext cx="1503680" cy="457200"/>
+            <a:off x="5438140" y="4567428"/>
+            <a:ext cx="1583944" cy="457200"/>
           </a:xfrm>
           <a:prstGeom prst="rect">
             <a:avLst/>
@@ -16040,7 +16040,7 @@
         </p:blipFill>
         <p:spPr>
           <a:xfrm>
-            <a:off x="6844792" y="4535424"/>
+            <a:off x="6884924" y="4535424"/>
             <a:ext cx="2249424" cy="521207"/>
           </a:xfrm>
           <a:prstGeom prst="rect">
@@ -16421,7 +16421,7 @@
         </p:blipFill>
         <p:spPr>
           <a:xfrm>
-            <a:off x="1538478" y="3029711"/>
+            <a:off x="1415796" y="3029711"/>
             <a:ext cx="3590544" cy="411480"/>
           </a:xfrm>
           <a:prstGeom prst="rect">
@@ -16437,8 +16437,8 @@
         </p:nvSpPr>
         <p:spPr>
           <a:xfrm>
-            <a:off x="5129022" y="3006852"/>
-            <a:ext cx="5631180" cy="457200"/>
+            <a:off x="5006340" y="3006852"/>
+            <a:ext cx="5876544" cy="457200"/>
           </a:xfrm>
           <a:prstGeom prst="rect">
             <a:avLst/>
@@ -16473,7 +16473,7 @@
         <p:spPr>
           <a:xfrm>
             <a:off x="987552" y="3738371"/>
-            <a:ext cx="3103880" cy="457200"/>
+            <a:ext cx="3598672" cy="457200"/>
           </a:xfrm>
           <a:prstGeom prst="rect">
             <a:avLst/>
@@ -16515,7 +16515,7 @@
         </p:blipFill>
         <p:spPr>
           <a:xfrm>
-            <a:off x="3954272" y="3814572"/>
+            <a:off x="4449064" y="3814572"/>
             <a:ext cx="2313432" cy="304800"/>
           </a:xfrm>
           <a:prstGeom prst="rect">
@@ -16532,7 +16532,7 @@
         <p:spPr>
           <a:xfrm>
             <a:off x="987552" y="4405883"/>
-            <a:ext cx="3103880" cy="457200"/>
+            <a:ext cx="3248152" cy="457200"/>
           </a:xfrm>
           <a:prstGeom prst="rect">
             <a:avLst/>
@@ -16574,7 +16574,7 @@
         </p:blipFill>
         <p:spPr>
           <a:xfrm>
-            <a:off x="3954272" y="4457699"/>
+            <a:off x="4098544" y="4457699"/>
             <a:ext cx="3931920" cy="353568"/>
           </a:xfrm>
           <a:prstGeom prst="rect">
@@ -16913,7 +16913,7 @@
         <p:spPr>
           <a:xfrm>
             <a:off x="987552" y="3049524"/>
-            <a:ext cx="3249929" cy="457200"/>
+            <a:ext cx="3768089" cy="457200"/>
           </a:xfrm>
           <a:prstGeom prst="rect">
             <a:avLst/>
@@ -16955,7 +16955,7 @@
         </p:blipFill>
         <p:spPr>
           <a:xfrm>
-            <a:off x="4100322" y="3102864"/>
+            <a:off x="4618482" y="3102864"/>
             <a:ext cx="2420112" cy="350520"/>
           </a:xfrm>
           <a:prstGeom prst="rect">
@@ -17031,7 +17031,7 @@
         <p:spPr>
           <a:xfrm>
             <a:off x="4724400" y="4448555"/>
-            <a:ext cx="1497330" cy="457200"/>
+            <a:ext cx="1577340" cy="457200"/>
           </a:xfrm>
           <a:prstGeom prst="rect">
             <a:avLst/>
@@ -17073,7 +17073,7 @@
         </p:blipFill>
         <p:spPr>
           <a:xfrm>
-            <a:off x="6084570" y="4471416"/>
+            <a:off x="6164580" y="4471416"/>
             <a:ext cx="2840736" cy="411480"/>
           </a:xfrm>
           <a:prstGeom prst="rect">
@@ -18203,7 +18203,7 @@
         <p:spPr>
           <a:xfrm>
             <a:off x="987552" y="4128515"/>
-            <a:ext cx="2957830" cy="457200"/>
+            <a:ext cx="3429254" cy="457200"/>
           </a:xfrm>
           <a:prstGeom prst="rect">
             <a:avLst/>
@@ -18245,7 +18245,7 @@
         </p:blipFill>
         <p:spPr>
           <a:xfrm>
-            <a:off x="3808222" y="4183380"/>
+            <a:off x="4279646" y="4183380"/>
             <a:ext cx="1837943" cy="347472"/>
           </a:xfrm>
           <a:prstGeom prst="rect">
@@ -18261,8 +18261,8 @@
         </p:nvSpPr>
         <p:spPr>
           <a:xfrm>
-            <a:off x="5646166" y="4128515"/>
-            <a:ext cx="2957830" cy="457200"/>
+            <a:off x="6117590" y="4128515"/>
+            <a:ext cx="3429254" cy="457200"/>
           </a:xfrm>
           <a:prstGeom prst="rect">
             <a:avLst/>
@@ -18304,7 +18304,7 @@
         </p:blipFill>
         <p:spPr>
           <a:xfrm>
-            <a:off x="8466836" y="4186428"/>
+            <a:off x="9409684" y="4186428"/>
             <a:ext cx="972311" cy="341376"/>
           </a:xfrm>
           <a:prstGeom prst="rect">

--- a/a7/build/out/u3/A7 3.01  Slides.pptx
+++ b/a7/build/out/u3/A7 3.01  Slides.pptx
@@ -39,6 +39,7 @@
     <p:sldId id="287" r:id="rId38"/>
     <p:sldId id="288" r:id="rId39"/>
     <p:sldId id="289" r:id="rId40"/>
+    <p:sldId id="290" r:id="rId41"/>
   </p:sldIdLst>
   <p:sldSz cx="12191969" cy="6858000" type="screen4x3"/>
   <p:notesSz cx="6858000" cy="9144000"/>
@@ -6710,9 +6711,44 @@
           </a:p>
         </p:txBody>
       </p:sp>
+      <p:sp>
+        <p:nvSpPr>
+          <p:cNvPr id="9" name="TextBox 8"/>
+          <p:cNvSpPr txBox="1"/>
+          <p:nvPr/>
+        </p:nvSpPr>
+        <p:spPr>
+          <a:xfrm>
+            <a:off x="1719072" y="2171700"/>
+            <a:ext cx="6563360" cy="457200"/>
+          </a:xfrm>
+          <a:prstGeom prst="rect">
+            <a:avLst/>
+          </a:prstGeom>
+          <a:noFill/>
+        </p:spPr>
+        <p:txBody>
+          <a:bodyPr wrap="none" lIns="45720" rIns="45720" tIns="18288" bIns="18288" anchor="ctr">
+            <a:spAutoFit/>
+          </a:bodyPr>
+          <a:lstStyle/>
+          <a:p>
+            <a:pPr algn="l"/>
+            <a:r>
+              <a:rPr sz="2600" b="0" i="0">
+                <a:solidFill>
+                  <a:srgbClr val="1A1A1A"/>
+                </a:solidFill>
+                <a:latin typeface="Century Schoolbook"/>
+              </a:rPr>
+              <a:t>A tile pattern grows by a factor of  </a:t>
+            </a:r>
+          </a:p>
+        </p:txBody>
+      </p:sp>
       <p:pic>
         <p:nvPicPr>
-          <p:cNvPr id="9" name="Picture 8" descr="6ed2e9f8ae692b4f.png"/>
+          <p:cNvPr id="10" name="Picture 9" descr="c0129e6e5f8235a4.png"/>
           <p:cNvPicPr>
             <a:picLocks noChangeAspect="1"/>
           </p:cNvPicPr>
@@ -6726,8 +6762,8 @@
         </p:blipFill>
         <p:spPr>
           <a:xfrm>
-            <a:off x="5494020" y="2194560"/>
-            <a:ext cx="1173480" cy="426720"/>
+            <a:off x="8145272" y="2231136"/>
+            <a:ext cx="335280" cy="338328"/>
           </a:xfrm>
           <a:prstGeom prst="rect">
             <a:avLst/>
@@ -6736,7 +6772,171 @@
       </p:pic>
       <p:sp>
         <p:nvSpPr>
-          <p:cNvPr id="10" name="TextBox 9"/>
+          <p:cNvPr id="11" name="TextBox 10"/>
+          <p:cNvSpPr txBox="1"/>
+          <p:nvPr/>
+        </p:nvSpPr>
+        <p:spPr>
+          <a:xfrm>
+            <a:off x="8480552" y="2171700"/>
+            <a:ext cx="2099056" cy="457200"/>
+          </a:xfrm>
+          <a:prstGeom prst="rect">
+            <a:avLst/>
+          </a:prstGeom>
+          <a:noFill/>
+        </p:spPr>
+        <p:txBody>
+          <a:bodyPr wrap="none" lIns="45720" rIns="45720" tIns="18288" bIns="18288" anchor="ctr">
+            <a:spAutoFit/>
+          </a:bodyPr>
+          <a:lstStyle/>
+          <a:p>
+            <a:pPr algn="l"/>
+            <a:r>
+              <a:rPr sz="2600" b="0" i="0">
+                <a:solidFill>
+                  <a:srgbClr val="1A1A1A"/>
+                </a:solidFill>
+                <a:latin typeface="Century Schoolbook"/>
+              </a:rPr>
+              <a:t>  one week,</a:t>
+            </a:r>
+          </a:p>
+        </p:txBody>
+      </p:sp>
+      <p:sp>
+        <p:nvSpPr>
+          <p:cNvPr id="12" name="TextBox 11"/>
+          <p:cNvSpPr txBox="1"/>
+          <p:nvPr/>
+        </p:nvSpPr>
+        <p:spPr>
+          <a:xfrm>
+            <a:off x="1633219" y="2857500"/>
+            <a:ext cx="1583944" cy="457200"/>
+          </a:xfrm>
+          <a:prstGeom prst="rect">
+            <a:avLst/>
+          </a:prstGeom>
+          <a:noFill/>
+        </p:spPr>
+        <p:txBody>
+          <a:bodyPr wrap="none" lIns="45720" rIns="45720" tIns="18288" bIns="18288" anchor="ctr">
+            <a:spAutoFit/>
+          </a:bodyPr>
+          <a:lstStyle/>
+          <a:p>
+            <a:pPr algn="l"/>
+            <a:r>
+              <a:rPr sz="2600" b="0" i="0">
+                <a:solidFill>
+                  <a:srgbClr val="1A1A1A"/>
+                </a:solidFill>
+                <a:latin typeface="Century Schoolbook"/>
+              </a:rPr>
+              <a:t>and by  </a:t>
+            </a:r>
+          </a:p>
+        </p:txBody>
+      </p:sp>
+      <p:pic>
+        <p:nvPicPr>
+          <p:cNvPr id="13" name="Picture 12" descr="1f70e4cbe52b3701.png"/>
+          <p:cNvPicPr>
+            <a:picLocks noChangeAspect="1"/>
+          </p:cNvPicPr>
+          <p:nvPr/>
+        </p:nvPicPr>
+        <p:blipFill>
+          <a:blip r:embed="rId3"/>
+          <a:stretch>
+            <a:fillRect/>
+          </a:stretch>
+        </p:blipFill>
+        <p:spPr>
+          <a:xfrm>
+            <a:off x="3080004" y="2918460"/>
+            <a:ext cx="335280" cy="335280"/>
+          </a:xfrm>
+          <a:prstGeom prst="rect">
+            <a:avLst/>
+          </a:prstGeom>
+        </p:spPr>
+      </p:pic>
+      <p:sp>
+        <p:nvSpPr>
+          <p:cNvPr id="14" name="TextBox 13"/>
+          <p:cNvSpPr txBox="1"/>
+          <p:nvPr/>
+        </p:nvSpPr>
+        <p:spPr>
+          <a:xfrm>
+            <a:off x="3415284" y="2857500"/>
+            <a:ext cx="7250176" cy="457200"/>
+          </a:xfrm>
+          <a:prstGeom prst="rect">
+            <a:avLst/>
+          </a:prstGeom>
+          <a:noFill/>
+        </p:spPr>
+        <p:txBody>
+          <a:bodyPr wrap="none" lIns="45720" rIns="45720" tIns="18288" bIns="18288" anchor="ctr">
+            <a:spAutoFit/>
+          </a:bodyPr>
+          <a:lstStyle/>
+          <a:p>
+            <a:pPr algn="l"/>
+            <a:r>
+              <a:rPr sz="2600" b="0" i="0">
+                <a:solidFill>
+                  <a:srgbClr val="1A1A1A"/>
+                </a:solidFill>
+                <a:latin typeface="Century Schoolbook"/>
+              </a:rPr>
+              <a:t>  the next week. It started with 9 tiles.</a:t>
+            </a:r>
+          </a:p>
+        </p:txBody>
+      </p:sp>
+      <p:sp>
+        <p:nvSpPr>
+          <p:cNvPr id="15" name="TextBox 14"/>
+          <p:cNvSpPr txBox="1"/>
+          <p:nvPr/>
+        </p:nvSpPr>
+        <p:spPr>
+          <a:xfrm>
+            <a:off x="777240" y="3566160"/>
+            <a:ext cx="10607040" cy="411480"/>
+          </a:xfrm>
+          <a:prstGeom prst="rect">
+            <a:avLst/>
+          </a:prstGeom>
+          <a:noFill/>
+        </p:spPr>
+        <p:txBody>
+          <a:bodyPr wrap="square" lIns="45720" rIns="45720" tIns="18288" bIns="18288" anchor="t">
+            <a:spAutoFit/>
+          </a:bodyPr>
+          <a:lstStyle/>
+          <a:p>
+            <a:pPr algn="ctr"/>
+            <a:r>
+              <a:rPr sz="2300" b="0" i="0">
+                <a:solidFill>
+                  <a:srgbClr val="1A1A1A"/>
+                </a:solidFill>
+                <a:latin typeface="Century Schoolbook"/>
+              </a:rPr>
+              <a:t>Write the two-week growth factor as one power, then find its value.</a:t>
+            </a:r>
+          </a:p>
+        </p:txBody>
+      </p:sp>
+      <p:sp>
+        <p:nvSpPr>
+          <p:cNvPr id="16" name="TextBox 15"/>
           <p:cNvSpPr txBox="1"/>
           <p:nvPr/>
         </p:nvSpPr>
@@ -6771,7 +6971,7 @@
       </p:sp>
       <p:sp>
         <p:nvSpPr>
-          <p:cNvPr id="11" name="TextBox 10"/>
+          <p:cNvPr id="17" name="TextBox 16"/>
           <p:cNvSpPr txBox="1"/>
           <p:nvPr/>
         </p:nvSpPr>
@@ -7067,9 +7267,44 @@
           </a:p>
         </p:txBody>
       </p:sp>
+      <p:sp>
+        <p:nvSpPr>
+          <p:cNvPr id="9" name="TextBox 8"/>
+          <p:cNvSpPr txBox="1"/>
+          <p:nvPr/>
+        </p:nvSpPr>
+        <p:spPr>
+          <a:xfrm>
+            <a:off x="1719072" y="2080260"/>
+            <a:ext cx="6563360" cy="457200"/>
+          </a:xfrm>
+          <a:prstGeom prst="rect">
+            <a:avLst/>
+          </a:prstGeom>
+          <a:noFill/>
+        </p:spPr>
+        <p:txBody>
+          <a:bodyPr wrap="none" lIns="45720" rIns="45720" tIns="18288" bIns="18288" anchor="ctr">
+            <a:spAutoFit/>
+          </a:bodyPr>
+          <a:lstStyle/>
+          <a:p>
+            <a:pPr algn="l"/>
+            <a:r>
+              <a:rPr sz="2600" b="0" i="0">
+                <a:solidFill>
+                  <a:srgbClr val="1A1A1A"/>
+                </a:solidFill>
+                <a:latin typeface="Century Schoolbook"/>
+              </a:rPr>
+              <a:t>A tile pattern grows by a factor of  </a:t>
+            </a:r>
+          </a:p>
+        </p:txBody>
+      </p:sp>
       <p:pic>
         <p:nvPicPr>
-          <p:cNvPr id="9" name="Picture 8" descr="6ed2e9f8ae692b4f.png"/>
+          <p:cNvPr id="10" name="Picture 9" descr="c0129e6e5f8235a4.png"/>
           <p:cNvPicPr>
             <a:picLocks noChangeAspect="1"/>
           </p:cNvPicPr>
@@ -7083,8 +7318,8 @@
         </p:blipFill>
         <p:spPr>
           <a:xfrm>
-            <a:off x="5494020" y="2103120"/>
-            <a:ext cx="1173480" cy="426720"/>
+            <a:off x="8145272" y="2139696"/>
+            <a:ext cx="335280" cy="338328"/>
           </a:xfrm>
           <a:prstGeom prst="rect">
             <a:avLst/>
@@ -7093,13 +7328,177 @@
       </p:pic>
       <p:sp>
         <p:nvSpPr>
-          <p:cNvPr id="10" name="TextBox 9"/>
-          <p:cNvSpPr txBox="1"/>
-          <p:nvPr/>
-        </p:nvSpPr>
-        <p:spPr>
-          <a:xfrm>
-            <a:off x="1828800" y="2804160"/>
+          <p:cNvPr id="11" name="TextBox 10"/>
+          <p:cNvSpPr txBox="1"/>
+          <p:nvPr/>
+        </p:nvSpPr>
+        <p:spPr>
+          <a:xfrm>
+            <a:off x="8480552" y="2080260"/>
+            <a:ext cx="2099056" cy="457200"/>
+          </a:xfrm>
+          <a:prstGeom prst="rect">
+            <a:avLst/>
+          </a:prstGeom>
+          <a:noFill/>
+        </p:spPr>
+        <p:txBody>
+          <a:bodyPr wrap="none" lIns="45720" rIns="45720" tIns="18288" bIns="18288" anchor="ctr">
+            <a:spAutoFit/>
+          </a:bodyPr>
+          <a:lstStyle/>
+          <a:p>
+            <a:pPr algn="l"/>
+            <a:r>
+              <a:rPr sz="2600" b="0" i="0">
+                <a:solidFill>
+                  <a:srgbClr val="1A1A1A"/>
+                </a:solidFill>
+                <a:latin typeface="Century Schoolbook"/>
+              </a:rPr>
+              <a:t>  one week,</a:t>
+            </a:r>
+          </a:p>
+        </p:txBody>
+      </p:sp>
+      <p:sp>
+        <p:nvSpPr>
+          <p:cNvPr id="12" name="TextBox 11"/>
+          <p:cNvSpPr txBox="1"/>
+          <p:nvPr/>
+        </p:nvSpPr>
+        <p:spPr>
+          <a:xfrm>
+            <a:off x="1633219" y="2766060"/>
+            <a:ext cx="1583944" cy="457200"/>
+          </a:xfrm>
+          <a:prstGeom prst="rect">
+            <a:avLst/>
+          </a:prstGeom>
+          <a:noFill/>
+        </p:spPr>
+        <p:txBody>
+          <a:bodyPr wrap="none" lIns="45720" rIns="45720" tIns="18288" bIns="18288" anchor="ctr">
+            <a:spAutoFit/>
+          </a:bodyPr>
+          <a:lstStyle/>
+          <a:p>
+            <a:pPr algn="l"/>
+            <a:r>
+              <a:rPr sz="2600" b="0" i="0">
+                <a:solidFill>
+                  <a:srgbClr val="1A1A1A"/>
+                </a:solidFill>
+                <a:latin typeface="Century Schoolbook"/>
+              </a:rPr>
+              <a:t>and by  </a:t>
+            </a:r>
+          </a:p>
+        </p:txBody>
+      </p:sp>
+      <p:pic>
+        <p:nvPicPr>
+          <p:cNvPr id="13" name="Picture 12" descr="1f70e4cbe52b3701.png"/>
+          <p:cNvPicPr>
+            <a:picLocks noChangeAspect="1"/>
+          </p:cNvPicPr>
+          <p:nvPr/>
+        </p:nvPicPr>
+        <p:blipFill>
+          <a:blip r:embed="rId3"/>
+          <a:stretch>
+            <a:fillRect/>
+          </a:stretch>
+        </p:blipFill>
+        <p:spPr>
+          <a:xfrm>
+            <a:off x="3080004" y="2827019"/>
+            <a:ext cx="335280" cy="335280"/>
+          </a:xfrm>
+          <a:prstGeom prst="rect">
+            <a:avLst/>
+          </a:prstGeom>
+        </p:spPr>
+      </p:pic>
+      <p:sp>
+        <p:nvSpPr>
+          <p:cNvPr id="14" name="TextBox 13"/>
+          <p:cNvSpPr txBox="1"/>
+          <p:nvPr/>
+        </p:nvSpPr>
+        <p:spPr>
+          <a:xfrm>
+            <a:off x="3415284" y="2766060"/>
+            <a:ext cx="7250176" cy="457200"/>
+          </a:xfrm>
+          <a:prstGeom prst="rect">
+            <a:avLst/>
+          </a:prstGeom>
+          <a:noFill/>
+        </p:spPr>
+        <p:txBody>
+          <a:bodyPr wrap="none" lIns="45720" rIns="45720" tIns="18288" bIns="18288" anchor="ctr">
+            <a:spAutoFit/>
+          </a:bodyPr>
+          <a:lstStyle/>
+          <a:p>
+            <a:pPr algn="l"/>
+            <a:r>
+              <a:rPr sz="2600" b="0" i="0">
+                <a:solidFill>
+                  <a:srgbClr val="1A1A1A"/>
+                </a:solidFill>
+                <a:latin typeface="Century Schoolbook"/>
+              </a:rPr>
+              <a:t>  the next week. It started with 9 tiles.</a:t>
+            </a:r>
+          </a:p>
+        </p:txBody>
+      </p:sp>
+      <p:sp>
+        <p:nvSpPr>
+          <p:cNvPr id="15" name="TextBox 14"/>
+          <p:cNvSpPr txBox="1"/>
+          <p:nvPr/>
+        </p:nvSpPr>
+        <p:spPr>
+          <a:xfrm>
+            <a:off x="777240" y="3474720"/>
+            <a:ext cx="10607040" cy="411480"/>
+          </a:xfrm>
+          <a:prstGeom prst="rect">
+            <a:avLst/>
+          </a:prstGeom>
+          <a:noFill/>
+        </p:spPr>
+        <p:txBody>
+          <a:bodyPr wrap="square" lIns="45720" rIns="45720" tIns="18288" bIns="18288" anchor="t">
+            <a:spAutoFit/>
+          </a:bodyPr>
+          <a:lstStyle/>
+          <a:p>
+            <a:pPr algn="ctr"/>
+            <a:r>
+              <a:rPr sz="2300" b="0" i="0">
+                <a:solidFill>
+                  <a:srgbClr val="1A1A1A"/>
+                </a:solidFill>
+                <a:latin typeface="Century Schoolbook"/>
+              </a:rPr>
+              <a:t>Write the two-week growth factor as one power, then find its value.</a:t>
+            </a:r>
+          </a:p>
+        </p:txBody>
+      </p:sp>
+      <p:sp>
+        <p:nvSpPr>
+          <p:cNvPr id="16" name="TextBox 15"/>
+          <p:cNvSpPr txBox="1"/>
+          <p:nvPr/>
+        </p:nvSpPr>
+        <p:spPr>
+          <a:xfrm>
+            <a:off x="1828800" y="4041648"/>
             <a:ext cx="8503920" cy="548640"/>
           </a:xfrm>
           <a:prstGeom prst="rect">
@@ -7130,6 +7529,42 @@
                 </a:solidFill>
                 <a:latin typeface="Century Schoolbook"/>
               </a:rPr>
+              <a:t>4</a:t>
+            </a:r>
+            <a:r>
+              <a:rPr sz="2400" b="0" i="0">
+                <a:solidFill>
+                  <a:srgbClr val="6B6B6B"/>
+                </a:solidFill>
+                <a:latin typeface="Century Schoolbook"/>
+              </a:rPr>
+              <a:t> · 2</a:t>
+            </a:r>
+            <a:r>
+              <a:rPr sz="2400" b="0" i="0" baseline="30000">
+                <a:solidFill>
+                  <a:srgbClr val="6B6B6B"/>
+                </a:solidFill>
+                <a:latin typeface="Century Schoolbook"/>
+              </a:rPr>
+              <a:t>2</a:t>
+            </a:r>
+            <a:r>
+              <a:rPr sz="2400" b="0" i="0">
+                <a:solidFill>
+                  <a:srgbClr val="6B6B6B"/>
+                </a:solidFill>
+                <a:latin typeface="Century Schoolbook"/>
+              </a:rPr>
+              <a:t> = 2</a:t>
+            </a:r>
+            <a:r>
+              <a:rPr sz="2400" b="0" i="0" baseline="30000">
+                <a:solidFill>
+                  <a:srgbClr val="6B6B6B"/>
+                </a:solidFill>
+                <a:latin typeface="Century Schoolbook"/>
+              </a:rPr>
               <a:t>6</a:t>
             </a:r>
           </a:p>
@@ -7137,13 +7572,13 @@
       </p:sp>
       <p:sp>
         <p:nvSpPr>
-          <p:cNvPr id="11" name="TextBox 10"/>
-          <p:cNvSpPr txBox="1"/>
-          <p:nvPr/>
-        </p:nvSpPr>
-        <p:spPr>
-          <a:xfrm>
-            <a:off x="777240" y="4663440"/>
+          <p:cNvPr id="17" name="TextBox 16"/>
+          <p:cNvSpPr txBox="1"/>
+          <p:nvPr/>
+        </p:nvSpPr>
+        <p:spPr>
+          <a:xfrm>
+            <a:off x="777240" y="4773168"/>
             <a:ext cx="10607040" cy="548640"/>
           </a:xfrm>
           <a:prstGeom prst="rect">
@@ -7165,7 +7600,25 @@
                 </a:solidFill>
                 <a:latin typeface="Century Schoolbook"/>
               </a:rPr>
-              <a:t>Answer:   64</a:t>
+              <a:t>Answer:   2</a:t>
+            </a:r>
+            <a:r>
+              <a:rPr sz="3200" b="1" i="0" baseline="30000">
+                <a:solidFill>
+                  <a:srgbClr val="9E1B32"/>
+                </a:solidFill>
+                <a:latin typeface="Century Schoolbook"/>
+              </a:rPr>
+              <a:t>6</a:t>
+            </a:r>
+            <a:r>
+              <a:rPr sz="3200" b="1" i="0">
+                <a:solidFill>
+                  <a:srgbClr val="9E1B32"/>
+                </a:solidFill>
+                <a:latin typeface="Century Schoolbook"/>
+              </a:rPr>
+              <a:t> = 64</a:t>
             </a:r>
           </a:p>
         </p:txBody>
@@ -14663,7 +15116,7 @@
                 </a:solidFill>
                 <a:latin typeface="Century Schoolbook"/>
               </a:rPr>
-              <a:t>IXL</a:t>
+              <a:t>Independent Set</a:t>
             </a:r>
           </a:p>
         </p:txBody>
@@ -14768,7 +15221,7 @@
                 </a:solidFill>
                 <a:latin typeface="Century Schoolbook"/>
               </a:rPr>
-              <a:t>Last five minutes.</a:t>
+              <a:t>Six questions. On your own, in silence.</a:t>
             </a:r>
           </a:p>
         </p:txBody>
@@ -14886,6 +15339,479 @@
         </p:nvSpPr>
         <p:spPr>
           <a:xfrm>
+            <a:off x="960120" y="2011680"/>
+            <a:ext cx="548640" cy="356616"/>
+          </a:xfrm>
+          <a:prstGeom prst="rect">
+            <a:avLst/>
+          </a:prstGeom>
+          <a:noFill/>
+        </p:spPr>
+        <p:txBody>
+          <a:bodyPr wrap="square" lIns="45720" rIns="45720" tIns="18288" bIns="18288" anchor="t">
+            <a:spAutoFit/>
+          </a:bodyPr>
+          <a:lstStyle/>
+          <a:p>
+            <a:pPr algn="l"/>
+            <a:r>
+              <a:rPr sz="2100" b="1" i="0">
+                <a:solidFill>
+                  <a:srgbClr val="0B5394"/>
+                </a:solidFill>
+                <a:latin typeface="Century Schoolbook"/>
+              </a:rPr>
+              <a:t>1.</a:t>
+            </a:r>
+          </a:p>
+        </p:txBody>
+      </p:sp>
+      <p:sp>
+        <p:nvSpPr>
+          <p:cNvPr id="10" name="TextBox 9"/>
+          <p:cNvSpPr txBox="1"/>
+          <p:nvPr/>
+        </p:nvSpPr>
+        <p:spPr>
+          <a:xfrm>
+            <a:off x="1554480" y="2011680"/>
+            <a:ext cx="9829800" cy="411480"/>
+          </a:xfrm>
+          <a:prstGeom prst="rect">
+            <a:avLst/>
+          </a:prstGeom>
+          <a:noFill/>
+        </p:spPr>
+        <p:txBody>
+          <a:bodyPr wrap="square" lIns="45720" rIns="45720" tIns="18288" bIns="18288" anchor="t">
+            <a:spAutoFit/>
+          </a:bodyPr>
+          <a:lstStyle/>
+          <a:p>
+            <a:pPr algn="l"/>
+            <a:r>
+              <a:rPr sz="2100" b="0" i="0">
+                <a:solidFill>
+                  <a:srgbClr val="1A1A1A"/>
+                </a:solidFill>
+                <a:latin typeface="Century Schoolbook"/>
+              </a:rPr>
+              <a:t>Six questions. Work down the page.</a:t>
+            </a:r>
+          </a:p>
+        </p:txBody>
+      </p:sp>
+      <p:sp>
+        <p:nvSpPr>
+          <p:cNvPr id="11" name="TextBox 10"/>
+          <p:cNvSpPr txBox="1"/>
+          <p:nvPr/>
+        </p:nvSpPr>
+        <p:spPr>
+          <a:xfrm>
+            <a:off x="960120" y="2551176"/>
+            <a:ext cx="548640" cy="356616"/>
+          </a:xfrm>
+          <a:prstGeom prst="rect">
+            <a:avLst/>
+          </a:prstGeom>
+          <a:noFill/>
+        </p:spPr>
+        <p:txBody>
+          <a:bodyPr wrap="square" lIns="45720" rIns="45720" tIns="18288" bIns="18288" anchor="t">
+            <a:spAutoFit/>
+          </a:bodyPr>
+          <a:lstStyle/>
+          <a:p>
+            <a:pPr algn="l"/>
+            <a:r>
+              <a:rPr sz="2100" b="1" i="0">
+                <a:solidFill>
+                  <a:srgbClr val="0B5394"/>
+                </a:solidFill>
+                <a:latin typeface="Century Schoolbook"/>
+              </a:rPr>
+              <a:t>2.</a:t>
+            </a:r>
+          </a:p>
+        </p:txBody>
+      </p:sp>
+      <p:sp>
+        <p:nvSpPr>
+          <p:cNvPr id="12" name="TextBox 11"/>
+          <p:cNvSpPr txBox="1"/>
+          <p:nvPr/>
+        </p:nvSpPr>
+        <p:spPr>
+          <a:xfrm>
+            <a:off x="1554480" y="2551176"/>
+            <a:ext cx="9829800" cy="411480"/>
+          </a:xfrm>
+          <a:prstGeom prst="rect">
+            <a:avLst/>
+          </a:prstGeom>
+          <a:noFill/>
+        </p:spPr>
+        <p:txBody>
+          <a:bodyPr wrap="square" lIns="45720" rIns="45720" tIns="18288" bIns="18288" anchor="t">
+            <a:spAutoFit/>
+          </a:bodyPr>
+          <a:lstStyle/>
+          <a:p>
+            <a:pPr algn="l"/>
+            <a:r>
+              <a:rPr sz="2100" b="0" i="0">
+                <a:solidFill>
+                  <a:srgbClr val="1A1A1A"/>
+                </a:solidFill>
+                <a:latin typeface="Century Schoolbook"/>
+              </a:rPr>
+              <a:t>Show the step that does the work, not just the answer.</a:t>
+            </a:r>
+          </a:p>
+        </p:txBody>
+      </p:sp>
+      <p:sp>
+        <p:nvSpPr>
+          <p:cNvPr id="13" name="TextBox 12"/>
+          <p:cNvSpPr txBox="1"/>
+          <p:nvPr/>
+        </p:nvSpPr>
+        <p:spPr>
+          <a:xfrm>
+            <a:off x="960120" y="3090672"/>
+            <a:ext cx="548640" cy="356616"/>
+          </a:xfrm>
+          <a:prstGeom prst="rect">
+            <a:avLst/>
+          </a:prstGeom>
+          <a:noFill/>
+        </p:spPr>
+        <p:txBody>
+          <a:bodyPr wrap="square" lIns="45720" rIns="45720" tIns="18288" bIns="18288" anchor="t">
+            <a:spAutoFit/>
+          </a:bodyPr>
+          <a:lstStyle/>
+          <a:p>
+            <a:pPr algn="l"/>
+            <a:r>
+              <a:rPr sz="2100" b="1" i="0">
+                <a:solidFill>
+                  <a:srgbClr val="0B5394"/>
+                </a:solidFill>
+                <a:latin typeface="Century Schoolbook"/>
+              </a:rPr>
+              <a:t>3.</a:t>
+            </a:r>
+          </a:p>
+        </p:txBody>
+      </p:sp>
+      <p:sp>
+        <p:nvSpPr>
+          <p:cNvPr id="14" name="TextBox 13"/>
+          <p:cNvSpPr txBox="1"/>
+          <p:nvPr/>
+        </p:nvSpPr>
+        <p:spPr>
+          <a:xfrm>
+            <a:off x="1554480" y="3090672"/>
+            <a:ext cx="9829800" cy="411480"/>
+          </a:xfrm>
+          <a:prstGeom prst="rect">
+            <a:avLst/>
+          </a:prstGeom>
+          <a:noFill/>
+        </p:spPr>
+        <p:txBody>
+          <a:bodyPr wrap="square" lIns="45720" rIns="45720" tIns="18288" bIns="18288" anchor="t">
+            <a:spAutoFit/>
+          </a:bodyPr>
+          <a:lstStyle/>
+          <a:p>
+            <a:pPr algn="l"/>
+            <a:r>
+              <a:rPr sz="2100" b="0" i="0">
+                <a:solidFill>
+                  <a:srgbClr val="1A1A1A"/>
+                </a:solidFill>
+                <a:latin typeface="Century Schoolbook"/>
+              </a:rPr>
+              <a:t>Silence until the six minutes are up.</a:t>
+            </a:r>
+          </a:p>
+        </p:txBody>
+      </p:sp>
+    </p:spTree>
+  </p:cSld>
+  <p:clrMapOvr>
+    <a:masterClrMapping/>
+  </p:clrMapOvr>
+</p:sld>
+</file>
+
+<file path=ppt/slides/slide35.xml><?xml version="1.0" encoding="utf-8"?>
+<p:sld xmlns:a="http://schemas.openxmlformats.org/drawingml/2006/main" xmlns:p="http://schemas.openxmlformats.org/presentationml/2006/main" xmlns:r="http://schemas.openxmlformats.org/officeDocument/2006/relationships">
+  <p:cSld>
+    <p:spTree>
+      <p:nvGrpSpPr>
+        <p:cNvPr id="1" name=""/>
+        <p:cNvGrpSpPr/>
+        <p:nvPr/>
+      </p:nvGrpSpPr>
+      <p:grpSpPr/>
+      <p:sp>
+        <p:nvSpPr>
+          <p:cNvPr id="2" name="TextBox 1"/>
+          <p:cNvSpPr txBox="1"/>
+          <p:nvPr/>
+        </p:nvSpPr>
+        <p:spPr>
+          <a:xfrm>
+            <a:off x="777240" y="365760"/>
+            <a:ext cx="10607040" cy="640080"/>
+          </a:xfrm>
+          <a:prstGeom prst="rect">
+            <a:avLst/>
+          </a:prstGeom>
+          <a:noFill/>
+        </p:spPr>
+        <p:txBody>
+          <a:bodyPr wrap="square" lIns="45720" rIns="45720" tIns="18288" bIns="18288" anchor="t">
+            <a:spAutoFit/>
+          </a:bodyPr>
+          <a:lstStyle/>
+          <a:p>
+            <a:pPr algn="l"/>
+            <a:r>
+              <a:rPr sz="3600" b="1" i="0">
+                <a:solidFill>
+                  <a:srgbClr val="1A1A1A"/>
+                </a:solidFill>
+                <a:latin typeface="Century Schoolbook"/>
+              </a:rPr>
+              <a:t>IXL</a:t>
+            </a:r>
+          </a:p>
+        </p:txBody>
+      </p:sp>
+      <p:cxnSp>
+        <p:nvCxnSpPr>
+          <p:cNvPr id="3" name="Connector 2"/>
+          <p:cNvCxnSpPr/>
+          <p:nvPr/>
+        </p:nvCxnSpPr>
+        <p:spPr>
+          <a:xfrm>
+            <a:off x="777240" y="1097280"/>
+            <a:ext cx="10607040" cy="0"/>
+          </a:xfrm>
+          <a:prstGeom prst="line">
+            <a:avLst/>
+          </a:prstGeom>
+          <a:ln w="19050">
+            <a:solidFill>
+              <a:srgbClr val="1A1A1A"/>
+            </a:solidFill>
+          </a:ln>
+        </p:spPr>
+        <p:style>
+          <a:lnRef idx="2">
+            <a:schemeClr val="accent1"/>
+          </a:lnRef>
+          <a:fillRef idx="0">
+            <a:schemeClr val="accent1"/>
+          </a:fillRef>
+          <a:effectRef idx="1">
+            <a:schemeClr val="accent1"/>
+          </a:effectRef>
+          <a:fontRef idx="minor">
+            <a:schemeClr val="tx1"/>
+          </a:fontRef>
+        </p:style>
+      </p:cxnSp>
+      <p:cxnSp>
+        <p:nvCxnSpPr>
+          <p:cNvPr id="4" name="Connector 3"/>
+          <p:cNvCxnSpPr/>
+          <p:nvPr/>
+        </p:nvCxnSpPr>
+        <p:spPr>
+          <a:xfrm>
+            <a:off x="777240" y="1179576"/>
+            <a:ext cx="10607040" cy="0"/>
+          </a:xfrm>
+          <a:prstGeom prst="line">
+            <a:avLst/>
+          </a:prstGeom>
+          <a:ln w="9525">
+            <a:solidFill>
+              <a:srgbClr val="1A1A1A"/>
+            </a:solidFill>
+          </a:ln>
+        </p:spPr>
+        <p:style>
+          <a:lnRef idx="2">
+            <a:schemeClr val="accent1"/>
+          </a:lnRef>
+          <a:fillRef idx="0">
+            <a:schemeClr val="accent1"/>
+          </a:fillRef>
+          <a:effectRef idx="1">
+            <a:schemeClr val="accent1"/>
+          </a:effectRef>
+          <a:fontRef idx="minor">
+            <a:schemeClr val="tx1"/>
+          </a:fontRef>
+        </p:style>
+      </p:cxnSp>
+      <p:sp>
+        <p:nvSpPr>
+          <p:cNvPr id="5" name="TextBox 4"/>
+          <p:cNvSpPr txBox="1"/>
+          <p:nvPr/>
+        </p:nvSpPr>
+        <p:spPr>
+          <a:xfrm>
+            <a:off x="777240" y="1261872"/>
+            <a:ext cx="10607040" cy="310896"/>
+          </a:xfrm>
+          <a:prstGeom prst="rect">
+            <a:avLst/>
+          </a:prstGeom>
+          <a:noFill/>
+        </p:spPr>
+        <p:txBody>
+          <a:bodyPr wrap="square" lIns="45720" rIns="45720" tIns="18288" bIns="18288" anchor="t">
+            <a:spAutoFit/>
+          </a:bodyPr>
+          <a:lstStyle/>
+          <a:p>
+            <a:pPr algn="l"/>
+            <a:r>
+              <a:rPr sz="1700" b="0" i="1">
+                <a:solidFill>
+                  <a:srgbClr val="6B6B6B"/>
+                </a:solidFill>
+                <a:latin typeface="Century Schoolbook"/>
+              </a:rPr>
+              <a:t>Last five minutes.</a:t>
+            </a:r>
+          </a:p>
+        </p:txBody>
+      </p:sp>
+      <p:cxnSp>
+        <p:nvCxnSpPr>
+          <p:cNvPr id="6" name="Connector 5"/>
+          <p:cNvCxnSpPr/>
+          <p:nvPr/>
+        </p:nvCxnSpPr>
+        <p:spPr>
+          <a:xfrm>
+            <a:off x="777240" y="6199632"/>
+            <a:ext cx="10607040" cy="0"/>
+          </a:xfrm>
+          <a:prstGeom prst="line">
+            <a:avLst/>
+          </a:prstGeom>
+          <a:ln w="9525">
+            <a:solidFill>
+              <a:srgbClr val="6B6B6B"/>
+            </a:solidFill>
+          </a:ln>
+        </p:spPr>
+        <p:style>
+          <a:lnRef idx="2">
+            <a:schemeClr val="accent1"/>
+          </a:lnRef>
+          <a:fillRef idx="0">
+            <a:schemeClr val="accent1"/>
+          </a:fillRef>
+          <a:effectRef idx="1">
+            <a:schemeClr val="accent1"/>
+          </a:effectRef>
+          <a:fontRef idx="minor">
+            <a:schemeClr val="tx1"/>
+          </a:fontRef>
+        </p:style>
+      </p:cxnSp>
+      <p:sp>
+        <p:nvSpPr>
+          <p:cNvPr id="7" name="TextBox 6"/>
+          <p:cNvSpPr txBox="1"/>
+          <p:nvPr/>
+        </p:nvSpPr>
+        <p:spPr>
+          <a:xfrm>
+            <a:off x="777240" y="6272784"/>
+            <a:ext cx="9692640" cy="274320"/>
+          </a:xfrm>
+          <a:prstGeom prst="rect">
+            <a:avLst/>
+          </a:prstGeom>
+          <a:noFill/>
+        </p:spPr>
+        <p:txBody>
+          <a:bodyPr wrap="square" lIns="45720" rIns="45720" tIns="18288" bIns="18288" anchor="t">
+            <a:spAutoFit/>
+          </a:bodyPr>
+          <a:lstStyle/>
+          <a:p>
+            <a:pPr algn="l"/>
+            <a:r>
+              <a:rPr sz="1100" b="0" i="1">
+                <a:solidFill>
+                  <a:srgbClr val="6B6B6B"/>
+                </a:solidFill>
+                <a:latin typeface="Century Schoolbook"/>
+              </a:rPr>
+              <a:t>Grade 7 Accelerated · Unit 3 · Lesson 1 — Product Laws of Exponents</a:t>
+            </a:r>
+          </a:p>
+        </p:txBody>
+      </p:sp>
+      <p:sp>
+        <p:nvSpPr>
+          <p:cNvPr id="8" name="TextBox 7"/>
+          <p:cNvSpPr txBox="1"/>
+          <p:nvPr/>
+        </p:nvSpPr>
+        <p:spPr>
+          <a:xfrm>
+            <a:off x="10744200" y="6272784"/>
+            <a:ext cx="640080" cy="274320"/>
+          </a:xfrm>
+          <a:prstGeom prst="rect">
+            <a:avLst/>
+          </a:prstGeom>
+          <a:noFill/>
+        </p:spPr>
+        <p:txBody>
+          <a:bodyPr wrap="square" lIns="45720" rIns="45720" tIns="18288" bIns="18288" anchor="t">
+            <a:spAutoFit/>
+          </a:bodyPr>
+          <a:lstStyle/>
+          <a:p>
+            <a:pPr algn="r"/>
+            <a:r>
+              <a:rPr sz="1100" b="0" i="0">
+                <a:solidFill>
+                  <a:srgbClr val="6B6B6B"/>
+                </a:solidFill>
+                <a:latin typeface="Century Schoolbook"/>
+              </a:rPr>
+              <a:t>35</a:t>
+            </a:r>
+          </a:p>
+        </p:txBody>
+      </p:sp>
+      <p:sp>
+        <p:nvSpPr>
+          <p:cNvPr id="9" name="TextBox 8"/>
+          <p:cNvSpPr txBox="1"/>
+          <p:nvPr/>
+        </p:nvSpPr>
+        <p:spPr>
+          <a:xfrm>
             <a:off x="960120" y="1828800"/>
             <a:ext cx="548640" cy="356616"/>
           </a:xfrm>
@@ -15083,7 +16009,7 @@
                 </a:solidFill>
                 <a:latin typeface="Century Schoolbook"/>
               </a:rPr>
-              <a:t>Stop at a SmartScore of 67 on each skill. Whatever you do not finish is tonight's practice.</a:t>
+              <a:t>Every skill listed is required, to a SmartScore of 67. Due at the start of the next class.</a:t>
             </a:r>
           </a:p>
         </p:txBody>
@@ -15118,7 +16044,7 @@
                 </a:solidFill>
                 <a:latin typeface="Century Schoolbook"/>
               </a:rPr>
-              <a:t>Today's skills</a:t>
+              <a:t>Today's skills — all required</a:t>
             </a:r>
           </a:p>
         </p:txBody>

--- a/a7/build/out/u3/A7 3.01  Slides.pptx
+++ b/a7/build/out/u3/A7 3.01  Slides.pptx
@@ -16184,7 +16184,7 @@
                 </a:solidFill>
                 <a:latin typeface="Century Schoolbook"/>
               </a:rPr>
-              <a:t>Optional: Understanding exponents — BFA</a:t>
+              <a:t>Understanding exponents — BFA</a:t>
             </a:r>
           </a:p>
         </p:txBody>

--- a/a7/build/out/u3/A7 3.01  Slides.pptx
+++ b/a7/build/out/u3/A7 3.01  Slides.pptx
@@ -6719,8 +6719,8 @@
         </p:nvSpPr>
         <p:spPr>
           <a:xfrm>
-            <a:off x="1719072" y="2171700"/>
-            <a:ext cx="6563360" cy="457200"/>
+            <a:off x="2145753" y="2171700"/>
+            <a:ext cx="5826384" cy="457200"/>
           </a:xfrm>
           <a:prstGeom prst="rect">
             <a:avLst/>
@@ -6729,7 +6729,7 @@
         </p:spPr>
         <p:txBody>
           <a:bodyPr wrap="none" lIns="45720" rIns="45720" tIns="18288" bIns="18288" anchor="ctr">
-            <a:spAutoFit/>
+            <a:noAutofit/>
           </a:bodyPr>
           <a:lstStyle/>
           <a:p>
@@ -6762,7 +6762,7 @@
         </p:blipFill>
         <p:spPr>
           <a:xfrm>
-            <a:off x="8145272" y="2231136"/>
+            <a:off x="7834978" y="2231136"/>
             <a:ext cx="335280" cy="338328"/>
           </a:xfrm>
           <a:prstGeom prst="rect">
@@ -6778,8 +6778,8 @@
         </p:nvSpPr>
         <p:spPr>
           <a:xfrm>
-            <a:off x="8480552" y="2171700"/>
-            <a:ext cx="2099056" cy="457200"/>
+            <a:off x="8170258" y="2171700"/>
+            <a:ext cx="1982668" cy="457200"/>
           </a:xfrm>
           <a:prstGeom prst="rect">
             <a:avLst/>
@@ -6788,7 +6788,7 @@
         </p:spPr>
         <p:txBody>
           <a:bodyPr wrap="none" lIns="45720" rIns="45720" tIns="18288" bIns="18288" anchor="ctr">
-            <a:spAutoFit/>
+            <a:noAutofit/>
           </a:bodyPr>
           <a:lstStyle/>
           <a:p>
@@ -6813,8 +6813,8 @@
         </p:nvSpPr>
         <p:spPr>
           <a:xfrm>
-            <a:off x="1633219" y="2857500"/>
-            <a:ext cx="1583944" cy="457200"/>
+            <a:off x="2110520" y="2857500"/>
+            <a:ext cx="1485415" cy="457200"/>
           </a:xfrm>
           <a:prstGeom prst="rect">
             <a:avLst/>
@@ -6823,7 +6823,7 @@
         </p:spPr>
         <p:txBody>
           <a:bodyPr wrap="none" lIns="45720" rIns="45720" tIns="18288" bIns="18288" anchor="ctr">
-            <a:spAutoFit/>
+            <a:noAutofit/>
           </a:bodyPr>
           <a:lstStyle/>
           <a:p>
@@ -6856,7 +6856,7 @@
         </p:blipFill>
         <p:spPr>
           <a:xfrm>
-            <a:off x="3080004" y="2918460"/>
+            <a:off x="3458776" y="2918460"/>
             <a:ext cx="335280" cy="335280"/>
           </a:xfrm>
           <a:prstGeom prst="rect">
@@ -6872,8 +6872,8 @@
         </p:nvSpPr>
         <p:spPr>
           <a:xfrm>
-            <a:off x="3415284" y="2857500"/>
-            <a:ext cx="7250176" cy="457200"/>
+            <a:off x="3794056" y="2857500"/>
+            <a:ext cx="6394102" cy="457200"/>
           </a:xfrm>
           <a:prstGeom prst="rect">
             <a:avLst/>
@@ -6882,7 +6882,7 @@
         </p:spPr>
         <p:txBody>
           <a:bodyPr wrap="none" lIns="45720" rIns="45720" tIns="18288" bIns="18288" anchor="ctr">
-            <a:spAutoFit/>
+            <a:noAutofit/>
           </a:bodyPr>
           <a:lstStyle/>
           <a:p>
@@ -7275,8 +7275,8 @@
         </p:nvSpPr>
         <p:spPr>
           <a:xfrm>
-            <a:off x="1719072" y="2080260"/>
-            <a:ext cx="6563360" cy="457200"/>
+            <a:off x="2145753" y="2080260"/>
+            <a:ext cx="5826384" cy="457200"/>
           </a:xfrm>
           <a:prstGeom prst="rect">
             <a:avLst/>
@@ -7285,7 +7285,7 @@
         </p:spPr>
         <p:txBody>
           <a:bodyPr wrap="none" lIns="45720" rIns="45720" tIns="18288" bIns="18288" anchor="ctr">
-            <a:spAutoFit/>
+            <a:noAutofit/>
           </a:bodyPr>
           <a:lstStyle/>
           <a:p>
@@ -7318,7 +7318,7 @@
         </p:blipFill>
         <p:spPr>
           <a:xfrm>
-            <a:off x="8145272" y="2139696"/>
+            <a:off x="7834978" y="2139696"/>
             <a:ext cx="335280" cy="338328"/>
           </a:xfrm>
           <a:prstGeom prst="rect">
@@ -7334,8 +7334,8 @@
         </p:nvSpPr>
         <p:spPr>
           <a:xfrm>
-            <a:off x="8480552" y="2080260"/>
-            <a:ext cx="2099056" cy="457200"/>
+            <a:off x="8170258" y="2080260"/>
+            <a:ext cx="1982668" cy="457200"/>
           </a:xfrm>
           <a:prstGeom prst="rect">
             <a:avLst/>
@@ -7344,7 +7344,7 @@
         </p:spPr>
         <p:txBody>
           <a:bodyPr wrap="none" lIns="45720" rIns="45720" tIns="18288" bIns="18288" anchor="ctr">
-            <a:spAutoFit/>
+            <a:noAutofit/>
           </a:bodyPr>
           <a:lstStyle/>
           <a:p>
@@ -7369,8 +7369,8 @@
         </p:nvSpPr>
         <p:spPr>
           <a:xfrm>
-            <a:off x="1633219" y="2766060"/>
-            <a:ext cx="1583944" cy="457200"/>
+            <a:off x="2110520" y="2766060"/>
+            <a:ext cx="1485415" cy="457200"/>
           </a:xfrm>
           <a:prstGeom prst="rect">
             <a:avLst/>
@@ -7379,7 +7379,7 @@
         </p:spPr>
         <p:txBody>
           <a:bodyPr wrap="none" lIns="45720" rIns="45720" tIns="18288" bIns="18288" anchor="ctr">
-            <a:spAutoFit/>
+            <a:noAutofit/>
           </a:bodyPr>
           <a:lstStyle/>
           <a:p>
@@ -7412,7 +7412,7 @@
         </p:blipFill>
         <p:spPr>
           <a:xfrm>
-            <a:off x="3080004" y="2827019"/>
+            <a:off x="3458776" y="2827019"/>
             <a:ext cx="335280" cy="335280"/>
           </a:xfrm>
           <a:prstGeom prst="rect">
@@ -7428,8 +7428,8 @@
         </p:nvSpPr>
         <p:spPr>
           <a:xfrm>
-            <a:off x="3415284" y="2766060"/>
-            <a:ext cx="7250176" cy="457200"/>
+            <a:off x="3794056" y="2766060"/>
+            <a:ext cx="6394102" cy="457200"/>
           </a:xfrm>
           <a:prstGeom prst="rect">
             <a:avLst/>
@@ -7438,7 +7438,7 @@
         </p:spPr>
         <p:txBody>
           <a:bodyPr wrap="none" lIns="45720" rIns="45720" tIns="18288" bIns="18288" anchor="ctr">
-            <a:spAutoFit/>
+            <a:noAutofit/>
           </a:bodyPr>
           <a:lstStyle/>
           <a:p>
@@ -7895,7 +7895,7 @@
         <p:spPr>
           <a:xfrm>
             <a:off x="1874519" y="1760220"/>
-            <a:ext cx="969771" cy="457200"/>
+            <a:ext cx="720605" cy="457200"/>
           </a:xfrm>
           <a:prstGeom prst="rect">
             <a:avLst/>
@@ -7904,7 +7904,7 @@
         </p:spPr>
         <p:txBody>
           <a:bodyPr wrap="none" lIns="45720" rIns="45720" tIns="18288" bIns="18288" anchor="ctr">
-            <a:spAutoFit/>
+            <a:noAutofit/>
           </a:bodyPr>
           <a:lstStyle/>
           <a:p>
@@ -7937,7 +7937,7 @@
         </p:blipFill>
         <p:spPr>
           <a:xfrm>
-            <a:off x="2707132" y="1784604"/>
+            <a:off x="2457965" y="1784604"/>
             <a:ext cx="688848" cy="408432"/>
           </a:xfrm>
           <a:prstGeom prst="rect">
@@ -7954,7 +7954,7 @@
         <p:spPr>
           <a:xfrm>
             <a:off x="1874519" y="2372868"/>
-            <a:ext cx="6285992" cy="457200"/>
+            <a:ext cx="6163986" cy="457200"/>
           </a:xfrm>
           <a:prstGeom prst="rect">
             <a:avLst/>
@@ -7963,7 +7963,7 @@
         </p:spPr>
         <p:txBody>
           <a:bodyPr wrap="none" lIns="45720" rIns="45720" tIns="18288" bIns="18288" anchor="ctr">
-            <a:spAutoFit/>
+            <a:noAutofit/>
           </a:bodyPr>
           <a:lstStyle/>
           <a:p>
@@ -7996,7 +7996,7 @@
         </p:blipFill>
         <p:spPr>
           <a:xfrm>
-            <a:off x="8023352" y="2397252"/>
+            <a:off x="7901346" y="2397252"/>
             <a:ext cx="688848" cy="408432"/>
           </a:xfrm>
           <a:prstGeom prst="rect">
@@ -8012,8 +8012,8 @@
         </p:nvSpPr>
         <p:spPr>
           <a:xfrm>
-            <a:off x="8712200" y="2372868"/>
-            <a:ext cx="362204" cy="457200"/>
+            <a:off x="8590194" y="2372868"/>
+            <a:ext cx="347771" cy="457200"/>
           </a:xfrm>
           <a:prstGeom prst="rect">
             <a:avLst/>
@@ -8022,7 +8022,7 @@
         </p:spPr>
         <p:txBody>
           <a:bodyPr wrap="none" lIns="45720" rIns="45720" tIns="18288" bIns="18288" anchor="ctr">
-            <a:spAutoFit/>
+            <a:noAutofit/>
           </a:bodyPr>
           <a:lstStyle/>
           <a:p>
@@ -8048,7 +8048,7 @@
         <p:spPr>
           <a:xfrm>
             <a:off x="1874519" y="2985516"/>
-            <a:ext cx="2033015" cy="457200"/>
+            <a:ext cx="1652008" cy="457200"/>
           </a:xfrm>
           <a:prstGeom prst="rect">
             <a:avLst/>
@@ -8057,7 +8057,7 @@
         </p:spPr>
         <p:txBody>
           <a:bodyPr wrap="none" lIns="45720" rIns="45720" tIns="18288" bIns="18288" anchor="ctr">
-            <a:spAutoFit/>
+            <a:noAutofit/>
           </a:bodyPr>
           <a:lstStyle/>
           <a:p>
@@ -8090,7 +8090,7 @@
         </p:blipFill>
         <p:spPr>
           <a:xfrm>
-            <a:off x="3770375" y="3098292"/>
+            <a:off x="3389368" y="3098292"/>
             <a:ext cx="1402080" cy="231648"/>
           </a:xfrm>
           <a:prstGeom prst="rect">
@@ -8106,8 +8106,8 @@
         </p:nvSpPr>
         <p:spPr>
           <a:xfrm>
-            <a:off x="1874519" y="3602736"/>
-            <a:ext cx="2488692" cy="457200"/>
+            <a:off x="1874519" y="3669792"/>
+            <a:ext cx="2190435" cy="457200"/>
           </a:xfrm>
           <a:prstGeom prst="rect">
             <a:avLst/>
@@ -8116,7 +8116,7 @@
         </p:spPr>
         <p:txBody>
           <a:bodyPr wrap="none" lIns="45720" rIns="45720" tIns="18288" bIns="18288" anchor="ctr">
-            <a:spAutoFit/>
+            <a:noAutofit/>
           </a:bodyPr>
           <a:lstStyle/>
           <a:p>
@@ -8135,7 +8135,7 @@
       </p:sp>
       <p:pic>
         <p:nvPicPr>
-          <p:cNvPr id="17" name="Picture 16" descr="dbe118de2b0ec1ed.png"/>
+          <p:cNvPr id="17" name="Picture 16" descr="ec4478436d606ed4.png"/>
           <p:cNvPicPr>
             <a:picLocks noChangeAspect="1"/>
           </p:cNvPicPr>
@@ -8149,8 +8149,8 @@
         </p:blipFill>
         <p:spPr>
           <a:xfrm>
-            <a:off x="4226051" y="3621024"/>
-            <a:ext cx="542544" cy="420624"/>
+            <a:off x="3927795" y="3621024"/>
+            <a:ext cx="637032" cy="554736"/>
           </a:xfrm>
           <a:prstGeom prst="rect">
             <a:avLst/>
@@ -12970,7 +12970,7 @@
         <p:spPr>
           <a:xfrm>
             <a:off x="1874519" y="1760220"/>
-            <a:ext cx="969771" cy="457200"/>
+            <a:ext cx="720605" cy="457200"/>
           </a:xfrm>
           <a:prstGeom prst="rect">
             <a:avLst/>
@@ -12979,7 +12979,7 @@
         </p:spPr>
         <p:txBody>
           <a:bodyPr wrap="none" lIns="45720" rIns="45720" tIns="18288" bIns="18288" anchor="ctr">
-            <a:spAutoFit/>
+            <a:noAutofit/>
           </a:bodyPr>
           <a:lstStyle/>
           <a:p>
@@ -13012,7 +13012,7 @@
         </p:blipFill>
         <p:spPr>
           <a:xfrm>
-            <a:off x="2707132" y="1784604"/>
+            <a:off x="2457965" y="1784604"/>
             <a:ext cx="688848" cy="408432"/>
           </a:xfrm>
           <a:prstGeom prst="rect">
@@ -13028,8 +13028,8 @@
         </p:nvSpPr>
         <p:spPr>
           <a:xfrm>
-            <a:off x="3944619" y="1760220"/>
-            <a:ext cx="379729" cy="457200"/>
+            <a:off x="3695453" y="1760220"/>
+            <a:ext cx="388052" cy="457200"/>
           </a:xfrm>
           <a:prstGeom prst="rect">
             <a:avLst/>
@@ -13038,7 +13038,7 @@
         </p:spPr>
         <p:txBody>
           <a:bodyPr wrap="none" lIns="45720" rIns="45720" tIns="18288" bIns="18288" anchor="ctr">
-            <a:spAutoFit/>
+            <a:noAutofit/>
           </a:bodyPr>
           <a:lstStyle/>
           <a:p>
@@ -13064,7 +13064,7 @@
         <p:spPr>
           <a:xfrm>
             <a:off x="1874519" y="2372868"/>
-            <a:ext cx="6285992" cy="457200"/>
+            <a:ext cx="6163986" cy="457200"/>
           </a:xfrm>
           <a:prstGeom prst="rect">
             <a:avLst/>
@@ -13073,7 +13073,7 @@
         </p:spPr>
         <p:txBody>
           <a:bodyPr wrap="none" lIns="45720" rIns="45720" tIns="18288" bIns="18288" anchor="ctr">
-            <a:spAutoFit/>
+            <a:noAutofit/>
           </a:bodyPr>
           <a:lstStyle/>
           <a:p>
@@ -13106,7 +13106,7 @@
         </p:blipFill>
         <p:spPr>
           <a:xfrm>
-            <a:off x="8023352" y="2397252"/>
+            <a:off x="7901346" y="2397252"/>
             <a:ext cx="688848" cy="408432"/>
           </a:xfrm>
           <a:prstGeom prst="rect">
@@ -13122,8 +13122,8 @@
         </p:nvSpPr>
         <p:spPr>
           <a:xfrm>
-            <a:off x="8712200" y="2372868"/>
-            <a:ext cx="362204" cy="457200"/>
+            <a:off x="8590194" y="2372868"/>
+            <a:ext cx="347771" cy="457200"/>
           </a:xfrm>
           <a:prstGeom prst="rect">
             <a:avLst/>
@@ -13132,7 +13132,7 @@
         </p:spPr>
         <p:txBody>
           <a:bodyPr wrap="none" lIns="45720" rIns="45720" tIns="18288" bIns="18288" anchor="ctr">
-            <a:spAutoFit/>
+            <a:noAutofit/>
           </a:bodyPr>
           <a:lstStyle/>
           <a:p>
@@ -13157,8 +13157,8 @@
         </p:nvSpPr>
         <p:spPr>
           <a:xfrm>
-            <a:off x="9485884" y="2372868"/>
-            <a:ext cx="1396238" cy="457200"/>
+            <a:off x="9349446" y="2372868"/>
+            <a:ext cx="1351321" cy="457200"/>
           </a:xfrm>
           <a:prstGeom prst="rect">
             <a:avLst/>
@@ -13167,7 +13167,7 @@
         </p:spPr>
         <p:txBody>
           <a:bodyPr wrap="none" lIns="45720" rIns="45720" tIns="18288" bIns="18288" anchor="ctr">
-            <a:spAutoFit/>
+            <a:noAutofit/>
           </a:bodyPr>
           <a:lstStyle/>
           <a:p>
@@ -13193,7 +13193,7 @@
         <p:spPr>
           <a:xfrm>
             <a:off x="1874519" y="2985516"/>
-            <a:ext cx="2033015" cy="457200"/>
+            <a:ext cx="1652008" cy="457200"/>
           </a:xfrm>
           <a:prstGeom prst="rect">
             <a:avLst/>
@@ -13202,7 +13202,7 @@
         </p:spPr>
         <p:txBody>
           <a:bodyPr wrap="none" lIns="45720" rIns="45720" tIns="18288" bIns="18288" anchor="ctr">
-            <a:spAutoFit/>
+            <a:noAutofit/>
           </a:bodyPr>
           <a:lstStyle/>
           <a:p>
@@ -13235,7 +13235,7 @@
         </p:blipFill>
         <p:spPr>
           <a:xfrm>
-            <a:off x="3770375" y="3098292"/>
+            <a:off x="3389368" y="3098292"/>
             <a:ext cx="1402080" cy="231648"/>
           </a:xfrm>
           <a:prstGeom prst="rect">
@@ -13251,8 +13251,8 @@
         </p:nvSpPr>
         <p:spPr>
           <a:xfrm>
-            <a:off x="5721095" y="2985516"/>
-            <a:ext cx="1057402" cy="457200"/>
+            <a:off x="5340088" y="2985516"/>
+            <a:ext cx="942623" cy="457200"/>
           </a:xfrm>
           <a:prstGeom prst="rect">
             <a:avLst/>
@@ -13261,7 +13261,7 @@
         </p:spPr>
         <p:txBody>
           <a:bodyPr wrap="none" lIns="45720" rIns="45720" tIns="18288" bIns="18288" anchor="ctr">
-            <a:spAutoFit/>
+            <a:noAutofit/>
           </a:bodyPr>
           <a:lstStyle/>
           <a:p>
@@ -13286,8 +13286,8 @@
         </p:nvSpPr>
         <p:spPr>
           <a:xfrm>
-            <a:off x="1874519" y="3602736"/>
-            <a:ext cx="2488692" cy="457200"/>
+            <a:off x="1874519" y="3669792"/>
+            <a:ext cx="2190435" cy="457200"/>
           </a:xfrm>
           <a:prstGeom prst="rect">
             <a:avLst/>
@@ -13296,7 +13296,7 @@
         </p:spPr>
         <p:txBody>
           <a:bodyPr wrap="none" lIns="45720" rIns="45720" tIns="18288" bIns="18288" anchor="ctr">
-            <a:spAutoFit/>
+            <a:noAutofit/>
           </a:bodyPr>
           <a:lstStyle/>
           <a:p>
@@ -13315,7 +13315,7 @@
       </p:sp>
       <p:pic>
         <p:nvPicPr>
-          <p:cNvPr id="20" name="Picture 19" descr="dbe118de2b0ec1ed.png"/>
+          <p:cNvPr id="20" name="Picture 19" descr="ec4478436d606ed4.png"/>
           <p:cNvPicPr>
             <a:picLocks noChangeAspect="1"/>
           </p:cNvPicPr>
@@ -13329,8 +13329,8 @@
         </p:blipFill>
         <p:spPr>
           <a:xfrm>
-            <a:off x="4226051" y="3621024"/>
-            <a:ext cx="542544" cy="420624"/>
+            <a:off x="3927795" y="3621024"/>
+            <a:ext cx="637032" cy="554736"/>
           </a:xfrm>
           <a:prstGeom prst="rect">
             <a:avLst/>
@@ -13339,7 +13339,7 @@
       </p:pic>
       <p:pic>
         <p:nvPicPr>
-          <p:cNvPr id="21" name="Picture 20" descr="ee89cf951fa0a955.png"/>
+          <p:cNvPr id="21" name="Picture 20" descr="3a92952d92bb77ab.png"/>
           <p:cNvPicPr>
             <a:picLocks noChangeAspect="1"/>
           </p:cNvPicPr>
@@ -13353,8 +13353,8 @@
         </p:blipFill>
         <p:spPr>
           <a:xfrm>
-            <a:off x="5317236" y="3621024"/>
-            <a:ext cx="118872" cy="426720"/>
+            <a:off x="5113467" y="3621024"/>
+            <a:ext cx="170688" cy="557784"/>
           </a:xfrm>
           <a:prstGeom prst="rect">
             <a:avLst/>
@@ -13626,7 +13626,7 @@
       </p:sp>
       <p:pic>
         <p:nvPicPr>
-          <p:cNvPr id="9" name="Picture 8" descr="5874b5ef202c3273.png"/>
+          <p:cNvPr id="9" name="Picture 8" descr="f58654af4b9460c1.png"/>
           <p:cNvPicPr>
             <a:picLocks noChangeAspect="1"/>
           </p:cNvPicPr>
@@ -13640,8 +13640,8 @@
         </p:blipFill>
         <p:spPr>
           <a:xfrm>
-            <a:off x="5059680" y="2194560"/>
-            <a:ext cx="2042160" cy="643128"/>
+            <a:off x="4913376" y="2194560"/>
+            <a:ext cx="2334768" cy="853440"/>
           </a:xfrm>
           <a:prstGeom prst="rect">
             <a:avLst/>
@@ -13983,7 +13983,7 @@
       </p:sp>
       <p:pic>
         <p:nvPicPr>
-          <p:cNvPr id="9" name="Picture 8" descr="5874b5ef202c3273.png"/>
+          <p:cNvPr id="9" name="Picture 8" descr="f58654af4b9460c1.png"/>
           <p:cNvPicPr>
             <a:picLocks noChangeAspect="1"/>
           </p:cNvPicPr>
@@ -13997,8 +13997,8 @@
         </p:blipFill>
         <p:spPr>
           <a:xfrm>
-            <a:off x="5059680" y="2103120"/>
-            <a:ext cx="2042160" cy="643128"/>
+            <a:off x="4913376" y="2103120"/>
+            <a:ext cx="2334768" cy="853440"/>
           </a:xfrm>
           <a:prstGeom prst="rect">
             <a:avLst/>
@@ -14013,7 +14013,7 @@
         </p:nvSpPr>
         <p:spPr>
           <a:xfrm>
-            <a:off x="1828800" y="3020567"/>
+            <a:off x="1828800" y="3230880"/>
             <a:ext cx="8503920" cy="548640"/>
           </a:xfrm>
           <a:prstGeom prst="rect">
@@ -14057,7 +14057,7 @@
         </p:nvSpPr>
         <p:spPr>
           <a:xfrm>
-            <a:off x="4940808" y="4713731"/>
+            <a:off x="4864607" y="4817363"/>
             <a:ext cx="1920240" cy="548640"/>
           </a:xfrm>
           <a:prstGeom prst="rect">
@@ -14086,7 +14086,7 @@
       </p:sp>
       <p:pic>
         <p:nvPicPr>
-          <p:cNvPr id="12" name="Picture 11" descr="b7afcb67ef17a445.png"/>
+          <p:cNvPr id="12" name="Picture 11" descr="08b8d08dca6c5152.png"/>
           <p:cNvPicPr>
             <a:picLocks noChangeAspect="1"/>
           </p:cNvPicPr>
@@ -14100,8 +14100,8 @@
         </p:blipFill>
         <p:spPr>
           <a:xfrm>
-            <a:off x="6861048" y="4663440"/>
-            <a:ext cx="359664" cy="649224"/>
+            <a:off x="6784848" y="4663440"/>
+            <a:ext cx="512064" cy="856488"/>
           </a:xfrm>
           <a:prstGeom prst="rect">
             <a:avLst/>
@@ -14414,8 +14414,8 @@
         </p:nvSpPr>
         <p:spPr>
           <a:xfrm>
-            <a:off x="2548635" y="2746579"/>
-            <a:ext cx="2442464" cy="457200"/>
+            <a:off x="2897912" y="2746579"/>
+            <a:ext cx="2190277" cy="457200"/>
           </a:xfrm>
           <a:prstGeom prst="rect">
             <a:avLst/>
@@ -14424,7 +14424,7 @@
         </p:spPr>
         <p:txBody>
           <a:bodyPr wrap="none" lIns="45720" rIns="45720" tIns="18288" bIns="18288" anchor="ctr">
-            <a:spAutoFit/>
+            <a:noAutofit/>
           </a:bodyPr>
           <a:lstStyle/>
           <a:p>
@@ -14457,7 +14457,7 @@
         </p:blipFill>
         <p:spPr>
           <a:xfrm>
-            <a:off x="4853939" y="2769439"/>
+            <a:off x="4951030" y="2769439"/>
             <a:ext cx="1938528" cy="411480"/>
           </a:xfrm>
           <a:prstGeom prst="rect">
@@ -14473,8 +14473,8 @@
         </p:nvSpPr>
         <p:spPr>
           <a:xfrm>
-            <a:off x="6792467" y="2746579"/>
-            <a:ext cx="2957576" cy="457200"/>
+            <a:off x="6889558" y="2746579"/>
+            <a:ext cx="2511209" cy="457200"/>
           </a:xfrm>
           <a:prstGeom prst="rect">
             <a:avLst/>
@@ -14483,7 +14483,7 @@
         </p:spPr>
         <p:txBody>
           <a:bodyPr wrap="none" lIns="45720" rIns="45720" tIns="18288" bIns="18288" anchor="ctr">
-            <a:spAutoFit/>
+            <a:noAutofit/>
           </a:bodyPr>
           <a:lstStyle/>
           <a:p>
@@ -14876,8 +14876,8 @@
         </p:nvSpPr>
         <p:spPr>
           <a:xfrm>
-            <a:off x="2548635" y="2655139"/>
-            <a:ext cx="2442464" cy="457200"/>
+            <a:off x="2897912" y="2655139"/>
+            <a:ext cx="2190277" cy="457200"/>
           </a:xfrm>
           <a:prstGeom prst="rect">
             <a:avLst/>
@@ -14886,7 +14886,7 @@
         </p:spPr>
         <p:txBody>
           <a:bodyPr wrap="none" lIns="45720" rIns="45720" tIns="18288" bIns="18288" anchor="ctr">
-            <a:spAutoFit/>
+            <a:noAutofit/>
           </a:bodyPr>
           <a:lstStyle/>
           <a:p>
@@ -14919,7 +14919,7 @@
         </p:blipFill>
         <p:spPr>
           <a:xfrm>
-            <a:off x="4853939" y="2677999"/>
+            <a:off x="4951030" y="2677999"/>
             <a:ext cx="1938528" cy="411480"/>
           </a:xfrm>
           <a:prstGeom prst="rect">
@@ -14935,8 +14935,8 @@
         </p:nvSpPr>
         <p:spPr>
           <a:xfrm>
-            <a:off x="6792467" y="2655139"/>
-            <a:ext cx="2957576" cy="457200"/>
+            <a:off x="6889558" y="2655139"/>
+            <a:ext cx="2511209" cy="457200"/>
           </a:xfrm>
           <a:prstGeom prst="rect">
             <a:avLst/>
@@ -14945,7 +14945,7 @@
         </p:spPr>
         <p:txBody>
           <a:bodyPr wrap="none" lIns="45720" rIns="45720" tIns="18288" bIns="18288" anchor="ctr">
-            <a:spAutoFit/>
+            <a:noAutofit/>
           </a:bodyPr>
           <a:lstStyle/>
           <a:p>
@@ -16907,7 +16907,7 @@
         </p:blipFill>
         <p:spPr>
           <a:xfrm>
-            <a:off x="3027171" y="4623816"/>
+            <a:off x="3173976" y="4704588"/>
             <a:ext cx="2410968" cy="344424"/>
           </a:xfrm>
           <a:prstGeom prst="rect">
@@ -16923,8 +16923,8 @@
         </p:nvSpPr>
         <p:spPr>
           <a:xfrm>
-            <a:off x="5438140" y="4567428"/>
-            <a:ext cx="1583944" cy="457200"/>
+            <a:off x="5584944" y="4648200"/>
+            <a:ext cx="988583" cy="457200"/>
           </a:xfrm>
           <a:prstGeom prst="rect">
             <a:avLst/>
@@ -16933,7 +16933,7 @@
         </p:spPr>
         <p:txBody>
           <a:bodyPr wrap="none" lIns="45720" rIns="45720" tIns="18288" bIns="18288" anchor="ctr">
-            <a:spAutoFit/>
+            <a:noAutofit/>
           </a:bodyPr>
           <a:lstStyle/>
           <a:p>
@@ -16952,7 +16952,7 @@
       </p:sp>
       <p:pic>
         <p:nvPicPr>
-          <p:cNvPr id="22" name="Picture 21" descr="58959464df7d592f.png"/>
+          <p:cNvPr id="22" name="Picture 21" descr="2d5d7a819fe41129.png"/>
           <p:cNvPicPr>
             <a:picLocks noChangeAspect="1"/>
           </p:cNvPicPr>
@@ -16966,8 +16966,8 @@
         </p:blipFill>
         <p:spPr>
           <a:xfrm>
-            <a:off x="6884924" y="4535424"/>
-            <a:ext cx="2249424" cy="521207"/>
+            <a:off x="6436367" y="4535424"/>
+            <a:ext cx="2551176" cy="682752"/>
           </a:xfrm>
           <a:prstGeom prst="rect">
             <a:avLst/>
@@ -17347,7 +17347,7 @@
         </p:blipFill>
         <p:spPr>
           <a:xfrm>
-            <a:off x="1415796" y="3029711"/>
+            <a:off x="1675829" y="3029711"/>
             <a:ext cx="3590544" cy="411480"/>
           </a:xfrm>
           <a:prstGeom prst="rect">
@@ -17363,8 +17363,8 @@
         </p:nvSpPr>
         <p:spPr>
           <a:xfrm>
-            <a:off x="5006340" y="3006852"/>
-            <a:ext cx="5876544" cy="457200"/>
+            <a:off x="5266373" y="3006852"/>
+            <a:ext cx="5356477" cy="457200"/>
           </a:xfrm>
           <a:prstGeom prst="rect">
             <a:avLst/>
@@ -17373,7 +17373,7 @@
         </p:spPr>
         <p:txBody>
           <a:bodyPr wrap="none" lIns="45720" rIns="45720" tIns="18288" bIns="18288" anchor="ctr">
-            <a:spAutoFit/>
+            <a:noAutofit/>
           </a:bodyPr>
           <a:lstStyle/>
           <a:p>
@@ -17399,7 +17399,7 @@
         <p:spPr>
           <a:xfrm>
             <a:off x="987552" y="3738371"/>
-            <a:ext cx="3598672" cy="457200"/>
+            <a:ext cx="3419263" cy="457200"/>
           </a:xfrm>
           <a:prstGeom prst="rect">
             <a:avLst/>
@@ -17408,7 +17408,7 @@
         </p:spPr>
         <p:txBody>
           <a:bodyPr wrap="none" lIns="45720" rIns="45720" tIns="18288" bIns="18288" anchor="ctr">
-            <a:spAutoFit/>
+            <a:noAutofit/>
           </a:bodyPr>
           <a:lstStyle/>
           <a:p>
@@ -17441,7 +17441,7 @@
         </p:blipFill>
         <p:spPr>
           <a:xfrm>
-            <a:off x="4449064" y="3814572"/>
+            <a:off x="4269655" y="3814572"/>
             <a:ext cx="2313432" cy="304800"/>
           </a:xfrm>
           <a:prstGeom prst="rect">
@@ -17458,7 +17458,7 @@
         <p:spPr>
           <a:xfrm>
             <a:off x="987552" y="4405883"/>
-            <a:ext cx="3248152" cy="457200"/>
+            <a:ext cx="3088445" cy="457200"/>
           </a:xfrm>
           <a:prstGeom prst="rect">
             <a:avLst/>
@@ -17467,7 +17467,7 @@
         </p:spPr>
         <p:txBody>
           <a:bodyPr wrap="none" lIns="45720" rIns="45720" tIns="18288" bIns="18288" anchor="ctr">
-            <a:spAutoFit/>
+            <a:noAutofit/>
           </a:bodyPr>
           <a:lstStyle/>
           <a:p>
@@ -17500,7 +17500,7 @@
         </p:blipFill>
         <p:spPr>
           <a:xfrm>
-            <a:off x="4098544" y="4457699"/>
+            <a:off x="3938837" y="4457699"/>
             <a:ext cx="3931920" cy="353568"/>
           </a:xfrm>
           <a:prstGeom prst="rect">
@@ -17839,7 +17839,7 @@
         <p:spPr>
           <a:xfrm>
             <a:off x="987552" y="3049524"/>
-            <a:ext cx="3768089" cy="457200"/>
+            <a:ext cx="3530167" cy="457200"/>
           </a:xfrm>
           <a:prstGeom prst="rect">
             <a:avLst/>
@@ -17848,7 +17848,7 @@
         </p:spPr>
         <p:txBody>
           <a:bodyPr wrap="none" lIns="45720" rIns="45720" tIns="18288" bIns="18288" anchor="ctr">
-            <a:spAutoFit/>
+            <a:noAutofit/>
           </a:bodyPr>
           <a:lstStyle/>
           <a:p>
@@ -17881,7 +17881,7 @@
         </p:blipFill>
         <p:spPr>
           <a:xfrm>
-            <a:off x="4618482" y="3102864"/>
+            <a:off x="4380559" y="3102864"/>
             <a:ext cx="2420112" cy="350520"/>
           </a:xfrm>
           <a:prstGeom prst="rect">
@@ -17957,7 +17957,7 @@
         <p:spPr>
           <a:xfrm>
             <a:off x="4724400" y="4448555"/>
-            <a:ext cx="1577340" cy="457200"/>
+            <a:ext cx="1208603" cy="457200"/>
           </a:xfrm>
           <a:prstGeom prst="rect">
             <a:avLst/>
@@ -17966,7 +17966,7 @@
         </p:spPr>
         <p:txBody>
           <a:bodyPr wrap="none" lIns="45720" rIns="45720" tIns="18288" bIns="18288" anchor="ctr">
-            <a:spAutoFit/>
+            <a:noAutofit/>
           </a:bodyPr>
           <a:lstStyle/>
           <a:p>
@@ -17999,7 +17999,7 @@
         </p:blipFill>
         <p:spPr>
           <a:xfrm>
-            <a:off x="6164580" y="4471416"/>
+            <a:off x="5795843" y="4471416"/>
             <a:ext cx="2840736" cy="411480"/>
           </a:xfrm>
           <a:prstGeom prst="rect">
@@ -19129,7 +19129,7 @@
         <p:spPr>
           <a:xfrm>
             <a:off x="987552" y="4128515"/>
-            <a:ext cx="3429254" cy="457200"/>
+            <a:ext cx="3248043" cy="457200"/>
           </a:xfrm>
           <a:prstGeom prst="rect">
             <a:avLst/>
@@ -19138,7 +19138,7 @@
         </p:spPr>
         <p:txBody>
           <a:bodyPr wrap="none" lIns="45720" rIns="45720" tIns="18288" bIns="18288" anchor="ctr">
-            <a:spAutoFit/>
+            <a:noAutofit/>
           </a:bodyPr>
           <a:lstStyle/>
           <a:p>
@@ -19171,7 +19171,7 @@
         </p:blipFill>
         <p:spPr>
           <a:xfrm>
-            <a:off x="4279646" y="4183380"/>
+            <a:off x="4098435" y="4183380"/>
             <a:ext cx="1837943" cy="347472"/>
           </a:xfrm>
           <a:prstGeom prst="rect">
@@ -19187,8 +19187,8 @@
         </p:nvSpPr>
         <p:spPr>
           <a:xfrm>
-            <a:off x="6117590" y="4128515"/>
-            <a:ext cx="3429254" cy="457200"/>
+            <a:off x="5936379" y="4128515"/>
+            <a:ext cx="2486441" cy="457200"/>
           </a:xfrm>
           <a:prstGeom prst="rect">
             <a:avLst/>
@@ -19197,7 +19197,7 @@
         </p:spPr>
         <p:txBody>
           <a:bodyPr wrap="none" lIns="45720" rIns="45720" tIns="18288" bIns="18288" anchor="ctr">
-            <a:spAutoFit/>
+            <a:noAutofit/>
           </a:bodyPr>
           <a:lstStyle/>
           <a:p>
@@ -19230,7 +19230,7 @@
         </p:blipFill>
         <p:spPr>
           <a:xfrm>
-            <a:off x="9409684" y="4186428"/>
+            <a:off x="8285661" y="4186428"/>
             <a:ext cx="972311" cy="341376"/>
           </a:xfrm>
           <a:prstGeom prst="rect">

--- a/a7/build/out/u3/A7 3.01  Slides.pptx
+++ b/a7/build/out/u3/A7 3.01  Slides.pptx
@@ -4105,7 +4105,7 @@
       </p:sp>
       <p:pic>
         <p:nvPicPr>
-          <p:cNvPr id="9" name="Picture 8" descr="0dfb72a0f6508b3b.png"/>
+          <p:cNvPr id="9" name="Picture 8" descr="bf0808adb260144b.png"/>
           <p:cNvPicPr>
             <a:picLocks noChangeAspect="1"/>
           </p:cNvPicPr>
@@ -4120,7 +4120,7 @@
         <p:spPr>
           <a:xfrm>
             <a:off x="5494020" y="2194560"/>
-            <a:ext cx="1173480" cy="426720"/>
+            <a:ext cx="1173480" cy="420624"/>
           </a:xfrm>
           <a:prstGeom prst="rect">
             <a:avLst/>
@@ -4135,7 +4135,7 @@
         </p:nvSpPr>
         <p:spPr>
           <a:xfrm>
-            <a:off x="777240" y="2941320"/>
+            <a:off x="777240" y="2935224"/>
             <a:ext cx="10607040" cy="429370"/>
           </a:xfrm>
           <a:prstGeom prst="rect">
@@ -4811,7 +4811,7 @@
       </p:sp>
       <p:pic>
         <p:nvPicPr>
-          <p:cNvPr id="9" name="Picture 8" descr="9a1c068e6363fa02.png"/>
+          <p:cNvPr id="9" name="Picture 8" descr="086f65450dee5af5.png"/>
           <p:cNvPicPr>
             <a:picLocks noChangeAspect="1"/>
           </p:cNvPicPr>
@@ -4870,7 +4870,7 @@
       </p:sp>
       <p:pic>
         <p:nvPicPr>
-          <p:cNvPr id="11" name="Picture 10" descr="4b91bfa4365ccebe.png"/>
+          <p:cNvPr id="11" name="Picture 10" descr="0598f1911893c221.png"/>
           <p:cNvPicPr>
             <a:picLocks noChangeAspect="1"/>
           </p:cNvPicPr>
@@ -4929,7 +4929,7 @@
       </p:sp>
       <p:pic>
         <p:nvPicPr>
-          <p:cNvPr id="13" name="Picture 12" descr="5c4898213c4ab0fa.png"/>
+          <p:cNvPr id="13" name="Picture 12" descr="ed595f21e3460e30.png"/>
           <p:cNvPicPr>
             <a:picLocks noChangeAspect="1"/>
           </p:cNvPicPr>
@@ -5591,7 +5591,7 @@
       </p:sp>
       <p:pic>
         <p:nvPicPr>
-          <p:cNvPr id="9" name="Picture 8" descr="bb2905f7bc694992.png"/>
+          <p:cNvPr id="9" name="Picture 8" descr="11529ecb1a26ecd4.png"/>
           <p:cNvPicPr>
             <a:picLocks noChangeAspect="1"/>
           </p:cNvPicPr>
@@ -5605,8 +5605,8 @@
         </p:blipFill>
         <p:spPr>
           <a:xfrm>
-            <a:off x="5303520" y="2194560"/>
-            <a:ext cx="1554480" cy="518160"/>
+            <a:off x="5301996" y="2194560"/>
+            <a:ext cx="1557528" cy="518160"/>
           </a:xfrm>
           <a:prstGeom prst="rect">
             <a:avLst/>
@@ -6332,7 +6332,7 @@
       </p:sp>
       <p:pic>
         <p:nvPicPr>
-          <p:cNvPr id="9" name="Picture 8" descr="7a6e349cb4210116.png"/>
+          <p:cNvPr id="9" name="Picture 8" descr="d83e838f1c2bb668.png"/>
           <p:cNvPicPr>
             <a:picLocks noChangeAspect="1"/>
           </p:cNvPicPr>
@@ -6346,8 +6346,8 @@
         </p:blipFill>
         <p:spPr>
           <a:xfrm>
-            <a:off x="5503163" y="2103120"/>
-            <a:ext cx="1155192" cy="432816"/>
+            <a:off x="5501639" y="2103120"/>
+            <a:ext cx="1158240" cy="429768"/>
           </a:xfrm>
           <a:prstGeom prst="rect">
             <a:avLst/>
@@ -6362,7 +6362,7 @@
         </p:nvSpPr>
         <p:spPr>
           <a:xfrm>
-            <a:off x="1828800" y="2810255"/>
+            <a:off x="1828800" y="2807207"/>
             <a:ext cx="8503920" cy="548640"/>
           </a:xfrm>
           <a:prstGeom prst="rect">
@@ -7304,7 +7304,7 @@
       </p:sp>
       <p:pic>
         <p:nvPicPr>
-          <p:cNvPr id="10" name="Picture 9" descr="c0129e6e5f8235a4.png"/>
+          <p:cNvPr id="10" name="Picture 9" descr="8a62f6a035ac0923.png"/>
           <p:cNvPicPr>
             <a:picLocks noChangeAspect="1"/>
           </p:cNvPicPr>
@@ -7369,7 +7369,7 @@
         </p:nvSpPr>
         <p:spPr>
           <a:xfrm>
-            <a:off x="2110520" y="2766060"/>
+            <a:off x="2108996" y="2766060"/>
             <a:ext cx="1485415" cy="457200"/>
           </a:xfrm>
           <a:prstGeom prst="rect">
@@ -7398,7 +7398,7 @@
       </p:sp>
       <p:pic>
         <p:nvPicPr>
-          <p:cNvPr id="13" name="Picture 12" descr="1f70e4cbe52b3701.png"/>
+          <p:cNvPr id="13" name="Picture 12" descr="ef7f1368723bd8d2.png"/>
           <p:cNvPicPr>
             <a:picLocks noChangeAspect="1"/>
           </p:cNvPicPr>
@@ -7412,8 +7412,8 @@
         </p:blipFill>
         <p:spPr>
           <a:xfrm>
-            <a:off x="3458776" y="2827019"/>
-            <a:ext cx="335280" cy="335280"/>
+            <a:off x="3457252" y="2827019"/>
+            <a:ext cx="338328" cy="335280"/>
           </a:xfrm>
           <a:prstGeom prst="rect">
             <a:avLst/>
@@ -7428,7 +7428,7 @@
         </p:nvSpPr>
         <p:spPr>
           <a:xfrm>
-            <a:off x="3794056" y="2766060"/>
+            <a:off x="3795580" y="2766060"/>
             <a:ext cx="6394102" cy="457200"/>
           </a:xfrm>
           <a:prstGeom prst="rect">
@@ -8779,7 +8779,7 @@
       </p:sp>
       <p:pic>
         <p:nvPicPr>
-          <p:cNvPr id="9" name="Picture 8" descr="0682cf5d6aba1b5d.png"/>
+          <p:cNvPr id="9" name="Picture 8" descr="6041188335e6f77a.png"/>
           <p:cNvPicPr>
             <a:picLocks noChangeAspect="1"/>
           </p:cNvPicPr>
@@ -8793,8 +8793,8 @@
         </p:blipFill>
         <p:spPr>
           <a:xfrm>
-            <a:off x="5443728" y="2103120"/>
-            <a:ext cx="1274064" cy="512064"/>
+            <a:off x="5440679" y="2103120"/>
+            <a:ext cx="1280160" cy="512064"/>
           </a:xfrm>
           <a:prstGeom prst="rect">
             <a:avLst/>
@@ -9538,7 +9538,7 @@
       </p:sp>
       <p:pic>
         <p:nvPicPr>
-          <p:cNvPr id="9" name="Picture 8" descr="d3482028085e5061.png"/>
+          <p:cNvPr id="9" name="Picture 8" descr="d04038ca86675cde.png"/>
           <p:cNvPicPr>
             <a:picLocks noChangeAspect="1"/>
           </p:cNvPicPr>
@@ -9552,8 +9552,8 @@
         </p:blipFill>
         <p:spPr>
           <a:xfrm>
-            <a:off x="5603748" y="2103120"/>
-            <a:ext cx="954023" cy="518160"/>
+            <a:off x="5602223" y="2103120"/>
+            <a:ext cx="957072" cy="515112"/>
           </a:xfrm>
           <a:prstGeom prst="rect">
             <a:avLst/>
@@ -9568,7 +9568,7 @@
         </p:nvSpPr>
         <p:spPr>
           <a:xfrm>
-            <a:off x="1828800" y="2895599"/>
+            <a:off x="1828800" y="2892552"/>
             <a:ext cx="8503920" cy="548640"/>
           </a:xfrm>
           <a:prstGeom prst="rect">
@@ -10506,7 +10506,7 @@
       </p:sp>
       <p:pic>
         <p:nvPicPr>
-          <p:cNvPr id="9" name="Picture 8" descr="fba9bd108908810b.png"/>
+          <p:cNvPr id="9" name="Picture 8" descr="f594624abcde5121.png"/>
           <p:cNvPicPr>
             <a:picLocks noChangeAspect="1"/>
           </p:cNvPicPr>
@@ -10520,8 +10520,8 @@
         </p:blipFill>
         <p:spPr>
           <a:xfrm>
-            <a:off x="5490971" y="2103120"/>
-            <a:ext cx="1179576" cy="426720"/>
+            <a:off x="5489448" y="2103120"/>
+            <a:ext cx="1182624" cy="423672"/>
           </a:xfrm>
           <a:prstGeom prst="rect">
             <a:avLst/>
@@ -10536,7 +10536,7 @@
         </p:nvSpPr>
         <p:spPr>
           <a:xfrm>
-            <a:off x="777240" y="2758440"/>
+            <a:off x="777240" y="2755392"/>
             <a:ext cx="10607040" cy="465151"/>
           </a:xfrm>
           <a:prstGeom prst="rect">
@@ -10571,7 +10571,7 @@
         </p:nvSpPr>
         <p:spPr>
           <a:xfrm>
-            <a:off x="1874519" y="3424759"/>
+            <a:off x="1874519" y="3421711"/>
             <a:ext cx="4572000" cy="548640"/>
           </a:xfrm>
           <a:prstGeom prst="rect">
@@ -10624,7 +10624,7 @@
         </p:nvSpPr>
         <p:spPr>
           <a:xfrm>
-            <a:off x="6629400" y="3424759"/>
+            <a:off x="6629400" y="3421711"/>
             <a:ext cx="4572000" cy="548640"/>
           </a:xfrm>
           <a:prstGeom prst="rect">
@@ -10677,7 +10677,7 @@
         </p:nvSpPr>
         <p:spPr>
           <a:xfrm>
-            <a:off x="1874519" y="4110559"/>
+            <a:off x="1874519" y="4107511"/>
             <a:ext cx="4572000" cy="548640"/>
           </a:xfrm>
           <a:prstGeom prst="rect">
@@ -10730,7 +10730,7 @@
         </p:nvSpPr>
         <p:spPr>
           <a:xfrm>
-            <a:off x="6629400" y="4110559"/>
+            <a:off x="6629400" y="4107511"/>
             <a:ext cx="4572000" cy="548640"/>
           </a:xfrm>
           <a:prstGeom prst="rect">
@@ -10783,7 +10783,7 @@
         </p:nvSpPr>
         <p:spPr>
           <a:xfrm>
-            <a:off x="777240" y="5116399"/>
+            <a:off x="777240" y="5113351"/>
             <a:ext cx="10607040" cy="548640"/>
           </a:xfrm>
           <a:prstGeom prst="rect">
@@ -11653,7 +11653,7 @@
       </p:sp>
       <p:pic>
         <p:nvPicPr>
-          <p:cNvPr id="9" name="Picture 8" descr="806ea7b0be26cfa4.png"/>
+          <p:cNvPr id="9" name="Picture 8" descr="09b459f0d29bb491.png"/>
           <p:cNvPicPr>
             <a:picLocks noChangeAspect="1"/>
           </p:cNvPicPr>
@@ -11667,8 +11667,8 @@
         </p:blipFill>
         <p:spPr>
           <a:xfrm>
-            <a:off x="5603748" y="2103120"/>
-            <a:ext cx="954023" cy="518160"/>
+            <a:off x="5602223" y="2103120"/>
+            <a:ext cx="957072" cy="515112"/>
           </a:xfrm>
           <a:prstGeom prst="rect">
             <a:avLst/>
@@ -11683,7 +11683,7 @@
         </p:nvSpPr>
         <p:spPr>
           <a:xfrm>
-            <a:off x="777240" y="2849879"/>
+            <a:off x="777240" y="2846832"/>
             <a:ext cx="10607040" cy="465151"/>
           </a:xfrm>
           <a:prstGeom prst="rect">
@@ -11718,7 +11718,7 @@
         </p:nvSpPr>
         <p:spPr>
           <a:xfrm>
-            <a:off x="1874519" y="3516199"/>
+            <a:off x="1874519" y="3513151"/>
             <a:ext cx="4572000" cy="548640"/>
           </a:xfrm>
           <a:prstGeom prst="rect">
@@ -11771,7 +11771,7 @@
         </p:nvSpPr>
         <p:spPr>
           <a:xfrm>
-            <a:off x="6629400" y="3516199"/>
+            <a:off x="6629400" y="3513151"/>
             <a:ext cx="4572000" cy="548640"/>
           </a:xfrm>
           <a:prstGeom prst="rect">
@@ -11824,7 +11824,7 @@
         </p:nvSpPr>
         <p:spPr>
           <a:xfrm>
-            <a:off x="1874519" y="4201999"/>
+            <a:off x="1874519" y="4198951"/>
             <a:ext cx="4572000" cy="548640"/>
           </a:xfrm>
           <a:prstGeom prst="rect">
@@ -11877,7 +11877,7 @@
         </p:nvSpPr>
         <p:spPr>
           <a:xfrm>
-            <a:off x="6629400" y="4201999"/>
+            <a:off x="6629400" y="4198951"/>
             <a:ext cx="4572000" cy="548640"/>
           </a:xfrm>
           <a:prstGeom prst="rect">
@@ -11930,7 +11930,7 @@
         </p:nvSpPr>
         <p:spPr>
           <a:xfrm>
-            <a:off x="777240" y="5207839"/>
+            <a:off x="777240" y="5204791"/>
             <a:ext cx="10607040" cy="548640"/>
           </a:xfrm>
           <a:prstGeom prst="rect">
@@ -12588,7 +12588,7 @@
       </p:sp>
       <p:pic>
         <p:nvPicPr>
-          <p:cNvPr id="9" name="Picture 8" descr="80e874aaffdac41d.png"/>
+          <p:cNvPr id="9" name="Picture 8" descr="5629cbc54327d7ca.png"/>
           <p:cNvPicPr>
             <a:picLocks noChangeAspect="1"/>
           </p:cNvPicPr>
@@ -12602,8 +12602,8 @@
         </p:blipFill>
         <p:spPr>
           <a:xfrm>
-            <a:off x="4829556" y="2103120"/>
-            <a:ext cx="2502408" cy="518160"/>
+            <a:off x="4826507" y="2103120"/>
+            <a:ext cx="2508504" cy="515112"/>
           </a:xfrm>
           <a:prstGeom prst="rect">
             <a:avLst/>
@@ -12618,7 +12618,7 @@
         </p:nvSpPr>
         <p:spPr>
           <a:xfrm>
-            <a:off x="1828800" y="2895599"/>
+            <a:off x="1828800" y="2892552"/>
             <a:ext cx="8503920" cy="548640"/>
           </a:xfrm>
           <a:prstGeom prst="rect">
@@ -13983,7 +13983,7 @@
       </p:sp>
       <p:pic>
         <p:nvPicPr>
-          <p:cNvPr id="9" name="Picture 8" descr="f58654af4b9460c1.png"/>
+          <p:cNvPr id="9" name="Picture 8" descr="c01490de0bb5481d.png"/>
           <p:cNvPicPr>
             <a:picLocks noChangeAspect="1"/>
           </p:cNvPicPr>
@@ -13998,7 +13998,7 @@
         <p:spPr>
           <a:xfrm>
             <a:off x="4913376" y="2103120"/>
-            <a:ext cx="2334768" cy="853440"/>
+            <a:ext cx="2334768" cy="850392"/>
           </a:xfrm>
           <a:prstGeom prst="rect">
             <a:avLst/>
@@ -14013,7 +14013,7 @@
         </p:nvSpPr>
         <p:spPr>
           <a:xfrm>
-            <a:off x="1828800" y="3230880"/>
+            <a:off x="1828800" y="3227832"/>
             <a:ext cx="8503920" cy="548640"/>
           </a:xfrm>
           <a:prstGeom prst="rect">
@@ -14905,7 +14905,7 @@
       </p:sp>
       <p:pic>
         <p:nvPicPr>
-          <p:cNvPr id="11" name="Picture 10" descr="c4163b4848547f9b.png"/>
+          <p:cNvPr id="11" name="Picture 10" descr="a1cd0a7df962e7c6.png"/>
           <p:cNvPicPr>
             <a:picLocks noChangeAspect="1"/>
           </p:cNvPicPr>
@@ -16893,7 +16893,7 @@
       </p:sp>
       <p:pic>
         <p:nvPicPr>
-          <p:cNvPr id="20" name="Picture 19" descr="6b135f4ce2bc7d6d.png"/>
+          <p:cNvPr id="20" name="Picture 19" descr="05f36d568d134a63.png"/>
           <p:cNvPicPr>
             <a:picLocks noChangeAspect="1"/>
           </p:cNvPicPr>
@@ -16907,7 +16907,7 @@
         </p:blipFill>
         <p:spPr>
           <a:xfrm>
-            <a:off x="3173976" y="4704588"/>
+            <a:off x="3170928" y="4707636"/>
             <a:ext cx="2410968" cy="344424"/>
           </a:xfrm>
           <a:prstGeom prst="rect">
@@ -16923,7 +16923,7 @@
         </p:nvSpPr>
         <p:spPr>
           <a:xfrm>
-            <a:off x="5584944" y="4648200"/>
+            <a:off x="5581896" y="4651248"/>
             <a:ext cx="988583" cy="457200"/>
           </a:xfrm>
           <a:prstGeom prst="rect">
@@ -16952,7 +16952,7 @@
       </p:sp>
       <p:pic>
         <p:nvPicPr>
-          <p:cNvPr id="22" name="Picture 21" descr="2d5d7a819fe41129.png"/>
+          <p:cNvPr id="22" name="Picture 21" descr="94daac294903ad2b.png"/>
           <p:cNvPicPr>
             <a:picLocks noChangeAspect="1"/>
           </p:cNvPicPr>
@@ -16966,8 +16966,8 @@
         </p:blipFill>
         <p:spPr>
           <a:xfrm>
-            <a:off x="6436367" y="4535424"/>
-            <a:ext cx="2551176" cy="682752"/>
+            <a:off x="6433319" y="4535424"/>
+            <a:ext cx="2557272" cy="688848"/>
           </a:xfrm>
           <a:prstGeom prst="rect">
             <a:avLst/>
@@ -17309,7 +17309,7 @@
       </p:cxnSp>
       <p:pic>
         <p:nvPicPr>
-          <p:cNvPr id="11" name="Picture 10" descr="41c22134e9781a01.png"/>
+          <p:cNvPr id="11" name="Picture 10" descr="7ac50a12202cf504.png"/>
           <p:cNvPicPr>
             <a:picLocks noChangeAspect="1"/>
           </p:cNvPicPr>
@@ -17323,8 +17323,8 @@
         </p:blipFill>
         <p:spPr>
           <a:xfrm>
-            <a:off x="3910583" y="2340864"/>
-            <a:ext cx="4340352" cy="414528"/>
+            <a:off x="3909059" y="2340864"/>
+            <a:ext cx="4343400" cy="411480"/>
           </a:xfrm>
           <a:prstGeom prst="rect">
             <a:avLst/>
@@ -17333,7 +17333,7 @@
       </p:pic>
       <p:pic>
         <p:nvPicPr>
-          <p:cNvPr id="12" name="Picture 11" descr="662e16c748d77846.png"/>
+          <p:cNvPr id="12" name="Picture 11" descr="70277ad35df7b540.png"/>
           <p:cNvPicPr>
             <a:picLocks noChangeAspect="1"/>
           </p:cNvPicPr>
@@ -17347,8 +17347,8 @@
         </p:blipFill>
         <p:spPr>
           <a:xfrm>
-            <a:off x="1675829" y="3029711"/>
-            <a:ext cx="3590544" cy="411480"/>
+            <a:off x="1674305" y="3026664"/>
+            <a:ext cx="3593592" cy="411480"/>
           </a:xfrm>
           <a:prstGeom prst="rect">
             <a:avLst/>
@@ -17363,7 +17363,7 @@
         </p:nvSpPr>
         <p:spPr>
           <a:xfrm>
-            <a:off x="5266373" y="3006852"/>
+            <a:off x="5267897" y="3003804"/>
             <a:ext cx="5356477" cy="457200"/>
           </a:xfrm>
           <a:prstGeom prst="rect">
@@ -17398,7 +17398,7 @@
         </p:nvSpPr>
         <p:spPr>
           <a:xfrm>
-            <a:off x="987552" y="3738371"/>
+            <a:off x="987552" y="3735324"/>
             <a:ext cx="3419263" cy="457200"/>
           </a:xfrm>
           <a:prstGeom prst="rect">
@@ -17427,7 +17427,7 @@
       </p:sp>
       <p:pic>
         <p:nvPicPr>
-          <p:cNvPr id="15" name="Picture 14" descr="fcadf241f78a28ee.png"/>
+          <p:cNvPr id="15" name="Picture 14" descr="24a77d9897599859.png"/>
           <p:cNvPicPr>
             <a:picLocks noChangeAspect="1"/>
           </p:cNvPicPr>
@@ -17441,8 +17441,8 @@
         </p:blipFill>
         <p:spPr>
           <a:xfrm>
-            <a:off x="4269655" y="3814572"/>
-            <a:ext cx="2313432" cy="304800"/>
+            <a:off x="4269655" y="3810000"/>
+            <a:ext cx="2310384" cy="307848"/>
           </a:xfrm>
           <a:prstGeom prst="rect">
             <a:avLst/>
@@ -17457,7 +17457,7 @@
         </p:nvSpPr>
         <p:spPr>
           <a:xfrm>
-            <a:off x="987552" y="4405883"/>
+            <a:off x="987552" y="4402836"/>
             <a:ext cx="3088445" cy="457200"/>
           </a:xfrm>
           <a:prstGeom prst="rect">
@@ -17486,7 +17486,7 @@
       </p:sp>
       <p:pic>
         <p:nvPicPr>
-          <p:cNvPr id="17" name="Picture 16" descr="0cd0ba214ccb8e6b.png"/>
+          <p:cNvPr id="17" name="Picture 16" descr="442d6b470fc718df.png"/>
           <p:cNvPicPr>
             <a:picLocks noChangeAspect="1"/>
           </p:cNvPicPr>
@@ -17500,7 +17500,7 @@
         </p:blipFill>
         <p:spPr>
           <a:xfrm>
-            <a:off x="3938837" y="4457699"/>
+            <a:off x="3938837" y="4454652"/>
             <a:ext cx="3931920" cy="353568"/>
           </a:xfrm>
           <a:prstGeom prst="rect">
@@ -17808,7 +17808,7 @@
       </p:cxnSp>
       <p:pic>
         <p:nvPicPr>
-          <p:cNvPr id="10" name="Picture 9" descr="2e33d645aeaa1178.png"/>
+          <p:cNvPr id="10" name="Picture 9" descr="397ff79ed1aedf39.png"/>
           <p:cNvPicPr>
             <a:picLocks noChangeAspect="1"/>
           </p:cNvPicPr>
@@ -17867,7 +17867,7 @@
       </p:sp>
       <p:pic>
         <p:nvPicPr>
-          <p:cNvPr id="12" name="Picture 11" descr="69332e223f5c0903.png"/>
+          <p:cNvPr id="12" name="Picture 11" descr="945c6ee9939237bc.png"/>
           <p:cNvPicPr>
             <a:picLocks noChangeAspect="1"/>
           </p:cNvPicPr>
@@ -17926,7 +17926,7 @@
       </p:sp>
       <p:pic>
         <p:nvPicPr>
-          <p:cNvPr id="14" name="Picture 13" descr="5ee46b5f1c8eb3dc.png"/>
+          <p:cNvPr id="14" name="Picture 13" descr="084422fcc8d0c20d.png"/>
           <p:cNvPicPr>
             <a:picLocks noChangeAspect="1"/>
           </p:cNvPicPr>
@@ -17985,7 +17985,7 @@
       </p:sp>
       <p:pic>
         <p:nvPicPr>
-          <p:cNvPr id="16" name="Picture 15" descr="b95845733ef6f189.png"/>
+          <p:cNvPr id="16" name="Picture 15" descr="36d129603f5ad60f.png"/>
           <p:cNvPicPr>
             <a:picLocks noChangeAspect="1"/>
           </p:cNvPicPr>
@@ -19157,7 +19157,7 @@
       </p:sp>
       <p:pic>
         <p:nvPicPr>
-          <p:cNvPr id="12" name="Picture 11" descr="376929772ce31471.png"/>
+          <p:cNvPr id="12" name="Picture 11" descr="1dab80afbf17752e.png"/>
           <p:cNvPicPr>
             <a:picLocks noChangeAspect="1"/>
           </p:cNvPicPr>
@@ -19216,7 +19216,7 @@
       </p:sp>
       <p:pic>
         <p:nvPicPr>
-          <p:cNvPr id="14" name="Picture 13" descr="0a7a0f6911d99284.png"/>
+          <p:cNvPr id="14" name="Picture 13" descr="672d0a52c53d682d.png"/>
           <p:cNvPicPr>
             <a:picLocks noChangeAspect="1"/>
           </p:cNvPicPr>
@@ -19825,7 +19825,7 @@
       </p:sp>
       <p:pic>
         <p:nvPicPr>
-          <p:cNvPr id="9" name="Picture 8" descr="6051f4233fc2124e.png"/>
+          <p:cNvPr id="9" name="Picture 8" descr="2e30ee0ae8764250.png"/>
           <p:cNvPicPr>
             <a:picLocks noChangeAspect="1"/>
           </p:cNvPicPr>
@@ -19840,7 +19840,7 @@
         <p:spPr>
           <a:xfrm>
             <a:off x="1828800" y="1920240"/>
-            <a:ext cx="2871216" cy="347472"/>
+            <a:ext cx="2874264" cy="347472"/>
           </a:xfrm>
           <a:prstGeom prst="rect">
             <a:avLst/>
@@ -19855,8 +19855,8 @@
         </p:nvSpPr>
         <p:spPr>
           <a:xfrm>
-            <a:off x="5157216" y="1865376"/>
-            <a:ext cx="6227063" cy="502920"/>
+            <a:off x="5160264" y="1865376"/>
+            <a:ext cx="6224015" cy="502920"/>
           </a:xfrm>
           <a:prstGeom prst="rect">
             <a:avLst/>
@@ -19884,7 +19884,7 @@
       </p:sp>
       <p:pic>
         <p:nvPicPr>
-          <p:cNvPr id="11" name="Picture 10" descr="9f1f021abe10f4c1.png"/>
+          <p:cNvPr id="11" name="Picture 10" descr="bf8e4f9dbe4a99c0.png"/>
           <p:cNvPicPr>
             <a:picLocks noChangeAspect="1"/>
           </p:cNvPicPr>
@@ -19943,7 +19943,7 @@
       </p:sp>
       <p:pic>
         <p:nvPicPr>
-          <p:cNvPr id="13" name="Picture 12" descr="4be523c728a53ad7.png"/>
+          <p:cNvPr id="13" name="Picture 12" descr="87121b7311d54a83.png"/>
           <p:cNvPicPr>
             <a:picLocks noChangeAspect="1"/>
           </p:cNvPicPr>
@@ -19958,7 +19958,7 @@
         <p:spPr>
           <a:xfrm>
             <a:off x="1828800" y="3163823"/>
-            <a:ext cx="1807464" cy="286512"/>
+            <a:ext cx="1813560" cy="286512"/>
           </a:xfrm>
           <a:prstGeom prst="rect">
             <a:avLst/>
@@ -19973,7 +19973,7 @@
         </p:nvSpPr>
         <p:spPr>
           <a:xfrm>
-            <a:off x="4093464" y="3078479"/>
+            <a:off x="4099560" y="3078479"/>
             <a:ext cx="6400800" cy="502920"/>
           </a:xfrm>
           <a:prstGeom prst="rect">

--- a/a7/build/out/u3/A7 3.01  Slides.pptx
+++ b/a7/build/out/u3/A7 3.01  Slides.pptx
@@ -4105,7 +4105,7 @@
       </p:sp>
       <p:pic>
         <p:nvPicPr>
-          <p:cNvPr id="9" name="Picture 8" descr="bf0808adb260144b.png"/>
+          <p:cNvPr id="9" name="Picture 8" descr="f61491015b87f325.png"/>
           <p:cNvPicPr>
             <a:picLocks noChangeAspect="1"/>
           </p:cNvPicPr>
@@ -4811,7 +4811,7 @@
       </p:sp>
       <p:pic>
         <p:nvPicPr>
-          <p:cNvPr id="9" name="Picture 8" descr="086f65450dee5af5.png"/>
+          <p:cNvPr id="9" name="Picture 8" descr="996ff5847669506b.png"/>
           <p:cNvPicPr>
             <a:picLocks noChangeAspect="1"/>
           </p:cNvPicPr>
@@ -4826,7 +4826,7 @@
         <p:spPr>
           <a:xfrm>
             <a:off x="1828800" y="1920240"/>
-            <a:ext cx="4187952" cy="414528"/>
+            <a:ext cx="4187952" cy="411480"/>
           </a:xfrm>
           <a:prstGeom prst="rect">
             <a:avLst/>
@@ -4841,7 +4841,7 @@
         </p:nvSpPr>
         <p:spPr>
           <a:xfrm>
-            <a:off x="6473952" y="1898904"/>
+            <a:off x="6473952" y="1897380"/>
             <a:ext cx="4910327" cy="502920"/>
           </a:xfrm>
           <a:prstGeom prst="rect">
@@ -4870,7 +4870,7 @@
       </p:sp>
       <p:pic>
         <p:nvPicPr>
-          <p:cNvPr id="11" name="Picture 10" descr="0598f1911893c221.png"/>
+          <p:cNvPr id="11" name="Picture 10" descr="816ea1a633337a34.png"/>
           <p:cNvPicPr>
             <a:picLocks noChangeAspect="1"/>
           </p:cNvPicPr>
@@ -4884,8 +4884,8 @@
         </p:blipFill>
         <p:spPr>
           <a:xfrm>
-            <a:off x="1828800" y="2609087"/>
-            <a:ext cx="1694688" cy="414528"/>
+            <a:off x="1828800" y="2606040"/>
+            <a:ext cx="1697736" cy="411480"/>
           </a:xfrm>
           <a:prstGeom prst="rect">
             <a:avLst/>
@@ -4900,7 +4900,7 @@
         </p:nvSpPr>
         <p:spPr>
           <a:xfrm>
-            <a:off x="3980688" y="2587751"/>
+            <a:off x="3983736" y="2583180"/>
             <a:ext cx="6400800" cy="502920"/>
           </a:xfrm>
           <a:prstGeom prst="rect">
@@ -4929,7 +4929,7 @@
       </p:sp>
       <p:pic>
         <p:nvPicPr>
-          <p:cNvPr id="13" name="Picture 12" descr="ed595f21e3460e30.png"/>
+          <p:cNvPr id="13" name="Picture 12" descr="ed67bc8f2938c145.png"/>
           <p:cNvPicPr>
             <a:picLocks noChangeAspect="1"/>
           </p:cNvPicPr>
@@ -4943,8 +4943,8 @@
         </p:blipFill>
         <p:spPr>
           <a:xfrm>
-            <a:off x="1828800" y="3297935"/>
-            <a:ext cx="1694688" cy="408432"/>
+            <a:off x="1828800" y="3291840"/>
+            <a:ext cx="1697736" cy="405384"/>
           </a:xfrm>
           <a:prstGeom prst="rect">
             <a:avLst/>
@@ -4959,7 +4959,7 @@
         </p:nvSpPr>
         <p:spPr>
           <a:xfrm>
-            <a:off x="3980688" y="3273551"/>
+            <a:off x="3983736" y="3265932"/>
             <a:ext cx="6400800" cy="502920"/>
           </a:xfrm>
           <a:prstGeom prst="rect">
@@ -5591,7 +5591,7 @@
       </p:sp>
       <p:pic>
         <p:nvPicPr>
-          <p:cNvPr id="9" name="Picture 8" descr="11529ecb1a26ecd4.png"/>
+          <p:cNvPr id="9" name="Picture 8" descr="44c6670a1f908383.png"/>
           <p:cNvPicPr>
             <a:picLocks noChangeAspect="1"/>
           </p:cNvPicPr>
@@ -6332,7 +6332,7 @@
       </p:sp>
       <p:pic>
         <p:nvPicPr>
-          <p:cNvPr id="9" name="Picture 8" descr="d83e838f1c2bb668.png"/>
+          <p:cNvPr id="9" name="Picture 8" descr="c64ca1a4dc51bf5f.png"/>
           <p:cNvPicPr>
             <a:picLocks noChangeAspect="1"/>
           </p:cNvPicPr>
@@ -7304,7 +7304,7 @@
       </p:sp>
       <p:pic>
         <p:nvPicPr>
-          <p:cNvPr id="10" name="Picture 9" descr="8a62f6a035ac0923.png"/>
+          <p:cNvPr id="10" name="Picture 9" descr="1c425a5d0040b1cc.png"/>
           <p:cNvPicPr>
             <a:picLocks noChangeAspect="1"/>
           </p:cNvPicPr>
@@ -7318,8 +7318,8 @@
         </p:blipFill>
         <p:spPr>
           <a:xfrm>
-            <a:off x="7834978" y="2139696"/>
-            <a:ext cx="335280" cy="338328"/>
+            <a:off x="7834978" y="2138171"/>
+            <a:ext cx="335280" cy="341376"/>
           </a:xfrm>
           <a:prstGeom prst="rect">
             <a:avLst/>
@@ -7369,7 +7369,7 @@
         </p:nvSpPr>
         <p:spPr>
           <a:xfrm>
-            <a:off x="2108996" y="2766060"/>
+            <a:off x="2110520" y="2766060"/>
             <a:ext cx="1485415" cy="457200"/>
           </a:xfrm>
           <a:prstGeom prst="rect">
@@ -7398,7 +7398,7 @@
       </p:sp>
       <p:pic>
         <p:nvPicPr>
-          <p:cNvPr id="13" name="Picture 12" descr="ef7f1368723bd8d2.png"/>
+          <p:cNvPr id="13" name="Picture 12" descr="029fa134c9dbd6b4.png"/>
           <p:cNvPicPr>
             <a:picLocks noChangeAspect="1"/>
           </p:cNvPicPr>
@@ -7412,8 +7412,8 @@
         </p:blipFill>
         <p:spPr>
           <a:xfrm>
-            <a:off x="3457252" y="2827019"/>
-            <a:ext cx="338328" cy="335280"/>
+            <a:off x="3458776" y="2827019"/>
+            <a:ext cx="335280" cy="335280"/>
           </a:xfrm>
           <a:prstGeom prst="rect">
             <a:avLst/>
@@ -7428,7 +7428,7 @@
         </p:nvSpPr>
         <p:spPr>
           <a:xfrm>
-            <a:off x="3795580" y="2766060"/>
+            <a:off x="3794056" y="2766060"/>
             <a:ext cx="6394102" cy="457200"/>
           </a:xfrm>
           <a:prstGeom prst="rect">
@@ -8779,7 +8779,7 @@
       </p:sp>
       <p:pic>
         <p:nvPicPr>
-          <p:cNvPr id="9" name="Picture 8" descr="6041188335e6f77a.png"/>
+          <p:cNvPr id="9" name="Picture 8" descr="b6b82c3fc17cdb45.png"/>
           <p:cNvPicPr>
             <a:picLocks noChangeAspect="1"/>
           </p:cNvPicPr>
@@ -8794,7 +8794,7 @@
         <p:spPr>
           <a:xfrm>
             <a:off x="5440679" y="2103120"/>
-            <a:ext cx="1280160" cy="512064"/>
+            <a:ext cx="1280160" cy="515112"/>
           </a:xfrm>
           <a:prstGeom prst="rect">
             <a:avLst/>
@@ -8809,7 +8809,7 @@
         </p:nvSpPr>
         <p:spPr>
           <a:xfrm>
-            <a:off x="1828800" y="2889503"/>
+            <a:off x="1828800" y="2892552"/>
             <a:ext cx="8503920" cy="548640"/>
           </a:xfrm>
           <a:prstGeom prst="rect">
@@ -9538,7 +9538,7 @@
       </p:sp>
       <p:pic>
         <p:nvPicPr>
-          <p:cNvPr id="9" name="Picture 8" descr="d04038ca86675cde.png"/>
+          <p:cNvPr id="9" name="Picture 8" descr="35097bf00c93665c.png"/>
           <p:cNvPicPr>
             <a:picLocks noChangeAspect="1"/>
           </p:cNvPicPr>
@@ -9552,8 +9552,8 @@
         </p:blipFill>
         <p:spPr>
           <a:xfrm>
-            <a:off x="5602223" y="2103120"/>
-            <a:ext cx="957072" cy="515112"/>
+            <a:off x="5603748" y="2103120"/>
+            <a:ext cx="954023" cy="518160"/>
           </a:xfrm>
           <a:prstGeom prst="rect">
             <a:avLst/>
@@ -9568,7 +9568,7 @@
         </p:nvSpPr>
         <p:spPr>
           <a:xfrm>
-            <a:off x="1828800" y="2892552"/>
+            <a:off x="1828800" y="2895599"/>
             <a:ext cx="8503920" cy="548640"/>
           </a:xfrm>
           <a:prstGeom prst="rect">
@@ -10506,7 +10506,7 @@
       </p:sp>
       <p:pic>
         <p:nvPicPr>
-          <p:cNvPr id="9" name="Picture 8" descr="f594624abcde5121.png"/>
+          <p:cNvPr id="9" name="Picture 8" descr="fc3793d359b5cfff.png"/>
           <p:cNvPicPr>
             <a:picLocks noChangeAspect="1"/>
           </p:cNvPicPr>
@@ -11653,7 +11653,7 @@
       </p:sp>
       <p:pic>
         <p:nvPicPr>
-          <p:cNvPr id="9" name="Picture 8" descr="09b459f0d29bb491.png"/>
+          <p:cNvPr id="9" name="Picture 8" descr="0fac146190426fe8.png"/>
           <p:cNvPicPr>
             <a:picLocks noChangeAspect="1"/>
           </p:cNvPicPr>
@@ -11668,7 +11668,7 @@
         <p:spPr>
           <a:xfrm>
             <a:off x="5602223" y="2103120"/>
-            <a:ext cx="957072" cy="515112"/>
+            <a:ext cx="957072" cy="518160"/>
           </a:xfrm>
           <a:prstGeom prst="rect">
             <a:avLst/>
@@ -11683,7 +11683,7 @@
         </p:nvSpPr>
         <p:spPr>
           <a:xfrm>
-            <a:off x="777240" y="2846832"/>
+            <a:off x="777240" y="2849879"/>
             <a:ext cx="10607040" cy="465151"/>
           </a:xfrm>
           <a:prstGeom prst="rect">
@@ -11718,7 +11718,7 @@
         </p:nvSpPr>
         <p:spPr>
           <a:xfrm>
-            <a:off x="1874519" y="3513151"/>
+            <a:off x="1874519" y="3516199"/>
             <a:ext cx="4572000" cy="548640"/>
           </a:xfrm>
           <a:prstGeom prst="rect">
@@ -11771,7 +11771,7 @@
         </p:nvSpPr>
         <p:spPr>
           <a:xfrm>
-            <a:off x="6629400" y="3513151"/>
+            <a:off x="6629400" y="3516199"/>
             <a:ext cx="4572000" cy="548640"/>
           </a:xfrm>
           <a:prstGeom prst="rect">
@@ -11824,7 +11824,7 @@
         </p:nvSpPr>
         <p:spPr>
           <a:xfrm>
-            <a:off x="1874519" y="4198951"/>
+            <a:off x="1874519" y="4201999"/>
             <a:ext cx="4572000" cy="548640"/>
           </a:xfrm>
           <a:prstGeom prst="rect">
@@ -11877,7 +11877,7 @@
         </p:nvSpPr>
         <p:spPr>
           <a:xfrm>
-            <a:off x="6629400" y="4198951"/>
+            <a:off x="6629400" y="4201999"/>
             <a:ext cx="4572000" cy="548640"/>
           </a:xfrm>
           <a:prstGeom prst="rect">
@@ -11930,7 +11930,7 @@
         </p:nvSpPr>
         <p:spPr>
           <a:xfrm>
-            <a:off x="777240" y="5204791"/>
+            <a:off x="777240" y="5207839"/>
             <a:ext cx="10607040" cy="548640"/>
           </a:xfrm>
           <a:prstGeom prst="rect">
@@ -12588,7 +12588,7 @@
       </p:sp>
       <p:pic>
         <p:nvPicPr>
-          <p:cNvPr id="9" name="Picture 8" descr="5629cbc54327d7ca.png"/>
+          <p:cNvPr id="9" name="Picture 8" descr="5b98b74270202968.png"/>
           <p:cNvPicPr>
             <a:picLocks noChangeAspect="1"/>
           </p:cNvPicPr>
@@ -12602,8 +12602,8 @@
         </p:blipFill>
         <p:spPr>
           <a:xfrm>
-            <a:off x="4826507" y="2103120"/>
-            <a:ext cx="2508504" cy="515112"/>
+            <a:off x="4828031" y="2103120"/>
+            <a:ext cx="2505456" cy="518160"/>
           </a:xfrm>
           <a:prstGeom prst="rect">
             <a:avLst/>
@@ -12618,7 +12618,7 @@
         </p:nvSpPr>
         <p:spPr>
           <a:xfrm>
-            <a:off x="1828800" y="2892552"/>
+            <a:off x="1828800" y="2895599"/>
             <a:ext cx="8503920" cy="548640"/>
           </a:xfrm>
           <a:prstGeom prst="rect">
@@ -13983,7 +13983,7 @@
       </p:sp>
       <p:pic>
         <p:nvPicPr>
-          <p:cNvPr id="9" name="Picture 8" descr="c01490de0bb5481d.png"/>
+          <p:cNvPr id="9" name="Picture 8" descr="a9bbd2622d9f1514.png"/>
           <p:cNvPicPr>
             <a:picLocks noChangeAspect="1"/>
           </p:cNvPicPr>
@@ -13997,8 +13997,8 @@
         </p:blipFill>
         <p:spPr>
           <a:xfrm>
-            <a:off x="4913376" y="2103120"/>
-            <a:ext cx="2334768" cy="850392"/>
+            <a:off x="4914900" y="2103120"/>
+            <a:ext cx="2331720" cy="850392"/>
           </a:xfrm>
           <a:prstGeom prst="rect">
             <a:avLst/>
@@ -14876,7 +14876,7 @@
         </p:nvSpPr>
         <p:spPr>
           <a:xfrm>
-            <a:off x="2897912" y="2655139"/>
+            <a:off x="2896388" y="2655139"/>
             <a:ext cx="2190277" cy="457200"/>
           </a:xfrm>
           <a:prstGeom prst="rect">
@@ -14905,7 +14905,7 @@
       </p:sp>
       <p:pic>
         <p:nvPicPr>
-          <p:cNvPr id="11" name="Picture 10" descr="a1cd0a7df962e7c6.png"/>
+          <p:cNvPr id="11" name="Picture 10" descr="45831de1d391fe0a.png"/>
           <p:cNvPicPr>
             <a:picLocks noChangeAspect="1"/>
           </p:cNvPicPr>
@@ -14919,8 +14919,8 @@
         </p:blipFill>
         <p:spPr>
           <a:xfrm>
-            <a:off x="4951030" y="2677999"/>
-            <a:ext cx="1938528" cy="411480"/>
+            <a:off x="4949506" y="2679523"/>
+            <a:ext cx="1941576" cy="408432"/>
           </a:xfrm>
           <a:prstGeom prst="rect">
             <a:avLst/>
@@ -14935,7 +14935,7 @@
         </p:nvSpPr>
         <p:spPr>
           <a:xfrm>
-            <a:off x="6889558" y="2655139"/>
+            <a:off x="6891082" y="2655139"/>
             <a:ext cx="2511209" cy="457200"/>
           </a:xfrm>
           <a:prstGeom prst="rect">
@@ -16893,7 +16893,7 @@
       </p:sp>
       <p:pic>
         <p:nvPicPr>
-          <p:cNvPr id="20" name="Picture 19" descr="05f36d568d134a63.png"/>
+          <p:cNvPr id="20" name="Picture 19" descr="0ab145e8ca7379f4.png"/>
           <p:cNvPicPr>
             <a:picLocks noChangeAspect="1"/>
           </p:cNvPicPr>
@@ -16907,7 +16907,7 @@
         </p:blipFill>
         <p:spPr>
           <a:xfrm>
-            <a:off x="3170928" y="4707636"/>
+            <a:off x="3175500" y="4709160"/>
             <a:ext cx="2410968" cy="344424"/>
           </a:xfrm>
           <a:prstGeom prst="rect">
@@ -16923,7 +16923,7 @@
         </p:nvSpPr>
         <p:spPr>
           <a:xfrm>
-            <a:off x="5581896" y="4651248"/>
+            <a:off x="5586468" y="4652772"/>
             <a:ext cx="988583" cy="457200"/>
           </a:xfrm>
           <a:prstGeom prst="rect">
@@ -16952,7 +16952,7 @@
       </p:sp>
       <p:pic>
         <p:nvPicPr>
-          <p:cNvPr id="22" name="Picture 21" descr="94daac294903ad2b.png"/>
+          <p:cNvPr id="22" name="Picture 21" descr="3b6b0e0ba8659f8d.png"/>
           <p:cNvPicPr>
             <a:picLocks noChangeAspect="1"/>
           </p:cNvPicPr>
@@ -16966,8 +16966,8 @@
         </p:blipFill>
         <p:spPr>
           <a:xfrm>
-            <a:off x="6433319" y="4535424"/>
-            <a:ext cx="2557272" cy="688848"/>
+            <a:off x="6437891" y="4535424"/>
+            <a:ext cx="2548128" cy="691896"/>
           </a:xfrm>
           <a:prstGeom prst="rect">
             <a:avLst/>
@@ -17309,7 +17309,7 @@
       </p:cxnSp>
       <p:pic>
         <p:nvPicPr>
-          <p:cNvPr id="11" name="Picture 10" descr="7ac50a12202cf504.png"/>
+          <p:cNvPr id="11" name="Picture 10" descr="979221dae3c66bd9.png"/>
           <p:cNvPicPr>
             <a:picLocks noChangeAspect="1"/>
           </p:cNvPicPr>
@@ -17323,8 +17323,8 @@
         </p:blipFill>
         <p:spPr>
           <a:xfrm>
-            <a:off x="3909059" y="2340864"/>
-            <a:ext cx="4343400" cy="411480"/>
+            <a:off x="3907536" y="2340864"/>
+            <a:ext cx="4346448" cy="411480"/>
           </a:xfrm>
           <a:prstGeom prst="rect">
             <a:avLst/>
@@ -17333,7 +17333,7 @@
       </p:pic>
       <p:pic>
         <p:nvPicPr>
-          <p:cNvPr id="12" name="Picture 11" descr="70277ad35df7b540.png"/>
+          <p:cNvPr id="12" name="Picture 11" descr="3ebe349f0ffa36d4.png"/>
           <p:cNvPicPr>
             <a:picLocks noChangeAspect="1"/>
           </p:cNvPicPr>
@@ -17347,8 +17347,8 @@
         </p:blipFill>
         <p:spPr>
           <a:xfrm>
-            <a:off x="1674305" y="3026664"/>
-            <a:ext cx="3593592" cy="411480"/>
+            <a:off x="1672781" y="3028188"/>
+            <a:ext cx="3596640" cy="408432"/>
           </a:xfrm>
           <a:prstGeom prst="rect">
             <a:avLst/>
@@ -17363,7 +17363,7 @@
         </p:nvSpPr>
         <p:spPr>
           <a:xfrm>
-            <a:off x="5267897" y="3003804"/>
+            <a:off x="5269421" y="3003804"/>
             <a:ext cx="5356477" cy="457200"/>
           </a:xfrm>
           <a:prstGeom prst="rect">
@@ -17427,7 +17427,7 @@
       </p:sp>
       <p:pic>
         <p:nvPicPr>
-          <p:cNvPr id="15" name="Picture 14" descr="24a77d9897599859.png"/>
+          <p:cNvPr id="15" name="Picture 14" descr="90652a6387118d5a.png"/>
           <p:cNvPicPr>
             <a:picLocks noChangeAspect="1"/>
           </p:cNvPicPr>
@@ -17442,7 +17442,7 @@
         <p:spPr>
           <a:xfrm>
             <a:off x="4269655" y="3810000"/>
-            <a:ext cx="2310384" cy="307848"/>
+            <a:ext cx="2313432" cy="307848"/>
           </a:xfrm>
           <a:prstGeom prst="rect">
             <a:avLst/>
@@ -17486,7 +17486,7 @@
       </p:sp>
       <p:pic>
         <p:nvPicPr>
-          <p:cNvPr id="17" name="Picture 16" descr="442d6b470fc718df.png"/>
+          <p:cNvPr id="17" name="Picture 16" descr="381f7ba218ba42db.png"/>
           <p:cNvPicPr>
             <a:picLocks noChangeAspect="1"/>
           </p:cNvPicPr>
@@ -17501,7 +17501,7 @@
         <p:spPr>
           <a:xfrm>
             <a:off x="3938837" y="4454652"/>
-            <a:ext cx="3931920" cy="353568"/>
+            <a:ext cx="3934968" cy="353568"/>
           </a:xfrm>
           <a:prstGeom prst="rect">
             <a:avLst/>
@@ -17808,7 +17808,7 @@
       </p:cxnSp>
       <p:pic>
         <p:nvPicPr>
-          <p:cNvPr id="10" name="Picture 9" descr="397ff79ed1aedf39.png"/>
+          <p:cNvPr id="10" name="Picture 9" descr="ba972b1c36f6d10a.png"/>
           <p:cNvPicPr>
             <a:picLocks noChangeAspect="1"/>
           </p:cNvPicPr>
@@ -17822,8 +17822,8 @@
         </p:blipFill>
         <p:spPr>
           <a:xfrm>
-            <a:off x="1775460" y="2340864"/>
-            <a:ext cx="8610600" cy="411480"/>
+            <a:off x="1772411" y="2342388"/>
+            <a:ext cx="8616696" cy="408432"/>
           </a:xfrm>
           <a:prstGeom prst="rect">
             <a:avLst/>
@@ -17867,7 +17867,7 @@
       </p:sp>
       <p:pic>
         <p:nvPicPr>
-          <p:cNvPr id="12" name="Picture 11" descr="945c6ee9939237bc.png"/>
+          <p:cNvPr id="12" name="Picture 11" descr="7d1b404025905c6c.png"/>
           <p:cNvPicPr>
             <a:picLocks noChangeAspect="1"/>
           </p:cNvPicPr>
@@ -17881,8 +17881,8 @@
         </p:blipFill>
         <p:spPr>
           <a:xfrm>
-            <a:off x="4380559" y="3102864"/>
-            <a:ext cx="2420112" cy="350520"/>
+            <a:off x="4380559" y="3104388"/>
+            <a:ext cx="2420112" cy="347472"/>
           </a:xfrm>
           <a:prstGeom prst="rect">
             <a:avLst/>
@@ -17926,7 +17926,7 @@
       </p:sp>
       <p:pic>
         <p:nvPicPr>
-          <p:cNvPr id="14" name="Picture 13" descr="084422fcc8d0c20d.png"/>
+          <p:cNvPr id="14" name="Picture 13" descr="6a79f5fbe0b8b3a0.png"/>
           <p:cNvPicPr>
             <a:picLocks noChangeAspect="1"/>
           </p:cNvPicPr>
@@ -17940,8 +17940,8 @@
         </p:blipFill>
         <p:spPr>
           <a:xfrm>
-            <a:off x="987552" y="4471416"/>
-            <a:ext cx="3736848" cy="411480"/>
+            <a:off x="987552" y="4472940"/>
+            <a:ext cx="3739896" cy="408432"/>
           </a:xfrm>
           <a:prstGeom prst="rect">
             <a:avLst/>
@@ -17956,7 +17956,7 @@
         </p:nvSpPr>
         <p:spPr>
           <a:xfrm>
-            <a:off x="4724400" y="4448555"/>
+            <a:off x="4727448" y="4448555"/>
             <a:ext cx="1208603" cy="457200"/>
           </a:xfrm>
           <a:prstGeom prst="rect">
@@ -17985,7 +17985,7 @@
       </p:sp>
       <p:pic>
         <p:nvPicPr>
-          <p:cNvPr id="16" name="Picture 15" descr="36d129603f5ad60f.png"/>
+          <p:cNvPr id="16" name="Picture 15" descr="25abd5cd359cd538.png"/>
           <p:cNvPicPr>
             <a:picLocks noChangeAspect="1"/>
           </p:cNvPicPr>
@@ -17999,8 +17999,8 @@
         </p:blipFill>
         <p:spPr>
           <a:xfrm>
-            <a:off x="5795843" y="4471416"/>
-            <a:ext cx="2840736" cy="411480"/>
+            <a:off x="5798891" y="4472940"/>
+            <a:ext cx="2840736" cy="408432"/>
           </a:xfrm>
           <a:prstGeom prst="rect">
             <a:avLst/>
@@ -19157,7 +19157,7 @@
       </p:sp>
       <p:pic>
         <p:nvPicPr>
-          <p:cNvPr id="12" name="Picture 11" descr="1dab80afbf17752e.png"/>
+          <p:cNvPr id="12" name="Picture 11" descr="3ba570017fc9cc68.png"/>
           <p:cNvPicPr>
             <a:picLocks noChangeAspect="1"/>
           </p:cNvPicPr>
@@ -19216,7 +19216,7 @@
       </p:sp>
       <p:pic>
         <p:nvPicPr>
-          <p:cNvPr id="14" name="Picture 13" descr="672d0a52c53d682d.png"/>
+          <p:cNvPr id="14" name="Picture 13" descr="61e89ca5117b4f4c.png"/>
           <p:cNvPicPr>
             <a:picLocks noChangeAspect="1"/>
           </p:cNvPicPr>
@@ -19231,7 +19231,7 @@
         <p:spPr>
           <a:xfrm>
             <a:off x="8285661" y="4186428"/>
-            <a:ext cx="972311" cy="341376"/>
+            <a:ext cx="975360" cy="341376"/>
           </a:xfrm>
           <a:prstGeom prst="rect">
             <a:avLst/>
@@ -19825,7 +19825,7 @@
       </p:sp>
       <p:pic>
         <p:nvPicPr>
-          <p:cNvPr id="9" name="Picture 8" descr="2e30ee0ae8764250.png"/>
+          <p:cNvPr id="9" name="Picture 8" descr="1638dccdf2248bcf.png"/>
           <p:cNvPicPr>
             <a:picLocks noChangeAspect="1"/>
           </p:cNvPicPr>
@@ -19840,7 +19840,7 @@
         <p:spPr>
           <a:xfrm>
             <a:off x="1828800" y="1920240"/>
-            <a:ext cx="2874264" cy="347472"/>
+            <a:ext cx="2877312" cy="347472"/>
           </a:xfrm>
           <a:prstGeom prst="rect">
             <a:avLst/>
@@ -19855,8 +19855,8 @@
         </p:nvSpPr>
         <p:spPr>
           <a:xfrm>
-            <a:off x="5160264" y="1865376"/>
-            <a:ext cx="6224015" cy="502920"/>
+            <a:off x="5163312" y="1865376"/>
+            <a:ext cx="6220967" cy="502920"/>
           </a:xfrm>
           <a:prstGeom prst="rect">
             <a:avLst/>
@@ -19884,7 +19884,7 @@
       </p:sp>
       <p:pic>
         <p:nvPicPr>
-          <p:cNvPr id="11" name="Picture 10" descr="bf8e4f9dbe4a99c0.png"/>
+          <p:cNvPr id="11" name="Picture 10" descr="4bce5fcbc09ba5a5.png"/>
           <p:cNvPicPr>
             <a:picLocks noChangeAspect="1"/>
           </p:cNvPicPr>
@@ -19899,7 +19899,7 @@
         <p:spPr>
           <a:xfrm>
             <a:off x="1828800" y="2542032"/>
-            <a:ext cx="1331976" cy="347472"/>
+            <a:ext cx="1335024" cy="347472"/>
           </a:xfrm>
           <a:prstGeom prst="rect">
             <a:avLst/>
@@ -19914,7 +19914,7 @@
         </p:nvSpPr>
         <p:spPr>
           <a:xfrm>
-            <a:off x="3617976" y="2487168"/>
+            <a:off x="3621024" y="2487168"/>
             <a:ext cx="6400800" cy="502920"/>
           </a:xfrm>
           <a:prstGeom prst="rect">
@@ -19943,7 +19943,7 @@
       </p:sp>
       <p:pic>
         <p:nvPicPr>
-          <p:cNvPr id="13" name="Picture 12" descr="87121b7311d54a83.png"/>
+          <p:cNvPr id="13" name="Picture 12" descr="939d17ddf54fca0c.png"/>
           <p:cNvPicPr>
             <a:picLocks noChangeAspect="1"/>
           </p:cNvPicPr>
@@ -19958,7 +19958,7 @@
         <p:spPr>
           <a:xfrm>
             <a:off x="1828800" y="3163823"/>
-            <a:ext cx="1813560" cy="286512"/>
+            <a:ext cx="1810512" cy="286512"/>
           </a:xfrm>
           <a:prstGeom prst="rect">
             <a:avLst/>
@@ -19973,7 +19973,7 @@
         </p:nvSpPr>
         <p:spPr>
           <a:xfrm>
-            <a:off x="4099560" y="3078479"/>
+            <a:off x="4096512" y="3078479"/>
             <a:ext cx="6400800" cy="502920"/>
           </a:xfrm>
           <a:prstGeom prst="rect">

--- a/a7/build/out/u3/A7 3.01  Slides.pptx
+++ b/a7/build/out/u3/A7 3.01  Slides.pptx
@@ -10033,7 +10033,7 @@
                 </a:solidFill>
                 <a:latin typeface="Century Schoolbook"/>
               </a:rPr>
-              <a:t>4</a:t>
+              <a:t>16</a:t>
             </a:r>
             <a:r>
               <a:rPr sz="2400" b="0" i="0" baseline="30000">
@@ -10086,7 +10086,7 @@
                 </a:solidFill>
                 <a:latin typeface="Century Schoolbook"/>
               </a:rPr>
-              <a:t>4</a:t>
+              <a:t>8</a:t>
             </a:r>
             <a:r>
               <a:rPr sz="2400" b="0" i="0" baseline="30000">
@@ -10095,7 +10095,7 @@
                 </a:solidFill>
                 <a:latin typeface="Century Schoolbook"/>
               </a:rPr>
-              <a:t>6</a:t>
+              <a:t>5</a:t>
             </a:r>
           </a:p>
         </p:txBody>
@@ -10139,7 +10139,7 @@
                 </a:solidFill>
                 <a:latin typeface="Century Schoolbook"/>
               </a:rPr>
-              <a:t>16</a:t>
+              <a:t>4</a:t>
             </a:r>
             <a:r>
               <a:rPr sz="2400" b="0" i="0" baseline="30000">
@@ -10148,7 +10148,7 @@
                 </a:solidFill>
                 <a:latin typeface="Century Schoolbook"/>
               </a:rPr>
-              <a:t>5</a:t>
+              <a:t>6</a:t>
             </a:r>
           </a:p>
         </p:txBody>
@@ -10192,7 +10192,7 @@
                 </a:solidFill>
                 <a:latin typeface="Century Schoolbook"/>
               </a:rPr>
-              <a:t>8</a:t>
+              <a:t>4</a:t>
             </a:r>
             <a:r>
               <a:rPr sz="2400" b="0" i="0" baseline="30000">
@@ -10589,25 +10589,25 @@
             <a:r>
               <a:rPr sz="2400" b="1" i="0">
                 <a:solidFill>
-                  <a:srgbClr val="9E1B32"/>
+                  <a:srgbClr val="1A1A1A"/>
                 </a:solidFill>
                 <a:latin typeface="Century Schoolbook"/>
               </a:rPr>
               <a:t>A.   </a:t>
             </a:r>
             <a:r>
-              <a:rPr sz="2400" b="1" i="0">
-                <a:solidFill>
-                  <a:srgbClr val="9E1B32"/>
-                </a:solidFill>
-                <a:latin typeface="Century Schoolbook"/>
-              </a:rPr>
-              <a:t>4</a:t>
-            </a:r>
-            <a:r>
-              <a:rPr sz="2400" b="1" i="0" baseline="30000">
-                <a:solidFill>
-                  <a:srgbClr val="9E1B32"/>
+              <a:rPr sz="2400" b="0" i="0">
+                <a:solidFill>
+                  <a:srgbClr val="1A1A1A"/>
+                </a:solidFill>
+                <a:latin typeface="Century Schoolbook"/>
+              </a:rPr>
+              <a:t>16</a:t>
+            </a:r>
+            <a:r>
+              <a:rPr sz="2400" b="0" i="0" baseline="30000">
+                <a:solidFill>
+                  <a:srgbClr val="1A1A1A"/>
                 </a:solidFill>
                 <a:latin typeface="Century Schoolbook"/>
               </a:rPr>
@@ -10655,7 +10655,7 @@
                 </a:solidFill>
                 <a:latin typeface="Century Schoolbook"/>
               </a:rPr>
-              <a:t>4</a:t>
+              <a:t>8</a:t>
             </a:r>
             <a:r>
               <a:rPr sz="2400" b="0" i="0" baseline="30000">
@@ -10664,7 +10664,7 @@
                 </a:solidFill>
                 <a:latin typeface="Century Schoolbook"/>
               </a:rPr>
-              <a:t>6</a:t>
+              <a:t>5</a:t>
             </a:r>
           </a:p>
         </p:txBody>
@@ -10708,7 +10708,7 @@
                 </a:solidFill>
                 <a:latin typeface="Century Schoolbook"/>
               </a:rPr>
-              <a:t>16</a:t>
+              <a:t>4</a:t>
             </a:r>
             <a:r>
               <a:rPr sz="2400" b="0" i="0" baseline="30000">
@@ -10717,7 +10717,7 @@
                 </a:solidFill>
                 <a:latin typeface="Century Schoolbook"/>
               </a:rPr>
-              <a:t>5</a:t>
+              <a:t>6</a:t>
             </a:r>
           </a:p>
         </p:txBody>
@@ -10748,25 +10748,25 @@
             <a:r>
               <a:rPr sz="2400" b="1" i="0">
                 <a:solidFill>
-                  <a:srgbClr val="1A1A1A"/>
+                  <a:srgbClr val="9E1B32"/>
                 </a:solidFill>
                 <a:latin typeface="Century Schoolbook"/>
               </a:rPr>
               <a:t>D.   </a:t>
             </a:r>
             <a:r>
-              <a:rPr sz="2400" b="0" i="0">
-                <a:solidFill>
-                  <a:srgbClr val="1A1A1A"/>
-                </a:solidFill>
-                <a:latin typeface="Century Schoolbook"/>
-              </a:rPr>
-              <a:t>8</a:t>
-            </a:r>
-            <a:r>
-              <a:rPr sz="2400" b="0" i="0" baseline="30000">
-                <a:solidFill>
-                  <a:srgbClr val="1A1A1A"/>
+              <a:rPr sz="2400" b="1" i="0">
+                <a:solidFill>
+                  <a:srgbClr val="9E1B32"/>
+                </a:solidFill>
+                <a:latin typeface="Century Schoolbook"/>
+              </a:rPr>
+              <a:t>4</a:t>
+            </a:r>
+            <a:r>
+              <a:rPr sz="2400" b="1" i="0" baseline="30000">
+                <a:solidFill>
+                  <a:srgbClr val="9E1B32"/>
                 </a:solidFill>
                 <a:latin typeface="Century Schoolbook"/>
               </a:rPr>
@@ -10805,7 +10805,7 @@
                 </a:solidFill>
                 <a:latin typeface="Century Schoolbook"/>
               </a:rPr>
-              <a:t>Answer:   A — 4</a:t>
+              <a:t>Answer:   D — 4</a:t>
             </a:r>
             <a:r>
               <a:rPr sz="3200" b="1" i="0" baseline="30000">
@@ -11189,7 +11189,7 @@
                 </a:solidFill>
                 <a:latin typeface="Century Schoolbook"/>
               </a:rPr>
-              <a:t>6</a:t>
+              <a:t>5</a:t>
             </a:r>
           </a:p>
         </p:txBody>
@@ -11233,7 +11233,7 @@
                 </a:solidFill>
                 <a:latin typeface="Century Schoolbook"/>
               </a:rPr>
-              <a:t>2</a:t>
+              <a:t>4</a:t>
             </a:r>
             <a:r>
               <a:rPr sz="2400" b="0" i="0" baseline="30000">
@@ -11242,7 +11242,7 @@
                 </a:solidFill>
                 <a:latin typeface="Century Schoolbook"/>
               </a:rPr>
-              <a:t>5</a:t>
+              <a:t>6</a:t>
             </a:r>
           </a:p>
         </p:txBody>
@@ -11286,7 +11286,7 @@
                 </a:solidFill>
                 <a:latin typeface="Century Schoolbook"/>
               </a:rPr>
-              <a:t>4</a:t>
+              <a:t>2</a:t>
             </a:r>
             <a:r>
               <a:rPr sz="2400" b="0" i="0" baseline="30000">
@@ -11736,29 +11736,29 @@
             <a:r>
               <a:rPr sz="2400" b="1" i="0">
                 <a:solidFill>
-                  <a:srgbClr val="9E1B32"/>
+                  <a:srgbClr val="1A1A1A"/>
                 </a:solidFill>
                 <a:latin typeface="Century Schoolbook"/>
               </a:rPr>
               <a:t>A.   </a:t>
             </a:r>
             <a:r>
-              <a:rPr sz="2400" b="1" i="0">
-                <a:solidFill>
-                  <a:srgbClr val="9E1B32"/>
+              <a:rPr sz="2400" b="0" i="0">
+                <a:solidFill>
+                  <a:srgbClr val="1A1A1A"/>
                 </a:solidFill>
                 <a:latin typeface="Century Schoolbook"/>
               </a:rPr>
               <a:t>2</a:t>
             </a:r>
             <a:r>
-              <a:rPr sz="2400" b="1" i="0" baseline="30000">
-                <a:solidFill>
-                  <a:srgbClr val="9E1B32"/>
-                </a:solidFill>
-                <a:latin typeface="Century Schoolbook"/>
-              </a:rPr>
-              <a:t>6</a:t>
+              <a:rPr sz="2400" b="0" i="0" baseline="30000">
+                <a:solidFill>
+                  <a:srgbClr val="1A1A1A"/>
+                </a:solidFill>
+                <a:latin typeface="Century Schoolbook"/>
+              </a:rPr>
+              <a:t>5</a:t>
             </a:r>
           </a:p>
         </p:txBody>
@@ -11802,7 +11802,7 @@
                 </a:solidFill>
                 <a:latin typeface="Century Schoolbook"/>
               </a:rPr>
-              <a:t>2</a:t>
+              <a:t>4</a:t>
             </a:r>
             <a:r>
               <a:rPr sz="2400" b="0" i="0" baseline="30000">
@@ -11811,7 +11811,7 @@
                 </a:solidFill>
                 <a:latin typeface="Century Schoolbook"/>
               </a:rPr>
-              <a:t>5</a:t>
+              <a:t>6</a:t>
             </a:r>
           </a:p>
         </p:txBody>
@@ -11842,25 +11842,25 @@
             <a:r>
               <a:rPr sz="2400" b="1" i="0">
                 <a:solidFill>
-                  <a:srgbClr val="1A1A1A"/>
+                  <a:srgbClr val="9E1B32"/>
                 </a:solidFill>
                 <a:latin typeface="Century Schoolbook"/>
               </a:rPr>
               <a:t>C.   </a:t>
             </a:r>
             <a:r>
-              <a:rPr sz="2400" b="0" i="0">
-                <a:solidFill>
-                  <a:srgbClr val="1A1A1A"/>
-                </a:solidFill>
-                <a:latin typeface="Century Schoolbook"/>
-              </a:rPr>
-              <a:t>4</a:t>
-            </a:r>
-            <a:r>
-              <a:rPr sz="2400" b="0" i="0" baseline="30000">
-                <a:solidFill>
-                  <a:srgbClr val="1A1A1A"/>
+              <a:rPr sz="2400" b="1" i="0">
+                <a:solidFill>
+                  <a:srgbClr val="9E1B32"/>
+                </a:solidFill>
+                <a:latin typeface="Century Schoolbook"/>
+              </a:rPr>
+              <a:t>2</a:t>
+            </a:r>
+            <a:r>
+              <a:rPr sz="2400" b="1" i="0" baseline="30000">
+                <a:solidFill>
+                  <a:srgbClr val="9E1B32"/>
                 </a:solidFill>
                 <a:latin typeface="Century Schoolbook"/>
               </a:rPr>
@@ -11952,7 +11952,7 @@
                 </a:solidFill>
                 <a:latin typeface="Century Schoolbook"/>
               </a:rPr>
-              <a:t>Answer:   A — 2</a:t>
+              <a:t>Answer:   C — 2</a:t>
             </a:r>
             <a:r>
               <a:rPr sz="3200" b="1" i="0" baseline="30000">

--- a/a7/build/out/u3/A7 3.01  Slides.pptx
+++ b/a7/build/out/u3/A7 3.01  Slides.pptx
@@ -6719,8 +6719,8 @@
         </p:nvSpPr>
         <p:spPr>
           <a:xfrm>
-            <a:off x="2145753" y="2171700"/>
-            <a:ext cx="5826384" cy="457200"/>
+            <a:off x="1234440" y="1851660"/>
+            <a:ext cx="3271865" cy="457200"/>
           </a:xfrm>
           <a:prstGeom prst="rect">
             <a:avLst/>
@@ -6735,20 +6735,20 @@
           <a:p>
             <a:pPr algn="l"/>
             <a:r>
-              <a:rPr sz="2600" b="0" i="0">
+              <a:rPr sz="2400" b="0" i="0">
                 <a:solidFill>
                   <a:srgbClr val="1A1A1A"/>
                 </a:solidFill>
                 <a:latin typeface="Century Schoolbook"/>
               </a:rPr>
-              <a:t>A tile pattern grows by a factor of  </a:t>
+              <a:t>A photo is enlarged  </a:t>
             </a:r>
           </a:p>
         </p:txBody>
       </p:sp>
       <p:pic>
         <p:nvPicPr>
-          <p:cNvPr id="10" name="Picture 9" descr="c0129e6e5f8235a4.png"/>
+          <p:cNvPr id="10" name="Picture 9" descr="d5ca6e2822ee53f9.png"/>
           <p:cNvPicPr>
             <a:picLocks noChangeAspect="1"/>
           </p:cNvPicPr>
@@ -6762,8 +6762,8 @@
         </p:blipFill>
         <p:spPr>
           <a:xfrm>
-            <a:off x="7834978" y="2231136"/>
-            <a:ext cx="335280" cy="338328"/>
+            <a:off x="4369145" y="1941575"/>
+            <a:ext cx="268224" cy="277368"/>
           </a:xfrm>
           <a:prstGeom prst="rect">
             <a:avLst/>
@@ -6778,8 +6778,8 @@
         </p:nvSpPr>
         <p:spPr>
           <a:xfrm>
-            <a:off x="8170258" y="2171700"/>
-            <a:ext cx="1982668" cy="457200"/>
+            <a:off x="4637369" y="1851660"/>
+            <a:ext cx="2255431" cy="457200"/>
           </a:xfrm>
           <a:prstGeom prst="rect">
             <a:avLst/>
@@ -6794,55 +6794,20 @@
           <a:p>
             <a:pPr algn="l"/>
             <a:r>
-              <a:rPr sz="2600" b="0" i="0">
+              <a:rPr sz="2400" b="0" i="0">
                 <a:solidFill>
                   <a:srgbClr val="1A1A1A"/>
                 </a:solidFill>
                 <a:latin typeface="Century Schoolbook"/>
               </a:rPr>
-              <a:t>  one week,</a:t>
-            </a:r>
-          </a:p>
-        </p:txBody>
-      </p:sp>
-      <p:sp>
-        <p:nvSpPr>
-          <p:cNvPr id="12" name="TextBox 11"/>
-          <p:cNvSpPr txBox="1"/>
-          <p:nvPr/>
-        </p:nvSpPr>
-        <p:spPr>
-          <a:xfrm>
-            <a:off x="2110520" y="2857500"/>
-            <a:ext cx="1485415" cy="457200"/>
-          </a:xfrm>
-          <a:prstGeom prst="rect">
-            <a:avLst/>
-          </a:prstGeom>
-          <a:noFill/>
-        </p:spPr>
-        <p:txBody>
-          <a:bodyPr wrap="none" lIns="45720" rIns="45720" tIns="18288" bIns="18288" anchor="ctr">
-            <a:noAutofit/>
-          </a:bodyPr>
-          <a:lstStyle/>
-          <a:p>
-            <a:pPr algn="l"/>
-            <a:r>
-              <a:rPr sz="2600" b="0" i="0">
-                <a:solidFill>
-                  <a:srgbClr val="1A1A1A"/>
-                </a:solidFill>
-                <a:latin typeface="Century Schoolbook"/>
-              </a:rPr>
-              <a:t>and by  </a:t>
+              <a:t>  times, then  </a:t>
             </a:r>
           </a:p>
         </p:txBody>
       </p:sp>
       <p:pic>
         <p:nvPicPr>
-          <p:cNvPr id="13" name="Picture 12" descr="1f70e4cbe52b3701.png"/>
+          <p:cNvPr id="12" name="Picture 11" descr="ad43ae3bbc8b2264.png"/>
           <p:cNvPicPr>
             <a:picLocks noChangeAspect="1"/>
           </p:cNvPicPr>
@@ -6856,8 +6821,8 @@
         </p:blipFill>
         <p:spPr>
           <a:xfrm>
-            <a:off x="3458776" y="2918460"/>
-            <a:ext cx="335280" cy="335280"/>
+            <a:off x="6755640" y="1943100"/>
+            <a:ext cx="268224" cy="274320"/>
           </a:xfrm>
           <a:prstGeom prst="rect">
             <a:avLst/>
@@ -6866,14 +6831,14 @@
       </p:pic>
       <p:sp>
         <p:nvSpPr>
-          <p:cNvPr id="14" name="TextBox 13"/>
-          <p:cNvSpPr txBox="1"/>
-          <p:nvPr/>
-        </p:nvSpPr>
-        <p:spPr>
-          <a:xfrm>
-            <a:off x="3794056" y="2857500"/>
-            <a:ext cx="6394102" cy="457200"/>
+          <p:cNvPr id="13" name="TextBox 12"/>
+          <p:cNvSpPr txBox="1"/>
+          <p:nvPr/>
+        </p:nvSpPr>
+        <p:spPr>
+          <a:xfrm>
+            <a:off x="7023864" y="1851660"/>
+            <a:ext cx="2149155" cy="457200"/>
           </a:xfrm>
           <a:prstGeom prst="rect">
             <a:avLst/>
@@ -6888,55 +6853,208 @@
           <a:p>
             <a:pPr algn="l"/>
             <a:r>
-              <a:rPr sz="2600" b="0" i="0">
+              <a:rPr sz="2400" b="0" i="0">
                 <a:solidFill>
                   <a:srgbClr val="1A1A1A"/>
                 </a:solidFill>
                 <a:latin typeface="Century Schoolbook"/>
               </a:rPr>
-              <a:t>  the next week. It started with 9 tiles.</a:t>
-            </a:r>
-          </a:p>
-        </p:txBody>
-      </p:sp>
-      <p:sp>
-        <p:nvSpPr>
-          <p:cNvPr id="15" name="TextBox 14"/>
-          <p:cNvSpPr txBox="1"/>
-          <p:nvPr/>
-        </p:nvSpPr>
-        <p:spPr>
-          <a:xfrm>
-            <a:off x="777240" y="3566160"/>
-            <a:ext cx="10607040" cy="411480"/>
-          </a:xfrm>
-          <a:prstGeom prst="rect">
-            <a:avLst/>
-          </a:prstGeom>
-          <a:noFill/>
-        </p:spPr>
-        <p:txBody>
-          <a:bodyPr wrap="square" lIns="45720" rIns="45720" tIns="18288" bIns="18288" anchor="t">
-            <a:spAutoFit/>
-          </a:bodyPr>
-          <a:lstStyle/>
-          <a:p>
-            <a:pPr algn="ctr"/>
-            <a:r>
-              <a:rPr sz="2300" b="0" i="0">
+              <a:t>  times more.</a:t>
+            </a:r>
+          </a:p>
+        </p:txBody>
+      </p:sp>
+      <p:sp>
+        <p:nvSpPr>
+          <p:cNvPr id="14" name="TextBox 13"/>
+          <p:cNvSpPr txBox="1"/>
+          <p:nvPr/>
+        </p:nvSpPr>
+        <p:spPr>
+          <a:xfrm>
+            <a:off x="1234440" y="2464308"/>
+            <a:ext cx="1850257" cy="457200"/>
+          </a:xfrm>
+          <a:prstGeom prst="rect">
+            <a:avLst/>
+          </a:prstGeom>
+          <a:noFill/>
+        </p:spPr>
+        <p:txBody>
+          <a:bodyPr wrap="none" lIns="45720" rIns="45720" tIns="18288" bIns="18288" anchor="ctr">
+            <a:noAutofit/>
+          </a:bodyPr>
+          <a:lstStyle/>
+          <a:p>
+            <a:pPr algn="l"/>
+            <a:r>
+              <a:rPr sz="2400" b="0" i="0">
                 <a:solidFill>
                   <a:srgbClr val="1A1A1A"/>
                 </a:solidFill>
                 <a:latin typeface="Century Schoolbook"/>
               </a:rPr>
-              <a:t>Write the two-week growth factor as one power, then find its value.</a:t>
-            </a:r>
-          </a:p>
-        </p:txBody>
-      </p:sp>
+              <a:t>In all it is  </a:t>
+            </a:r>
+          </a:p>
+        </p:txBody>
+      </p:sp>
+      <p:pic>
+        <p:nvPicPr>
+          <p:cNvPr id="15" name="Picture 14" descr="b8828baab3c2353b.png"/>
+          <p:cNvPicPr>
+            <a:picLocks noChangeAspect="1"/>
+          </p:cNvPicPr>
+          <p:nvPr/>
+        </p:nvPicPr>
+        <p:blipFill>
+          <a:blip r:embed="rId4"/>
+          <a:stretch>
+            <a:fillRect/>
+          </a:stretch>
+        </p:blipFill>
+        <p:spPr>
+          <a:xfrm>
+            <a:off x="2947537" y="2555748"/>
+            <a:ext cx="758952" cy="274320"/>
+          </a:xfrm>
+          <a:prstGeom prst="rect">
+            <a:avLst/>
+          </a:prstGeom>
+        </p:spPr>
+      </p:pic>
       <p:sp>
         <p:nvSpPr>
           <p:cNvPr id="16" name="TextBox 15"/>
+          <p:cNvSpPr txBox="1"/>
+          <p:nvPr/>
+        </p:nvSpPr>
+        <p:spPr>
+          <a:xfrm>
+            <a:off x="3706489" y="2464308"/>
+            <a:ext cx="5894641" cy="457200"/>
+          </a:xfrm>
+          <a:prstGeom prst="rect">
+            <a:avLst/>
+          </a:prstGeom>
+          <a:noFill/>
+        </p:spPr>
+        <p:txBody>
+          <a:bodyPr wrap="none" lIns="45720" rIns="45720" tIns="18288" bIns="18288" anchor="ctr">
+            <a:noAutofit/>
+          </a:bodyPr>
+          <a:lstStyle/>
+          <a:p>
+            <a:pPr algn="l"/>
+            <a:r>
+              <a:rPr sz="2400" b="0" i="0">
+                <a:solidFill>
+                  <a:srgbClr val="1A1A1A"/>
+                </a:solidFill>
+                <a:latin typeface="Century Schoolbook"/>
+              </a:rPr>
+              <a:t>  times bigger. The photo is 9 cm wide.</a:t>
+            </a:r>
+          </a:p>
+        </p:txBody>
+      </p:sp>
+      <p:sp>
+        <p:nvSpPr>
+          <p:cNvPr id="17" name="TextBox 16"/>
+          <p:cNvSpPr txBox="1"/>
+          <p:nvPr/>
+        </p:nvSpPr>
+        <p:spPr>
+          <a:xfrm>
+            <a:off x="1234440" y="3076956"/>
+            <a:ext cx="1316509" cy="457200"/>
+          </a:xfrm>
+          <a:prstGeom prst="rect">
+            <a:avLst/>
+          </a:prstGeom>
+          <a:noFill/>
+        </p:spPr>
+        <p:txBody>
+          <a:bodyPr wrap="none" lIns="45720" rIns="45720" tIns="18288" bIns="18288" anchor="ctr">
+            <a:noAutofit/>
+          </a:bodyPr>
+          <a:lstStyle/>
+          <a:p>
+            <a:pPr algn="l"/>
+            <a:r>
+              <a:rPr sz="2400" b="1" i="0">
+                <a:solidFill>
+                  <a:srgbClr val="1A1A1A"/>
+                </a:solidFill>
+                <a:latin typeface="Century Schoolbook"/>
+              </a:rPr>
+              <a:t>Write  </a:t>
+            </a:r>
+          </a:p>
+        </p:txBody>
+      </p:sp>
+      <p:pic>
+        <p:nvPicPr>
+          <p:cNvPr id="18" name="Picture 17" descr="b8828baab3c2353b.png"/>
+          <p:cNvPicPr>
+            <a:picLocks noChangeAspect="1"/>
+          </p:cNvPicPr>
+          <p:nvPr/>
+        </p:nvPicPr>
+        <p:blipFill>
+          <a:blip r:embed="rId4"/>
+          <a:stretch>
+            <a:fillRect/>
+          </a:stretch>
+        </p:blipFill>
+        <p:spPr>
+          <a:xfrm>
+            <a:off x="2413789" y="3168396"/>
+            <a:ext cx="758952" cy="274320"/>
+          </a:xfrm>
+          <a:prstGeom prst="rect">
+            <a:avLst/>
+          </a:prstGeom>
+        </p:spPr>
+      </p:pic>
+      <p:sp>
+        <p:nvSpPr>
+          <p:cNvPr id="19" name="TextBox 18"/>
+          <p:cNvSpPr txBox="1"/>
+          <p:nvPr/>
+        </p:nvSpPr>
+        <p:spPr>
+          <a:xfrm>
+            <a:off x="3172741" y="3076956"/>
+            <a:ext cx="5959742" cy="457200"/>
+          </a:xfrm>
+          <a:prstGeom prst="rect">
+            <a:avLst/>
+          </a:prstGeom>
+          <a:noFill/>
+        </p:spPr>
+        <p:txBody>
+          <a:bodyPr wrap="none" lIns="45720" rIns="45720" tIns="18288" bIns="18288" anchor="ctr">
+            <a:noAutofit/>
+          </a:bodyPr>
+          <a:lstStyle/>
+          <a:p>
+            <a:pPr algn="l"/>
+            <a:r>
+              <a:rPr sz="2400" b="1" i="0">
+                <a:solidFill>
+                  <a:srgbClr val="1A1A1A"/>
+                </a:solidFill>
+                <a:latin typeface="Century Schoolbook"/>
+              </a:rPr>
+              <a:t>  as one power. Then find its value.</a:t>
+            </a:r>
+          </a:p>
+        </p:txBody>
+      </p:sp>
+      <p:sp>
+        <p:nvSpPr>
+          <p:cNvPr id="20" name="TextBox 19"/>
           <p:cNvSpPr txBox="1"/>
           <p:nvPr/>
         </p:nvSpPr>
@@ -6965,41 +7083,6 @@
                 <a:latin typeface="Century Schoolbook"/>
               </a:rPr>
               <a:t>Answer it.</a:t>
-            </a:r>
-          </a:p>
-        </p:txBody>
-      </p:sp>
-      <p:sp>
-        <p:nvSpPr>
-          <p:cNvPr id="17" name="TextBox 16"/>
-          <p:cNvSpPr txBox="1"/>
-          <p:nvPr/>
-        </p:nvSpPr>
-        <p:spPr>
-          <a:xfrm>
-            <a:off x="777240" y="4828032"/>
-            <a:ext cx="10607040" cy="365760"/>
-          </a:xfrm>
-          <a:prstGeom prst="rect">
-            <a:avLst/>
-          </a:prstGeom>
-          <a:noFill/>
-        </p:spPr>
-        <p:txBody>
-          <a:bodyPr wrap="square" lIns="45720" rIns="45720" tIns="18288" bIns="18288" anchor="t">
-            <a:spAutoFit/>
-          </a:bodyPr>
-          <a:lstStyle/>
-          <a:p>
-            <a:pPr algn="ctr"/>
-            <a:r>
-              <a:rPr sz="1900" b="0" i="1">
-                <a:solidFill>
-                  <a:srgbClr val="6B6B6B"/>
-                </a:solidFill>
-                <a:latin typeface="Century Schoolbook"/>
-              </a:rPr>
-              <a:t>Find the value.</a:t>
             </a:r>
           </a:p>
         </p:txBody>
@@ -7275,8 +7358,8 @@
         </p:nvSpPr>
         <p:spPr>
           <a:xfrm>
-            <a:off x="2145753" y="2080260"/>
-            <a:ext cx="5826384" cy="457200"/>
+            <a:off x="1234440" y="1851660"/>
+            <a:ext cx="3271865" cy="457200"/>
           </a:xfrm>
           <a:prstGeom prst="rect">
             <a:avLst/>
@@ -7291,20 +7374,20 @@
           <a:p>
             <a:pPr algn="l"/>
             <a:r>
-              <a:rPr sz="2600" b="0" i="0">
+              <a:rPr sz="2400" b="0" i="0">
                 <a:solidFill>
                   <a:srgbClr val="1A1A1A"/>
                 </a:solidFill>
                 <a:latin typeface="Century Schoolbook"/>
               </a:rPr>
-              <a:t>A tile pattern grows by a factor of  </a:t>
+              <a:t>A photo is enlarged  </a:t>
             </a:r>
           </a:p>
         </p:txBody>
       </p:sp>
       <p:pic>
         <p:nvPicPr>
-          <p:cNvPr id="10" name="Picture 9" descr="1c425a5d0040b1cc.png"/>
+          <p:cNvPr id="10" name="Picture 9" descr="5257a77d61b89134.png"/>
           <p:cNvPicPr>
             <a:picLocks noChangeAspect="1"/>
           </p:cNvPicPr>
@@ -7318,8 +7401,8 @@
         </p:blipFill>
         <p:spPr>
           <a:xfrm>
-            <a:off x="7834978" y="2138171"/>
-            <a:ext cx="335280" cy="341376"/>
+            <a:off x="4369145" y="1943100"/>
+            <a:ext cx="274320" cy="274320"/>
           </a:xfrm>
           <a:prstGeom prst="rect">
             <a:avLst/>
@@ -7334,8 +7417,8 @@
         </p:nvSpPr>
         <p:spPr>
           <a:xfrm>
-            <a:off x="8170258" y="2080260"/>
-            <a:ext cx="1982668" cy="457200"/>
+            <a:off x="4643465" y="1851660"/>
+            <a:ext cx="2255431" cy="457200"/>
           </a:xfrm>
           <a:prstGeom prst="rect">
             <a:avLst/>
@@ -7350,55 +7433,20 @@
           <a:p>
             <a:pPr algn="l"/>
             <a:r>
-              <a:rPr sz="2600" b="0" i="0">
+              <a:rPr sz="2400" b="0" i="0">
                 <a:solidFill>
                   <a:srgbClr val="1A1A1A"/>
                 </a:solidFill>
                 <a:latin typeface="Century Schoolbook"/>
               </a:rPr>
-              <a:t>  one week,</a:t>
-            </a:r>
-          </a:p>
-        </p:txBody>
-      </p:sp>
-      <p:sp>
-        <p:nvSpPr>
-          <p:cNvPr id="12" name="TextBox 11"/>
-          <p:cNvSpPr txBox="1"/>
-          <p:nvPr/>
-        </p:nvSpPr>
-        <p:spPr>
-          <a:xfrm>
-            <a:off x="2110520" y="2766060"/>
-            <a:ext cx="1485415" cy="457200"/>
-          </a:xfrm>
-          <a:prstGeom prst="rect">
-            <a:avLst/>
-          </a:prstGeom>
-          <a:noFill/>
-        </p:spPr>
-        <p:txBody>
-          <a:bodyPr wrap="none" lIns="45720" rIns="45720" tIns="18288" bIns="18288" anchor="ctr">
-            <a:noAutofit/>
-          </a:bodyPr>
-          <a:lstStyle/>
-          <a:p>
-            <a:pPr algn="l"/>
-            <a:r>
-              <a:rPr sz="2600" b="0" i="0">
-                <a:solidFill>
-                  <a:srgbClr val="1A1A1A"/>
-                </a:solidFill>
-                <a:latin typeface="Century Schoolbook"/>
-              </a:rPr>
-              <a:t>and by  </a:t>
+              <a:t>  times, then  </a:t>
             </a:r>
           </a:p>
         </p:txBody>
       </p:sp>
       <p:pic>
         <p:nvPicPr>
-          <p:cNvPr id="13" name="Picture 12" descr="029fa134c9dbd6b4.png"/>
+          <p:cNvPr id="12" name="Picture 11" descr="fcc0337caf95aad5.png"/>
           <p:cNvPicPr>
             <a:picLocks noChangeAspect="1"/>
           </p:cNvPicPr>
@@ -7412,8 +7460,8 @@
         </p:blipFill>
         <p:spPr>
           <a:xfrm>
-            <a:off x="3458776" y="2827019"/>
-            <a:ext cx="335280" cy="335280"/>
+            <a:off x="6761736" y="1943100"/>
+            <a:ext cx="271272" cy="274320"/>
           </a:xfrm>
           <a:prstGeom prst="rect">
             <a:avLst/>
@@ -7422,14 +7470,14 @@
       </p:pic>
       <p:sp>
         <p:nvSpPr>
-          <p:cNvPr id="14" name="TextBox 13"/>
-          <p:cNvSpPr txBox="1"/>
-          <p:nvPr/>
-        </p:nvSpPr>
-        <p:spPr>
-          <a:xfrm>
-            <a:off x="3794056" y="2766060"/>
-            <a:ext cx="6394102" cy="457200"/>
+          <p:cNvPr id="13" name="TextBox 12"/>
+          <p:cNvSpPr txBox="1"/>
+          <p:nvPr/>
+        </p:nvSpPr>
+        <p:spPr>
+          <a:xfrm>
+            <a:off x="7033008" y="1851660"/>
+            <a:ext cx="2149155" cy="457200"/>
           </a:xfrm>
           <a:prstGeom prst="rect">
             <a:avLst/>
@@ -7444,27 +7492,215 @@
           <a:p>
             <a:pPr algn="l"/>
             <a:r>
-              <a:rPr sz="2600" b="0" i="0">
+              <a:rPr sz="2400" b="0" i="0">
                 <a:solidFill>
                   <a:srgbClr val="1A1A1A"/>
                 </a:solidFill>
                 <a:latin typeface="Century Schoolbook"/>
               </a:rPr>
-              <a:t>  the next week. It started with 9 tiles.</a:t>
-            </a:r>
-          </a:p>
-        </p:txBody>
-      </p:sp>
-      <p:sp>
-        <p:nvSpPr>
-          <p:cNvPr id="15" name="TextBox 14"/>
-          <p:cNvSpPr txBox="1"/>
-          <p:nvPr/>
-        </p:nvSpPr>
-        <p:spPr>
-          <a:xfrm>
-            <a:off x="777240" y="3474720"/>
-            <a:ext cx="10607040" cy="411480"/>
+              <a:t>  times more.</a:t>
+            </a:r>
+          </a:p>
+        </p:txBody>
+      </p:sp>
+      <p:sp>
+        <p:nvSpPr>
+          <p:cNvPr id="14" name="TextBox 13"/>
+          <p:cNvSpPr txBox="1"/>
+          <p:nvPr/>
+        </p:nvSpPr>
+        <p:spPr>
+          <a:xfrm>
+            <a:off x="1234440" y="2464308"/>
+            <a:ext cx="1850257" cy="457200"/>
+          </a:xfrm>
+          <a:prstGeom prst="rect">
+            <a:avLst/>
+          </a:prstGeom>
+          <a:noFill/>
+        </p:spPr>
+        <p:txBody>
+          <a:bodyPr wrap="none" lIns="45720" rIns="45720" tIns="18288" bIns="18288" anchor="ctr">
+            <a:noAutofit/>
+          </a:bodyPr>
+          <a:lstStyle/>
+          <a:p>
+            <a:pPr algn="l"/>
+            <a:r>
+              <a:rPr sz="2400" b="0" i="0">
+                <a:solidFill>
+                  <a:srgbClr val="1A1A1A"/>
+                </a:solidFill>
+                <a:latin typeface="Century Schoolbook"/>
+              </a:rPr>
+              <a:t>In all it is  </a:t>
+            </a:r>
+          </a:p>
+        </p:txBody>
+      </p:sp>
+      <p:pic>
+        <p:nvPicPr>
+          <p:cNvPr id="15" name="Picture 14" descr="f05927e7f6eb54a9.png"/>
+          <p:cNvPicPr>
+            <a:picLocks noChangeAspect="1"/>
+          </p:cNvPicPr>
+          <p:nvPr/>
+        </p:nvPicPr>
+        <p:blipFill>
+          <a:blip r:embed="rId4"/>
+          <a:stretch>
+            <a:fillRect/>
+          </a:stretch>
+        </p:blipFill>
+        <p:spPr>
+          <a:xfrm>
+            <a:off x="2947537" y="2555748"/>
+            <a:ext cx="762000" cy="274320"/>
+          </a:xfrm>
+          <a:prstGeom prst="rect">
+            <a:avLst/>
+          </a:prstGeom>
+        </p:spPr>
+      </p:pic>
+      <p:sp>
+        <p:nvSpPr>
+          <p:cNvPr id="16" name="TextBox 15"/>
+          <p:cNvSpPr txBox="1"/>
+          <p:nvPr/>
+        </p:nvSpPr>
+        <p:spPr>
+          <a:xfrm>
+            <a:off x="3709537" y="2464308"/>
+            <a:ext cx="5894641" cy="457200"/>
+          </a:xfrm>
+          <a:prstGeom prst="rect">
+            <a:avLst/>
+          </a:prstGeom>
+          <a:noFill/>
+        </p:spPr>
+        <p:txBody>
+          <a:bodyPr wrap="none" lIns="45720" rIns="45720" tIns="18288" bIns="18288" anchor="ctr">
+            <a:noAutofit/>
+          </a:bodyPr>
+          <a:lstStyle/>
+          <a:p>
+            <a:pPr algn="l"/>
+            <a:r>
+              <a:rPr sz="2400" b="0" i="0">
+                <a:solidFill>
+                  <a:srgbClr val="1A1A1A"/>
+                </a:solidFill>
+                <a:latin typeface="Century Schoolbook"/>
+              </a:rPr>
+              <a:t>  times bigger. The photo is 9 cm wide.</a:t>
+            </a:r>
+          </a:p>
+        </p:txBody>
+      </p:sp>
+      <p:sp>
+        <p:nvSpPr>
+          <p:cNvPr id="17" name="TextBox 16"/>
+          <p:cNvSpPr txBox="1"/>
+          <p:nvPr/>
+        </p:nvSpPr>
+        <p:spPr>
+          <a:xfrm>
+            <a:off x="1234440" y="3076956"/>
+            <a:ext cx="1316509" cy="457200"/>
+          </a:xfrm>
+          <a:prstGeom prst="rect">
+            <a:avLst/>
+          </a:prstGeom>
+          <a:noFill/>
+        </p:spPr>
+        <p:txBody>
+          <a:bodyPr wrap="none" lIns="45720" rIns="45720" tIns="18288" bIns="18288" anchor="ctr">
+            <a:noAutofit/>
+          </a:bodyPr>
+          <a:lstStyle/>
+          <a:p>
+            <a:pPr algn="l"/>
+            <a:r>
+              <a:rPr sz="2400" b="1" i="0">
+                <a:solidFill>
+                  <a:srgbClr val="1A1A1A"/>
+                </a:solidFill>
+                <a:latin typeface="Century Schoolbook"/>
+              </a:rPr>
+              <a:t>Write  </a:t>
+            </a:r>
+          </a:p>
+        </p:txBody>
+      </p:sp>
+      <p:pic>
+        <p:nvPicPr>
+          <p:cNvPr id="18" name="Picture 17" descr="f05927e7f6eb54a9.png"/>
+          <p:cNvPicPr>
+            <a:picLocks noChangeAspect="1"/>
+          </p:cNvPicPr>
+          <p:nvPr/>
+        </p:nvPicPr>
+        <p:blipFill>
+          <a:blip r:embed="rId4"/>
+          <a:stretch>
+            <a:fillRect/>
+          </a:stretch>
+        </p:blipFill>
+        <p:spPr>
+          <a:xfrm>
+            <a:off x="2413789" y="3168396"/>
+            <a:ext cx="762000" cy="274320"/>
+          </a:xfrm>
+          <a:prstGeom prst="rect">
+            <a:avLst/>
+          </a:prstGeom>
+        </p:spPr>
+      </p:pic>
+      <p:sp>
+        <p:nvSpPr>
+          <p:cNvPr id="19" name="TextBox 18"/>
+          <p:cNvSpPr txBox="1"/>
+          <p:nvPr/>
+        </p:nvSpPr>
+        <p:spPr>
+          <a:xfrm>
+            <a:off x="3175789" y="3076956"/>
+            <a:ext cx="5959742" cy="457200"/>
+          </a:xfrm>
+          <a:prstGeom prst="rect">
+            <a:avLst/>
+          </a:prstGeom>
+          <a:noFill/>
+        </p:spPr>
+        <p:txBody>
+          <a:bodyPr wrap="none" lIns="45720" rIns="45720" tIns="18288" bIns="18288" anchor="ctr">
+            <a:noAutofit/>
+          </a:bodyPr>
+          <a:lstStyle/>
+          <a:p>
+            <a:pPr algn="l"/>
+            <a:r>
+              <a:rPr sz="2400" b="1" i="0">
+                <a:solidFill>
+                  <a:srgbClr val="1A1A1A"/>
+                </a:solidFill>
+                <a:latin typeface="Century Schoolbook"/>
+              </a:rPr>
+              <a:t>  as one power. Then find its value.</a:t>
+            </a:r>
+          </a:p>
+        </p:txBody>
+      </p:sp>
+      <p:sp>
+        <p:nvSpPr>
+          <p:cNvPr id="20" name="TextBox 19"/>
+          <p:cNvSpPr txBox="1"/>
+          <p:nvPr/>
+        </p:nvSpPr>
+        <p:spPr>
+          <a:xfrm>
+            <a:off x="1828800" y="3803904"/>
+            <a:ext cx="8503920" cy="548640"/>
           </a:xfrm>
           <a:prstGeom prst="rect">
             <a:avLst/>
@@ -7479,41 +7715,6 @@
           <a:p>
             <a:pPr algn="ctr"/>
             <a:r>
-              <a:rPr sz="2300" b="0" i="0">
-                <a:solidFill>
-                  <a:srgbClr val="1A1A1A"/>
-                </a:solidFill>
-                <a:latin typeface="Century Schoolbook"/>
-              </a:rPr>
-              <a:t>Write the two-week growth factor as one power, then find its value.</a:t>
-            </a:r>
-          </a:p>
-        </p:txBody>
-      </p:sp>
-      <p:sp>
-        <p:nvSpPr>
-          <p:cNvPr id="16" name="TextBox 15"/>
-          <p:cNvSpPr txBox="1"/>
-          <p:nvPr/>
-        </p:nvSpPr>
-        <p:spPr>
-          <a:xfrm>
-            <a:off x="1828800" y="4041648"/>
-            <a:ext cx="8503920" cy="548640"/>
-          </a:xfrm>
-          <a:prstGeom prst="rect">
-            <a:avLst/>
-          </a:prstGeom>
-          <a:noFill/>
-        </p:spPr>
-        <p:txBody>
-          <a:bodyPr wrap="square" lIns="45720" rIns="45720" tIns="18288" bIns="18288" anchor="t">
-            <a:spAutoFit/>
-          </a:bodyPr>
-          <a:lstStyle/>
-          <a:p>
-            <a:pPr algn="ctr"/>
-            <a:r>
               <a:rPr sz="2400" b="0" i="0">
                 <a:solidFill>
                   <a:srgbClr val="6B6B6B"/>
@@ -7572,13 +7773,13 @@
       </p:sp>
       <p:sp>
         <p:nvSpPr>
-          <p:cNvPr id="17" name="TextBox 16"/>
-          <p:cNvSpPr txBox="1"/>
-          <p:nvPr/>
-        </p:nvSpPr>
-        <p:spPr>
-          <a:xfrm>
-            <a:off x="777240" y="4773168"/>
+          <p:cNvPr id="21" name="TextBox 20"/>
+          <p:cNvSpPr txBox="1"/>
+          <p:nvPr/>
+        </p:nvSpPr>
+        <p:spPr>
+          <a:xfrm>
+            <a:off x="777240" y="4663440"/>
             <a:ext cx="10607040" cy="548640"/>
           </a:xfrm>
           <a:prstGeom prst="rect">

--- a/a7/build/out/u3/A7 3.01  Slides.pptx
+++ b/a7/build/out/u3/A7 3.01  Slides.pptx
@@ -6720,7 +6720,7 @@
         <p:spPr>
           <a:xfrm>
             <a:off x="1234440" y="1851660"/>
-            <a:ext cx="3271865" cy="457200"/>
+            <a:ext cx="2440586" cy="457200"/>
           </a:xfrm>
           <a:prstGeom prst="rect">
             <a:avLst/>
@@ -6741,7 +6741,7 @@
                 </a:solidFill>
                 <a:latin typeface="Century Schoolbook"/>
               </a:rPr>
-              <a:t>A photo is enlarged  </a:t>
+              <a:t>A rectangle is  </a:t>
             </a:r>
           </a:p>
         </p:txBody>
@@ -6762,7 +6762,7 @@
         </p:blipFill>
         <p:spPr>
           <a:xfrm>
-            <a:off x="4369145" y="1941575"/>
+            <a:off x="3537866" y="1941575"/>
             <a:ext cx="268224" cy="277368"/>
           </a:xfrm>
           <a:prstGeom prst="rect">
@@ -6778,8 +6778,8 @@
         </p:nvSpPr>
         <p:spPr>
           <a:xfrm>
-            <a:off x="4637369" y="1851660"/>
-            <a:ext cx="2255431" cy="457200"/>
+            <a:off x="3806090" y="1851660"/>
+            <a:ext cx="3699967" cy="457200"/>
           </a:xfrm>
           <a:prstGeom prst="rect">
             <a:avLst/>
@@ -6800,7 +6800,7 @@
                 </a:solidFill>
                 <a:latin typeface="Century Schoolbook"/>
               </a:rPr>
-              <a:t>  times, then  </a:t>
+              <a:t>  centimeters long and  </a:t>
             </a:r>
           </a:p>
         </p:txBody>
@@ -6821,7 +6821,7 @@
         </p:blipFill>
         <p:spPr>
           <a:xfrm>
-            <a:off x="6755640" y="1943100"/>
+            <a:off x="7368898" y="1943100"/>
             <a:ext cx="268224" cy="274320"/>
           </a:xfrm>
           <a:prstGeom prst="rect">
@@ -6837,8 +6837,8 @@
         </p:nvSpPr>
         <p:spPr>
           <a:xfrm>
-            <a:off x="7023864" y="1851660"/>
-            <a:ext cx="2149155" cy="457200"/>
+            <a:off x="7637122" y="1851660"/>
+            <a:ext cx="3023764" cy="457200"/>
           </a:xfrm>
           <a:prstGeom prst="rect">
             <a:avLst/>
@@ -6859,7 +6859,7 @@
                 </a:solidFill>
                 <a:latin typeface="Century Schoolbook"/>
               </a:rPr>
-              <a:t>  times more.</a:t>
+              <a:t>  centimeters wide.</a:t>
             </a:r>
           </a:p>
         </p:txBody>
@@ -6872,17 +6872,17 @@
         </p:nvSpPr>
         <p:spPr>
           <a:xfrm>
-            <a:off x="1234440" y="2464308"/>
-            <a:ext cx="1850257" cy="457200"/>
-          </a:xfrm>
-          <a:prstGeom prst="rect">
-            <a:avLst/>
-          </a:prstGeom>
-          <a:noFill/>
-        </p:spPr>
-        <p:txBody>
-          <a:bodyPr wrap="none" lIns="45720" rIns="45720" tIns="18288" bIns="18288" anchor="ctr">
-            <a:noAutofit/>
+            <a:off x="1234440" y="2487168"/>
+            <a:ext cx="10058400" cy="429370"/>
+          </a:xfrm>
+          <a:prstGeom prst="rect">
+            <a:avLst/>
+          </a:prstGeom>
+          <a:noFill/>
+        </p:spPr>
+        <p:txBody>
+          <a:bodyPr wrap="square" lIns="45720" rIns="45720" tIns="18288" bIns="18288" anchor="t">
+            <a:spAutoFit/>
           </a:bodyPr>
           <a:lstStyle/>
           <a:p>
@@ -6894,167 +6894,49 @@
                 </a:solidFill>
                 <a:latin typeface="Century Schoolbook"/>
               </a:rPr>
-              <a:t>In all it is  </a:t>
-            </a:r>
-          </a:p>
-        </p:txBody>
-      </p:sp>
-      <p:pic>
-        <p:nvPicPr>
-          <p:cNvPr id="15" name="Picture 14" descr="b8828baab3c2353b.png"/>
-          <p:cNvPicPr>
-            <a:picLocks noChangeAspect="1"/>
-          </p:cNvPicPr>
-          <p:nvPr/>
-        </p:nvPicPr>
-        <p:blipFill>
-          <a:blip r:embed="rId4"/>
-          <a:stretch>
-            <a:fillRect/>
-          </a:stretch>
-        </p:blipFill>
-        <p:spPr>
-          <a:xfrm>
-            <a:off x="2947537" y="2555748"/>
-            <a:ext cx="758952" cy="274320"/>
-          </a:xfrm>
-          <a:prstGeom prst="rect">
-            <a:avLst/>
-          </a:prstGeom>
-        </p:spPr>
-      </p:pic>
+              <a:t>Its perimeter is 40 centimeters.</a:t>
+            </a:r>
+          </a:p>
+        </p:txBody>
+      </p:sp>
+      <p:sp>
+        <p:nvSpPr>
+          <p:cNvPr id="15" name="TextBox 14"/>
+          <p:cNvSpPr txBox="1"/>
+          <p:nvPr/>
+        </p:nvSpPr>
+        <p:spPr>
+          <a:xfrm>
+            <a:off x="1234440" y="3026266"/>
+            <a:ext cx="10058400" cy="429370"/>
+          </a:xfrm>
+          <a:prstGeom prst="rect">
+            <a:avLst/>
+          </a:prstGeom>
+          <a:noFill/>
+        </p:spPr>
+        <p:txBody>
+          <a:bodyPr wrap="square" lIns="45720" rIns="45720" tIns="18288" bIns="18288" anchor="t">
+            <a:spAutoFit/>
+          </a:bodyPr>
+          <a:lstStyle/>
+          <a:p>
+            <a:pPr algn="l"/>
+            <a:r>
+              <a:rPr sz="2400" b="1" i="0">
+                <a:solidFill>
+                  <a:srgbClr val="1A1A1A"/>
+                </a:solidFill>
+                <a:latin typeface="Century Schoolbook"/>
+              </a:rPr>
+              <a:t>What is the area of the rectangle, in square centimeters?</a:t>
+            </a:r>
+          </a:p>
+        </p:txBody>
+      </p:sp>
       <p:sp>
         <p:nvSpPr>
           <p:cNvPr id="16" name="TextBox 15"/>
-          <p:cNvSpPr txBox="1"/>
-          <p:nvPr/>
-        </p:nvSpPr>
-        <p:spPr>
-          <a:xfrm>
-            <a:off x="3706489" y="2464308"/>
-            <a:ext cx="5894641" cy="457200"/>
-          </a:xfrm>
-          <a:prstGeom prst="rect">
-            <a:avLst/>
-          </a:prstGeom>
-          <a:noFill/>
-        </p:spPr>
-        <p:txBody>
-          <a:bodyPr wrap="none" lIns="45720" rIns="45720" tIns="18288" bIns="18288" anchor="ctr">
-            <a:noAutofit/>
-          </a:bodyPr>
-          <a:lstStyle/>
-          <a:p>
-            <a:pPr algn="l"/>
-            <a:r>
-              <a:rPr sz="2400" b="0" i="0">
-                <a:solidFill>
-                  <a:srgbClr val="1A1A1A"/>
-                </a:solidFill>
-                <a:latin typeface="Century Schoolbook"/>
-              </a:rPr>
-              <a:t>  times bigger. The photo is 9 cm wide.</a:t>
-            </a:r>
-          </a:p>
-        </p:txBody>
-      </p:sp>
-      <p:sp>
-        <p:nvSpPr>
-          <p:cNvPr id="17" name="TextBox 16"/>
-          <p:cNvSpPr txBox="1"/>
-          <p:nvPr/>
-        </p:nvSpPr>
-        <p:spPr>
-          <a:xfrm>
-            <a:off x="1234440" y="3076956"/>
-            <a:ext cx="1316509" cy="457200"/>
-          </a:xfrm>
-          <a:prstGeom prst="rect">
-            <a:avLst/>
-          </a:prstGeom>
-          <a:noFill/>
-        </p:spPr>
-        <p:txBody>
-          <a:bodyPr wrap="none" lIns="45720" rIns="45720" tIns="18288" bIns="18288" anchor="ctr">
-            <a:noAutofit/>
-          </a:bodyPr>
-          <a:lstStyle/>
-          <a:p>
-            <a:pPr algn="l"/>
-            <a:r>
-              <a:rPr sz="2400" b="1" i="0">
-                <a:solidFill>
-                  <a:srgbClr val="1A1A1A"/>
-                </a:solidFill>
-                <a:latin typeface="Century Schoolbook"/>
-              </a:rPr>
-              <a:t>Write  </a:t>
-            </a:r>
-          </a:p>
-        </p:txBody>
-      </p:sp>
-      <p:pic>
-        <p:nvPicPr>
-          <p:cNvPr id="18" name="Picture 17" descr="b8828baab3c2353b.png"/>
-          <p:cNvPicPr>
-            <a:picLocks noChangeAspect="1"/>
-          </p:cNvPicPr>
-          <p:nvPr/>
-        </p:nvPicPr>
-        <p:blipFill>
-          <a:blip r:embed="rId4"/>
-          <a:stretch>
-            <a:fillRect/>
-          </a:stretch>
-        </p:blipFill>
-        <p:spPr>
-          <a:xfrm>
-            <a:off x="2413789" y="3168396"/>
-            <a:ext cx="758952" cy="274320"/>
-          </a:xfrm>
-          <a:prstGeom prst="rect">
-            <a:avLst/>
-          </a:prstGeom>
-        </p:spPr>
-      </p:pic>
-      <p:sp>
-        <p:nvSpPr>
-          <p:cNvPr id="19" name="TextBox 18"/>
-          <p:cNvSpPr txBox="1"/>
-          <p:nvPr/>
-        </p:nvSpPr>
-        <p:spPr>
-          <a:xfrm>
-            <a:off x="3172741" y="3076956"/>
-            <a:ext cx="5959742" cy="457200"/>
-          </a:xfrm>
-          <a:prstGeom prst="rect">
-            <a:avLst/>
-          </a:prstGeom>
-          <a:noFill/>
-        </p:spPr>
-        <p:txBody>
-          <a:bodyPr wrap="none" lIns="45720" rIns="45720" tIns="18288" bIns="18288" anchor="ctr">
-            <a:noAutofit/>
-          </a:bodyPr>
-          <a:lstStyle/>
-          <a:p>
-            <a:pPr algn="l"/>
-            <a:r>
-              <a:rPr sz="2400" b="1" i="0">
-                <a:solidFill>
-                  <a:srgbClr val="1A1A1A"/>
-                </a:solidFill>
-                <a:latin typeface="Century Schoolbook"/>
-              </a:rPr>
-              <a:t>  as one power. Then find its value.</a:t>
-            </a:r>
-          </a:p>
-        </p:txBody>
-      </p:sp>
-      <p:sp>
-        <p:nvSpPr>
-          <p:cNvPr id="20" name="TextBox 19"/>
           <p:cNvSpPr txBox="1"/>
           <p:nvPr/>
         </p:nvSpPr>
@@ -7359,7 +7241,7 @@
         <p:spPr>
           <a:xfrm>
             <a:off x="1234440" y="1851660"/>
-            <a:ext cx="3271865" cy="457200"/>
+            <a:ext cx="2440586" cy="457200"/>
           </a:xfrm>
           <a:prstGeom prst="rect">
             <a:avLst/>
@@ -7380,7 +7262,7 @@
                 </a:solidFill>
                 <a:latin typeface="Century Schoolbook"/>
               </a:rPr>
-              <a:t>A photo is enlarged  </a:t>
+              <a:t>A rectangle is  </a:t>
             </a:r>
           </a:p>
         </p:txBody>
@@ -7401,7 +7283,7 @@
         </p:blipFill>
         <p:spPr>
           <a:xfrm>
-            <a:off x="4369145" y="1943100"/>
+            <a:off x="3537866" y="1943100"/>
             <a:ext cx="274320" cy="274320"/>
           </a:xfrm>
           <a:prstGeom prst="rect">
@@ -7417,8 +7299,8 @@
         </p:nvSpPr>
         <p:spPr>
           <a:xfrm>
-            <a:off x="4643465" y="1851660"/>
-            <a:ext cx="2255431" cy="457200"/>
+            <a:off x="3812186" y="1851660"/>
+            <a:ext cx="3699967" cy="457200"/>
           </a:xfrm>
           <a:prstGeom prst="rect">
             <a:avLst/>
@@ -7439,7 +7321,7 @@
                 </a:solidFill>
                 <a:latin typeface="Century Schoolbook"/>
               </a:rPr>
-              <a:t>  times, then  </a:t>
+              <a:t>  centimeters long and  </a:t>
             </a:r>
           </a:p>
         </p:txBody>
@@ -7460,7 +7342,7 @@
         </p:blipFill>
         <p:spPr>
           <a:xfrm>
-            <a:off x="6761736" y="1943100"/>
+            <a:off x="7374994" y="1943100"/>
             <a:ext cx="271272" cy="274320"/>
           </a:xfrm>
           <a:prstGeom prst="rect">
@@ -7476,8 +7358,8 @@
         </p:nvSpPr>
         <p:spPr>
           <a:xfrm>
-            <a:off x="7033008" y="1851660"/>
-            <a:ext cx="2149155" cy="457200"/>
+            <a:off x="7646266" y="1851660"/>
+            <a:ext cx="3023764" cy="457200"/>
           </a:xfrm>
           <a:prstGeom prst="rect">
             <a:avLst/>
@@ -7498,7 +7380,7 @@
                 </a:solidFill>
                 <a:latin typeface="Century Schoolbook"/>
               </a:rPr>
-              <a:t>  times more.</a:t>
+              <a:t>  centimeters wide.</a:t>
             </a:r>
           </a:p>
         </p:txBody>
@@ -7511,17 +7393,17 @@
         </p:nvSpPr>
         <p:spPr>
           <a:xfrm>
-            <a:off x="1234440" y="2464308"/>
-            <a:ext cx="1850257" cy="457200"/>
-          </a:xfrm>
-          <a:prstGeom prst="rect">
-            <a:avLst/>
-          </a:prstGeom>
-          <a:noFill/>
-        </p:spPr>
-        <p:txBody>
-          <a:bodyPr wrap="none" lIns="45720" rIns="45720" tIns="18288" bIns="18288" anchor="ctr">
-            <a:noAutofit/>
+            <a:off x="1234440" y="2487168"/>
+            <a:ext cx="10058400" cy="429370"/>
+          </a:xfrm>
+          <a:prstGeom prst="rect">
+            <a:avLst/>
+          </a:prstGeom>
+          <a:noFill/>
+        </p:spPr>
+        <p:txBody>
+          <a:bodyPr wrap="square" lIns="45720" rIns="45720" tIns="18288" bIns="18288" anchor="t">
+            <a:spAutoFit/>
           </a:bodyPr>
           <a:lstStyle/>
           <a:p>
@@ -7533,35 +7415,46 @@
                 </a:solidFill>
                 <a:latin typeface="Century Schoolbook"/>
               </a:rPr>
-              <a:t>In all it is  </a:t>
-            </a:r>
-          </a:p>
-        </p:txBody>
-      </p:sp>
-      <p:pic>
-        <p:nvPicPr>
-          <p:cNvPr id="15" name="Picture 14" descr="f05927e7f6eb54a9.png"/>
-          <p:cNvPicPr>
-            <a:picLocks noChangeAspect="1"/>
-          </p:cNvPicPr>
-          <p:nvPr/>
-        </p:nvPicPr>
-        <p:blipFill>
-          <a:blip r:embed="rId4"/>
-          <a:stretch>
-            <a:fillRect/>
-          </a:stretch>
-        </p:blipFill>
-        <p:spPr>
-          <a:xfrm>
-            <a:off x="2947537" y="2555748"/>
-            <a:ext cx="762000" cy="274320"/>
-          </a:xfrm>
-          <a:prstGeom prst="rect">
-            <a:avLst/>
-          </a:prstGeom>
-        </p:spPr>
-      </p:pic>
+              <a:t>Its perimeter is 40 centimeters.</a:t>
+            </a:r>
+          </a:p>
+        </p:txBody>
+      </p:sp>
+      <p:sp>
+        <p:nvSpPr>
+          <p:cNvPr id="15" name="TextBox 14"/>
+          <p:cNvSpPr txBox="1"/>
+          <p:nvPr/>
+        </p:nvSpPr>
+        <p:spPr>
+          <a:xfrm>
+            <a:off x="1234440" y="3026266"/>
+            <a:ext cx="10058400" cy="429370"/>
+          </a:xfrm>
+          <a:prstGeom prst="rect">
+            <a:avLst/>
+          </a:prstGeom>
+          <a:noFill/>
+        </p:spPr>
+        <p:txBody>
+          <a:bodyPr wrap="square" lIns="45720" rIns="45720" tIns="18288" bIns="18288" anchor="t">
+            <a:spAutoFit/>
+          </a:bodyPr>
+          <a:lstStyle/>
+          <a:p>
+            <a:pPr algn="l"/>
+            <a:r>
+              <a:rPr sz="2400" b="1" i="0">
+                <a:solidFill>
+                  <a:srgbClr val="1A1A1A"/>
+                </a:solidFill>
+                <a:latin typeface="Century Schoolbook"/>
+              </a:rPr>
+              <a:t>What is the area of the rectangle, in square centimeters?</a:t>
+            </a:r>
+          </a:p>
+        </p:txBody>
+      </p:sp>
       <p:sp>
         <p:nvSpPr>
           <p:cNvPr id="16" name="TextBox 15"/>
@@ -7570,29 +7463,74 @@
         </p:nvSpPr>
         <p:spPr>
           <a:xfrm>
-            <a:off x="3709537" y="2464308"/>
-            <a:ext cx="5894641" cy="457200"/>
-          </a:xfrm>
-          <a:prstGeom prst="rect">
-            <a:avLst/>
-          </a:prstGeom>
-          <a:noFill/>
-        </p:spPr>
-        <p:txBody>
-          <a:bodyPr wrap="none" lIns="45720" rIns="45720" tIns="18288" bIns="18288" anchor="ctr">
-            <a:noAutofit/>
-          </a:bodyPr>
-          <a:lstStyle/>
-          <a:p>
-            <a:pPr algn="l"/>
+            <a:off x="1828800" y="3656804"/>
+            <a:ext cx="8503920" cy="548640"/>
+          </a:xfrm>
+          <a:prstGeom prst="rect">
+            <a:avLst/>
+          </a:prstGeom>
+          <a:noFill/>
+        </p:spPr>
+        <p:txBody>
+          <a:bodyPr wrap="square" lIns="45720" rIns="45720" tIns="18288" bIns="18288" anchor="t">
+            <a:spAutoFit/>
+          </a:bodyPr>
+          <a:lstStyle/>
+          <a:p>
+            <a:pPr algn="ctr"/>
             <a:r>
               <a:rPr sz="2400" b="0" i="0">
                 <a:solidFill>
-                  <a:srgbClr val="1A1A1A"/>
-                </a:solidFill>
-                <a:latin typeface="Century Schoolbook"/>
-              </a:rPr>
-              <a:t>  times bigger. The photo is 9 cm wide.</a:t>
+                  <a:srgbClr val="6B6B6B"/>
+                </a:solidFill>
+                <a:latin typeface="Century Schoolbook"/>
+              </a:rPr>
+              <a:t>2</a:t>
+            </a:r>
+            <a:r>
+              <a:rPr sz="2400" b="0" i="0" baseline="30000">
+                <a:solidFill>
+                  <a:srgbClr val="6B6B6B"/>
+                </a:solidFill>
+                <a:latin typeface="Century Schoolbook"/>
+              </a:rPr>
+              <a:t>4</a:t>
+            </a:r>
+            <a:r>
+              <a:rPr sz="2400" b="0" i="0">
+                <a:solidFill>
+                  <a:srgbClr val="6B6B6B"/>
+                </a:solidFill>
+                <a:latin typeface="Century Schoolbook"/>
+              </a:rPr>
+              <a:t> · 2</a:t>
+            </a:r>
+            <a:r>
+              <a:rPr sz="2400" b="0" i="0" baseline="30000">
+                <a:solidFill>
+                  <a:srgbClr val="6B6B6B"/>
+                </a:solidFill>
+                <a:latin typeface="Century Schoolbook"/>
+              </a:rPr>
+              <a:t>2</a:t>
+            </a:r>
+            <a:r>
+              <a:rPr sz="2400" b="0" i="0">
+                <a:solidFill>
+                  <a:srgbClr val="6B6B6B"/>
+                </a:solidFill>
+                <a:latin typeface="Century Schoolbook"/>
+              </a:rPr>
+              <a:t> = 2</a:t>
+            </a:r>
+            <a:r>
+              <a:rPr sz="2400" b="0" i="0" baseline="30000">
+                <a:solidFill>
+                  <a:srgbClr val="6B6B6B"/>
+                </a:solidFill>
+                <a:latin typeface="Century Schoolbook"/>
+              </a:rPr>
+              <a:t>6</a:t>
             </a:r>
           </a:p>
         </p:txBody>
@@ -7600,180 +7538,6 @@
       <p:sp>
         <p:nvSpPr>
           <p:cNvPr id="17" name="TextBox 16"/>
-          <p:cNvSpPr txBox="1"/>
-          <p:nvPr/>
-        </p:nvSpPr>
-        <p:spPr>
-          <a:xfrm>
-            <a:off x="1234440" y="3076956"/>
-            <a:ext cx="1316509" cy="457200"/>
-          </a:xfrm>
-          <a:prstGeom prst="rect">
-            <a:avLst/>
-          </a:prstGeom>
-          <a:noFill/>
-        </p:spPr>
-        <p:txBody>
-          <a:bodyPr wrap="none" lIns="45720" rIns="45720" tIns="18288" bIns="18288" anchor="ctr">
-            <a:noAutofit/>
-          </a:bodyPr>
-          <a:lstStyle/>
-          <a:p>
-            <a:pPr algn="l"/>
-            <a:r>
-              <a:rPr sz="2400" b="1" i="0">
-                <a:solidFill>
-                  <a:srgbClr val="1A1A1A"/>
-                </a:solidFill>
-                <a:latin typeface="Century Schoolbook"/>
-              </a:rPr>
-              <a:t>Write  </a:t>
-            </a:r>
-          </a:p>
-        </p:txBody>
-      </p:sp>
-      <p:pic>
-        <p:nvPicPr>
-          <p:cNvPr id="18" name="Picture 17" descr="f05927e7f6eb54a9.png"/>
-          <p:cNvPicPr>
-            <a:picLocks noChangeAspect="1"/>
-          </p:cNvPicPr>
-          <p:nvPr/>
-        </p:nvPicPr>
-        <p:blipFill>
-          <a:blip r:embed="rId4"/>
-          <a:stretch>
-            <a:fillRect/>
-          </a:stretch>
-        </p:blipFill>
-        <p:spPr>
-          <a:xfrm>
-            <a:off x="2413789" y="3168396"/>
-            <a:ext cx="762000" cy="274320"/>
-          </a:xfrm>
-          <a:prstGeom prst="rect">
-            <a:avLst/>
-          </a:prstGeom>
-        </p:spPr>
-      </p:pic>
-      <p:sp>
-        <p:nvSpPr>
-          <p:cNvPr id="19" name="TextBox 18"/>
-          <p:cNvSpPr txBox="1"/>
-          <p:nvPr/>
-        </p:nvSpPr>
-        <p:spPr>
-          <a:xfrm>
-            <a:off x="3175789" y="3076956"/>
-            <a:ext cx="5959742" cy="457200"/>
-          </a:xfrm>
-          <a:prstGeom prst="rect">
-            <a:avLst/>
-          </a:prstGeom>
-          <a:noFill/>
-        </p:spPr>
-        <p:txBody>
-          <a:bodyPr wrap="none" lIns="45720" rIns="45720" tIns="18288" bIns="18288" anchor="ctr">
-            <a:noAutofit/>
-          </a:bodyPr>
-          <a:lstStyle/>
-          <a:p>
-            <a:pPr algn="l"/>
-            <a:r>
-              <a:rPr sz="2400" b="1" i="0">
-                <a:solidFill>
-                  <a:srgbClr val="1A1A1A"/>
-                </a:solidFill>
-                <a:latin typeface="Century Schoolbook"/>
-              </a:rPr>
-              <a:t>  as one power. Then find its value.</a:t>
-            </a:r>
-          </a:p>
-        </p:txBody>
-      </p:sp>
-      <p:sp>
-        <p:nvSpPr>
-          <p:cNvPr id="20" name="TextBox 19"/>
-          <p:cNvSpPr txBox="1"/>
-          <p:nvPr/>
-        </p:nvSpPr>
-        <p:spPr>
-          <a:xfrm>
-            <a:off x="1828800" y="3803904"/>
-            <a:ext cx="8503920" cy="548640"/>
-          </a:xfrm>
-          <a:prstGeom prst="rect">
-            <a:avLst/>
-          </a:prstGeom>
-          <a:noFill/>
-        </p:spPr>
-        <p:txBody>
-          <a:bodyPr wrap="square" lIns="45720" rIns="45720" tIns="18288" bIns="18288" anchor="t">
-            <a:spAutoFit/>
-          </a:bodyPr>
-          <a:lstStyle/>
-          <a:p>
-            <a:pPr algn="ctr"/>
-            <a:r>
-              <a:rPr sz="2400" b="0" i="0">
-                <a:solidFill>
-                  <a:srgbClr val="6B6B6B"/>
-                </a:solidFill>
-                <a:latin typeface="Century Schoolbook"/>
-              </a:rPr>
-              <a:t>2</a:t>
-            </a:r>
-            <a:r>
-              <a:rPr sz="2400" b="0" i="0" baseline="30000">
-                <a:solidFill>
-                  <a:srgbClr val="6B6B6B"/>
-                </a:solidFill>
-                <a:latin typeface="Century Schoolbook"/>
-              </a:rPr>
-              <a:t>4</a:t>
-            </a:r>
-            <a:r>
-              <a:rPr sz="2400" b="0" i="0">
-                <a:solidFill>
-                  <a:srgbClr val="6B6B6B"/>
-                </a:solidFill>
-                <a:latin typeface="Century Schoolbook"/>
-              </a:rPr>
-              <a:t> · 2</a:t>
-            </a:r>
-            <a:r>
-              <a:rPr sz="2400" b="0" i="0" baseline="30000">
-                <a:solidFill>
-                  <a:srgbClr val="6B6B6B"/>
-                </a:solidFill>
-                <a:latin typeface="Century Schoolbook"/>
-              </a:rPr>
-              <a:t>2</a:t>
-            </a:r>
-            <a:r>
-              <a:rPr sz="2400" b="0" i="0">
-                <a:solidFill>
-                  <a:srgbClr val="6B6B6B"/>
-                </a:solidFill>
-                <a:latin typeface="Century Schoolbook"/>
-              </a:rPr>
-              <a:t> = 2</a:t>
-            </a:r>
-            <a:r>
-              <a:rPr sz="2400" b="0" i="0" baseline="30000">
-                <a:solidFill>
-                  <a:srgbClr val="6B6B6B"/>
-                </a:solidFill>
-                <a:latin typeface="Century Schoolbook"/>
-              </a:rPr>
-              <a:t>6</a:t>
-            </a:r>
-          </a:p>
-        </p:txBody>
-      </p:sp>
-      <p:sp>
-        <p:nvSpPr>
-          <p:cNvPr id="21" name="TextBox 20"/>
           <p:cNvSpPr txBox="1"/>
           <p:nvPr/>
         </p:nvSpPr>
@@ -7819,7 +7583,7 @@
                 </a:solidFill>
                 <a:latin typeface="Century Schoolbook"/>
               </a:rPr>
-              <a:t> = 64</a:t>
+              <a:t> = 64 square centimeters</a:t>
             </a:r>
           </a:p>
         </p:txBody>
